--- a/Boek 2 - Kosten, opbrengsten, elasticiteit en surplus/edities/chat-2026/bronnen/H3/paragrafen/2.3.1 Consumentensurplus/2.3.1 Consumentensurplus – presentatie.pptx
+++ b/Boek 2 - Kosten, opbrengsten, elasticiteit en surplus/edities/chat-2026/bronnen/H3/paragrafen/2.3.1 Consumentensurplus/2.3.1 Consumentensurplus – presentatie.pptx
@@ -2,37 +2,37 @@
 <file path=ppt/presentation.xml><?xml version="1.0" encoding="utf-8"?>
 <p:presentation xmlns:p="http://schemas.openxmlformats.org/presentationml/2006/main">
   <p:sldMasterIdLst>
-    <p:sldMasterId xmlns:r="http://schemas.openxmlformats.org/officeDocument/2006/relationships" id="2147483648" r:id="R69295d33d1a44402"/>
+    <p:sldMasterId xmlns:r="http://schemas.openxmlformats.org/officeDocument/2006/relationships" id="2147483648" r:id="R51da9b2b5a8e4b35"/>
   </p:sldMasterIdLst>
   <p:notesMasterIdLst>
-    <p:notesMasterId xmlns:r="http://schemas.openxmlformats.org/officeDocument/2006/relationships" r:id="Rf1e077cd12744580"/>
+    <p:notesMasterId xmlns:r="http://schemas.openxmlformats.org/officeDocument/2006/relationships" r:id="R5ff88a6bf5a246bc"/>
   </p:notesMasterIdLst>
   <p:sldIdLst>
-    <p:sldId xmlns:r="http://schemas.openxmlformats.org/officeDocument/2006/relationships" id="256" r:id="R868449cc252e4a3c"/>
-    <p:sldId xmlns:r="http://schemas.openxmlformats.org/officeDocument/2006/relationships" id="257" r:id="Rbcfa15c699f74b4d"/>
-    <p:sldId xmlns:r="http://schemas.openxmlformats.org/officeDocument/2006/relationships" id="258" r:id="R46b42dd47d764c31"/>
-    <p:sldId xmlns:r="http://schemas.openxmlformats.org/officeDocument/2006/relationships" id="259" r:id="Raad83d5c4f1b43b1"/>
-    <p:sldId xmlns:r="http://schemas.openxmlformats.org/officeDocument/2006/relationships" id="260" r:id="Rca094746bbed47ab"/>
-    <p:sldId xmlns:r="http://schemas.openxmlformats.org/officeDocument/2006/relationships" id="261" r:id="R8ab45eab8f394370"/>
-    <p:sldId xmlns:r="http://schemas.openxmlformats.org/officeDocument/2006/relationships" id="262" r:id="R9b366681662940ff"/>
-    <p:sldId xmlns:r="http://schemas.openxmlformats.org/officeDocument/2006/relationships" id="263" r:id="R04b059a0b3b5419d"/>
-    <p:sldId xmlns:r="http://schemas.openxmlformats.org/officeDocument/2006/relationships" id="264" r:id="R1508cfe519ed4bda"/>
-    <p:sldId xmlns:r="http://schemas.openxmlformats.org/officeDocument/2006/relationships" id="265" r:id="Rea4c4fe92e4846a4"/>
-    <p:sldId xmlns:r="http://schemas.openxmlformats.org/officeDocument/2006/relationships" id="266" r:id="R388697e8e2814603"/>
-    <p:sldId xmlns:r="http://schemas.openxmlformats.org/officeDocument/2006/relationships" id="267" r:id="R490c4b5323d549e1"/>
-    <p:sldId xmlns:r="http://schemas.openxmlformats.org/officeDocument/2006/relationships" id="268" r:id="R0cf5a0af7b404a86"/>
-    <p:sldId xmlns:r="http://schemas.openxmlformats.org/officeDocument/2006/relationships" id="269" r:id="Ra248609c26b9449f"/>
-    <p:sldId xmlns:r="http://schemas.openxmlformats.org/officeDocument/2006/relationships" id="270" r:id="R84cef64ae0db48a4"/>
-    <p:sldId xmlns:r="http://schemas.openxmlformats.org/officeDocument/2006/relationships" id="271" r:id="R45389c4102ad4c10"/>
-    <p:sldId xmlns:r="http://schemas.openxmlformats.org/officeDocument/2006/relationships" id="272" r:id="R3e4fb3515dba4204"/>
-    <p:sldId xmlns:r="http://schemas.openxmlformats.org/officeDocument/2006/relationships" id="273" r:id="R29b7bdbcc31249ae"/>
-    <p:sldId xmlns:r="http://schemas.openxmlformats.org/officeDocument/2006/relationships" id="274" r:id="R0f0651a341b94f11"/>
-    <p:sldId xmlns:r="http://schemas.openxmlformats.org/officeDocument/2006/relationships" id="275" r:id="R8c60fab0366e449b"/>
-    <p:sldId xmlns:r="http://schemas.openxmlformats.org/officeDocument/2006/relationships" id="276" r:id="R5be9d230a6c54aeb"/>
-    <p:sldId xmlns:r="http://schemas.openxmlformats.org/officeDocument/2006/relationships" id="277" r:id="R87cd9f8d54884aea"/>
-    <p:sldId xmlns:r="http://schemas.openxmlformats.org/officeDocument/2006/relationships" id="278" r:id="R676761eda79f43ea"/>
-    <p:sldId xmlns:r="http://schemas.openxmlformats.org/officeDocument/2006/relationships" id="279" r:id="R636e008386bb49ed"/>
-    <p:sldId xmlns:r="http://schemas.openxmlformats.org/officeDocument/2006/relationships" id="280" r:id="Rfe63f26350c54639"/>
+    <p:sldId xmlns:r="http://schemas.openxmlformats.org/officeDocument/2006/relationships" id="256" r:id="R16729e75360b4fec"/>
+    <p:sldId xmlns:r="http://schemas.openxmlformats.org/officeDocument/2006/relationships" id="257" r:id="Rfacc25e6177d44e3"/>
+    <p:sldId xmlns:r="http://schemas.openxmlformats.org/officeDocument/2006/relationships" id="258" r:id="Re9fc170c43bd47a0"/>
+    <p:sldId xmlns:r="http://schemas.openxmlformats.org/officeDocument/2006/relationships" id="259" r:id="R7b4d9818e9c444b0"/>
+    <p:sldId xmlns:r="http://schemas.openxmlformats.org/officeDocument/2006/relationships" id="260" r:id="R7cf0be7e3cdf4258"/>
+    <p:sldId xmlns:r="http://schemas.openxmlformats.org/officeDocument/2006/relationships" id="261" r:id="R1336a69f4f894143"/>
+    <p:sldId xmlns:r="http://schemas.openxmlformats.org/officeDocument/2006/relationships" id="262" r:id="R37456006a1f14b7b"/>
+    <p:sldId xmlns:r="http://schemas.openxmlformats.org/officeDocument/2006/relationships" id="263" r:id="Rb0ebee9066564148"/>
+    <p:sldId xmlns:r="http://schemas.openxmlformats.org/officeDocument/2006/relationships" id="264" r:id="R3de6dd956cd0425f"/>
+    <p:sldId xmlns:r="http://schemas.openxmlformats.org/officeDocument/2006/relationships" id="265" r:id="Rce84c8dafd1347ac"/>
+    <p:sldId xmlns:r="http://schemas.openxmlformats.org/officeDocument/2006/relationships" id="266" r:id="R371e1d8bf305434b"/>
+    <p:sldId xmlns:r="http://schemas.openxmlformats.org/officeDocument/2006/relationships" id="267" r:id="R3c936607fa674af6"/>
+    <p:sldId xmlns:r="http://schemas.openxmlformats.org/officeDocument/2006/relationships" id="268" r:id="Re18a4ee40a684fe1"/>
+    <p:sldId xmlns:r="http://schemas.openxmlformats.org/officeDocument/2006/relationships" id="269" r:id="Re2defe41cab94bee"/>
+    <p:sldId xmlns:r="http://schemas.openxmlformats.org/officeDocument/2006/relationships" id="270" r:id="R4fed226d5d6b4828"/>
+    <p:sldId xmlns:r="http://schemas.openxmlformats.org/officeDocument/2006/relationships" id="271" r:id="R2dd9fd376217439e"/>
+    <p:sldId xmlns:r="http://schemas.openxmlformats.org/officeDocument/2006/relationships" id="272" r:id="Ra58f95500213469c"/>
+    <p:sldId xmlns:r="http://schemas.openxmlformats.org/officeDocument/2006/relationships" id="273" r:id="R4317cf8b124146ac"/>
+    <p:sldId xmlns:r="http://schemas.openxmlformats.org/officeDocument/2006/relationships" id="274" r:id="R02e850bb73d64d34"/>
+    <p:sldId xmlns:r="http://schemas.openxmlformats.org/officeDocument/2006/relationships" id="275" r:id="R3e9779ed71734927"/>
+    <p:sldId xmlns:r="http://schemas.openxmlformats.org/officeDocument/2006/relationships" id="276" r:id="R644a7a07635a4cac"/>
+    <p:sldId xmlns:r="http://schemas.openxmlformats.org/officeDocument/2006/relationships" id="277" r:id="Rd6e31ce4065e400f"/>
+    <p:sldId xmlns:r="http://schemas.openxmlformats.org/officeDocument/2006/relationships" id="278" r:id="R9ecdedee384b4a88"/>
+    <p:sldId xmlns:r="http://schemas.openxmlformats.org/officeDocument/2006/relationships" id="279" r:id="R034bbc772cdf4c74"/>
+    <p:sldId xmlns:r="http://schemas.openxmlformats.org/officeDocument/2006/relationships" id="280" r:id="R49797889d8cd401c"/>
   </p:sldIdLst>
   <p:sldSz cx="15240000" cy="8572500"/>
   <p:notesSz cx="6858000" cy="9144000"/>
@@ -467,7 +467,7 @@
           <a:p xmlns:a="http://schemas.openxmlformats.org/drawingml/2006/main">
             <a:r>
               <a:rPr sz="1400"/>
-              <a:t>Uitleg: Laat deze dia staan tijdens startopdracht. Start: 1–2 op p.76. Basis: alle begeleide opgaven 3 (p.76), 4 en 5 (p.77). Zelfstandig: 6–7 (p.78). Doel: 8 (p.79). Huiswerk: 3 t/m 8 maken en nakijken. Bonus 9 en herhaling 10–11 zijn extra en niet toegewezen. Volledige route heeft geen gemeten lestijd; maak zo nodig thuis of in een volgende les af.</a:t>
+              <a:t>Uitleg: Laat deze dia staan tijdens startopdracht. Start: 1–2 op p.77. Basis: alle begeleide opgaven 3 (p.77), 4 en 5 (p.78). Zelfstandig: 6–7 (p.79). Doel: 8 (p.80). Huiswerk: 3 t/m 8 maken en nakijken. Bonus 9 en herhaling 10–11 zijn extra en niet toegewezen. Volledige route heeft geen gemeten lestijd; maak zo nodig thuis of in een volgende les af.</a:t>
             </a:r>
           </a:p>
           <a:p xmlns:a="http://schemas.openxmlformats.org/drawingml/2006/main">
@@ -479,7 +479,7 @@
           <a:p xmlns:a="http://schemas.openxmlformats.org/drawingml/2006/main">
             <a:r>
               <a:rPr sz="1400"/>
-              <a:t>Start 1 haalt functie-invulling, assensnijpunten en driehoeksoppervlakte op. Eerdere kennismaking bewijst geen beheersing: verwijs bij vastlopen naar p.74. Start 2 is verkenning van formeel CS. Lees op p.72 de blokken Betalingsbereidheid, Werkelijk betaalde prijs en Consumentensurplus. Laat leerlingen hun gebruikte definitie en twijfel aanwijzen. Geef nog geen uitgewerkt antwoord. Keer na de uitleg, bij de tweede overzichtsdia, terug naar 1–2: laat leerlingen beide antwoorden opnieuw bekijken en hun redenering voor 2 verbeteren vóór het basiswerk. Geef dan zo nodig feedback op reeds gemaakt werk.</a:t>
+              <a:t>Start 1 haalt functie-invulling, assensnijpunten en driehoeksoppervlakte op. Eerdere kennismaking bewijst geen beheersing: verwijs bij vastlopen naar p.75. Start 2 is verkenning van formeel CS. Lees op p.73 de blokken Betalingsbereidheid, Werkelijk betaalde prijs en Consumentensurplus. Laat leerlingen hun gebruikte definitie en twijfel aanwijzen. Geef nog geen uitgewerkt antwoord. Keer na de uitleg, bij de tweede overzichtsdia, terug naar 1–2: laat leerlingen beide antwoorden opnieuw bekijken en hun redenering voor 2 verbeteren vóór het basiswerk. Geef dan zo nodig feedback op reeds gemaakt werk.</a:t>
             </a:r>
           </a:p>
           <a:p xmlns:a="http://schemas.openxmlformats.org/drawingml/2006/main">
@@ -527,13 +527,13 @@
           <a:p xmlns:a="http://schemas.openxmlformats.org/drawingml/2006/main">
             <a:r>
               <a:rPr sz="1400"/>
-              <a:t>Bron: Boek 2, chatuitgave 2026, gedrukte pagina 72, 74, 76–79. https://github.com/meijer1973/4veco-lessen/blob/d53080f38ebbdbba319e6d9b89dcba86067a72be/Boek%202%20-%20Kosten%2C%20opbrengsten%2C%20elasticiteit%20en%20surplus/edities/chat-2026/boek/Boek_2_Compleet.pdf</a:t>
+              <a:t>Bron: Boek 2, chatuitgave 2026, gedrukte pagina 73, 75, 77–80. https://github.com/meijer1973/4veco-lessen/blob/a8940a7a79e22857a3e306a91fe923c48c63e716/Boek%202%20-%20Kosten%2C%20opbrengsten%2C%20elasticiteit%20en%20surplus/edities/chat-2026/boek/Boek_2_Compleet.pdf</a:t>
             </a:r>
           </a:p>
           <a:p xmlns:a="http://schemas.openxmlformats.org/drawingml/2006/main">
             <a:r>
               <a:rPr sz="1400"/>
-              <a:t>Antwoordmodel: https://github.com/meijer1973/4veco-lessen/blob/d53080f38ebbdbba319e6d9b89dcba86067a72be/Boek%202%20-%20Kosten%2C%20opbrengsten%2C%20elasticiteit%20en%20surplus/edities/chat-2026/boek/Boek_2_Compleet_Antwoorden.pdf</a:t>
+              <a:t>Antwoordmodel: https://github.com/meijer1973/4veco-lessen/blob/a8940a7a79e22857a3e306a91fe923c48c63e716/Boek%202%20-%20Kosten%2C%20opbrengsten%2C%20elasticiteit%20en%20surplus/edities/chat-2026/boek/Boek_2_Compleet_Antwoorden.pdf</a:t>
             </a:r>
           </a:p>
           <a:p xmlns:a="http://schemas.openxmlformats.org/drawingml/2006/main">
@@ -658,13 +658,13 @@
           <a:p xmlns:a="http://schemas.openxmlformats.org/drawingml/2006/main">
             <a:r>
               <a:rPr sz="1400"/>
-              <a:t>Bron: Boek 2, chatuitgave 2026, gedrukte pagina 73–75. https://github.com/meijer1973/4veco-lessen/blob/d53080f38ebbdbba319e6d9b89dcba86067a72be/Boek%202%20-%20Kosten%2C%20opbrengsten%2C%20elasticiteit%20en%20surplus/edities/chat-2026/boek/Boek_2_Compleet.pdf</a:t>
+              <a:t>Bron: Boek 2, chatuitgave 2026, gedrukte pagina 74–76. https://github.com/meijer1973/4veco-lessen/blob/a8940a7a79e22857a3e306a91fe923c48c63e716/Boek%202%20-%20Kosten%2C%20opbrengsten%2C%20elasticiteit%20en%20surplus/edities/chat-2026/boek/Boek_2_Compleet.pdf</a:t>
             </a:r>
           </a:p>
           <a:p xmlns:a="http://schemas.openxmlformats.org/drawingml/2006/main">
             <a:r>
               <a:rPr sz="1400"/>
-              <a:t>Antwoordmodel: https://github.com/meijer1973/4veco-lessen/blob/d53080f38ebbdbba319e6d9b89dcba86067a72be/Boek%202%20-%20Kosten%2C%20opbrengsten%2C%20elasticiteit%20en%20surplus/edities/chat-2026/boek/Boek_2_Compleet_Antwoorden.pdf</a:t>
+              <a:t>Antwoordmodel: https://github.com/meijer1973/4veco-lessen/blob/a8940a7a79e22857a3e306a91fe923c48c63e716/Boek%202%20-%20Kosten%2C%20opbrengsten%2C%20elasticiteit%20en%20surplus/edities/chat-2026/boek/Boek_2_Compleet_Antwoorden.pdf</a:t>
             </a:r>
           </a:p>
           <a:p xmlns:a="http://schemas.openxmlformats.org/drawingml/2006/main">
@@ -789,13 +789,13 @@
           <a:p xmlns:a="http://schemas.openxmlformats.org/drawingml/2006/main">
             <a:r>
               <a:rPr sz="1400"/>
-              <a:t>Bron: Boek 2, chatuitgave 2026, gedrukte pagina 74–75. https://github.com/meijer1973/4veco-lessen/blob/d53080f38ebbdbba319e6d9b89dcba86067a72be/Boek%202%20-%20Kosten%2C%20opbrengsten%2C%20elasticiteit%20en%20surplus/edities/chat-2026/boek/Boek_2_Compleet.pdf</a:t>
+              <a:t>Bron: Boek 2, chatuitgave 2026, gedrukte pagina 75–76. https://github.com/meijer1973/4veco-lessen/blob/a8940a7a79e22857a3e306a91fe923c48c63e716/Boek%202%20-%20Kosten%2C%20opbrengsten%2C%20elasticiteit%20en%20surplus/edities/chat-2026/boek/Boek_2_Compleet.pdf</a:t>
             </a:r>
           </a:p>
           <a:p xmlns:a="http://schemas.openxmlformats.org/drawingml/2006/main">
             <a:r>
               <a:rPr sz="1400"/>
-              <a:t>Antwoordmodel: https://github.com/meijer1973/4veco-lessen/blob/d53080f38ebbdbba319e6d9b89dcba86067a72be/Boek%202%20-%20Kosten%2C%20opbrengsten%2C%20elasticiteit%20en%20surplus/edities/chat-2026/boek/Boek_2_Compleet_Antwoorden.pdf</a:t>
+              <a:t>Antwoordmodel: https://github.com/meijer1973/4veco-lessen/blob/a8940a7a79e22857a3e306a91fe923c48c63e716/Boek%202%20-%20Kosten%2C%20opbrengsten%2C%20elasticiteit%20en%20surplus/edities/chat-2026/boek/Boek_2_Compleet_Antwoorden.pdf</a:t>
             </a:r>
           </a:p>
           <a:p xmlns:a="http://schemas.openxmlformats.org/drawingml/2006/main">
@@ -920,13 +920,13 @@
           <a:p xmlns:a="http://schemas.openxmlformats.org/drawingml/2006/main">
             <a:r>
               <a:rPr sz="1400"/>
-              <a:t>Bron: Boek 2, chatuitgave 2026, gedrukte pagina 72–75. https://github.com/meijer1973/4veco-lessen/blob/d53080f38ebbdbba319e6d9b89dcba86067a72be/Boek%202%20-%20Kosten%2C%20opbrengsten%2C%20elasticiteit%20en%20surplus/edities/chat-2026/boek/Boek_2_Compleet.pdf</a:t>
+              <a:t>Bron: Boek 2, chatuitgave 2026, gedrukte pagina 73–76. https://github.com/meijer1973/4veco-lessen/blob/a8940a7a79e22857a3e306a91fe923c48c63e716/Boek%202%20-%20Kosten%2C%20opbrengsten%2C%20elasticiteit%20en%20surplus/edities/chat-2026/boek/Boek_2_Compleet.pdf</a:t>
             </a:r>
           </a:p>
           <a:p xmlns:a="http://schemas.openxmlformats.org/drawingml/2006/main">
             <a:r>
               <a:rPr sz="1400"/>
-              <a:t>Antwoordmodel: https://github.com/meijer1973/4veco-lessen/blob/d53080f38ebbdbba319e6d9b89dcba86067a72be/Boek%202%20-%20Kosten%2C%20opbrengsten%2C%20elasticiteit%20en%20surplus/edities/chat-2026/boek/Boek_2_Compleet_Antwoorden.pdf</a:t>
+              <a:t>Antwoordmodel: https://github.com/meijer1973/4veco-lessen/blob/a8940a7a79e22857a3e306a91fe923c48c63e716/Boek%202%20-%20Kosten%2C%20opbrengsten%2C%20elasticiteit%20en%20surplus/edities/chat-2026/boek/Boek_2_Compleet_Antwoorden.pdf</a:t>
             </a:r>
           </a:p>
           <a:p xmlns:a="http://schemas.openxmlformats.org/drawingml/2006/main">
@@ -1051,13 +1051,13 @@
           <a:p xmlns:a="http://schemas.openxmlformats.org/drawingml/2006/main">
             <a:r>
               <a:rPr sz="1400"/>
-              <a:t>Bron: Boek 2, chatuitgave 2026, gedrukte pagina 74–75. https://github.com/meijer1973/4veco-lessen/blob/d53080f38ebbdbba319e6d9b89dcba86067a72be/Boek%202%20-%20Kosten%2C%20opbrengsten%2C%20elasticiteit%20en%20surplus/edities/chat-2026/boek/Boek_2_Compleet.pdf</a:t>
+              <a:t>Bron: Boek 2, chatuitgave 2026, gedrukte pagina 75–76. https://github.com/meijer1973/4veco-lessen/blob/a8940a7a79e22857a3e306a91fe923c48c63e716/Boek%202%20-%20Kosten%2C%20opbrengsten%2C%20elasticiteit%20en%20surplus/edities/chat-2026/boek/Boek_2_Compleet.pdf</a:t>
             </a:r>
           </a:p>
           <a:p xmlns:a="http://schemas.openxmlformats.org/drawingml/2006/main">
             <a:r>
               <a:rPr sz="1400"/>
-              <a:t>Antwoordmodel: https://github.com/meijer1973/4veco-lessen/blob/d53080f38ebbdbba319e6d9b89dcba86067a72be/Boek%202%20-%20Kosten%2C%20opbrengsten%2C%20elasticiteit%20en%20surplus/edities/chat-2026/boek/Boek_2_Compleet_Antwoorden.pdf</a:t>
+              <a:t>Antwoordmodel: https://github.com/meijer1973/4veco-lessen/blob/a8940a7a79e22857a3e306a91fe923c48c63e716/Boek%202%20-%20Kosten%2C%20opbrengsten%2C%20elasticiteit%20en%20surplus/edities/chat-2026/boek/Boek_2_Compleet_Antwoorden.pdf</a:t>
             </a:r>
           </a:p>
           <a:p xmlns:a="http://schemas.openxmlformats.org/drawingml/2006/main">
@@ -1182,13 +1182,13 @@
           <a:p xmlns:a="http://schemas.openxmlformats.org/drawingml/2006/main">
             <a:r>
               <a:rPr sz="1400"/>
-              <a:t>Bron: Boek 2, chatuitgave 2026, gedrukte pagina 74–75. https://github.com/meijer1973/4veco-lessen/blob/d53080f38ebbdbba319e6d9b89dcba86067a72be/Boek%202%20-%20Kosten%2C%20opbrengsten%2C%20elasticiteit%20en%20surplus/edities/chat-2026/boek/Boek_2_Compleet.pdf</a:t>
+              <a:t>Bron: Boek 2, chatuitgave 2026, gedrukte pagina 75–76. https://github.com/meijer1973/4veco-lessen/blob/a8940a7a79e22857a3e306a91fe923c48c63e716/Boek%202%20-%20Kosten%2C%20opbrengsten%2C%20elasticiteit%20en%20surplus/edities/chat-2026/boek/Boek_2_Compleet.pdf</a:t>
             </a:r>
           </a:p>
           <a:p xmlns:a="http://schemas.openxmlformats.org/drawingml/2006/main">
             <a:r>
               <a:rPr sz="1400"/>
-              <a:t>Antwoordmodel: https://github.com/meijer1973/4veco-lessen/blob/d53080f38ebbdbba319e6d9b89dcba86067a72be/Boek%202%20-%20Kosten%2C%20opbrengsten%2C%20elasticiteit%20en%20surplus/edities/chat-2026/boek/Boek_2_Compleet_Antwoorden.pdf</a:t>
+              <a:t>Antwoordmodel: https://github.com/meijer1973/4veco-lessen/blob/a8940a7a79e22857a3e306a91fe923c48c63e716/Boek%202%20-%20Kosten%2C%20opbrengsten%2C%20elasticiteit%20en%20surplus/edities/chat-2026/boek/Boek_2_Compleet_Antwoorden.pdf</a:t>
             </a:r>
           </a:p>
           <a:p xmlns:a="http://schemas.openxmlformats.org/drawingml/2006/main">
@@ -1265,7 +1265,7 @@
           <a:p xmlns:a="http://schemas.openxmlformats.org/drawingml/2006/main">
             <a:r>
               <a:rPr sz="1400"/>
-              <a:t>Uitleg: Laat deze dia staan tijdens zelfstandig werken. Start: 1–2 op p.76. Basis: alle begeleide opgaven 3 (p.76), 4 en 5 (p.77). Zelfstandig: 6–7 (p.78). Doel: 8 (p.79). Huiswerk: 3 t/m 8 maken en nakijken. Bonus 9 en herhaling 10–11 zijn extra en niet toegewezen. Volledige route heeft geen gemeten lestijd; maak zo nodig thuis of in een volgende les af.</a:t>
+              <a:t>Uitleg: Laat deze dia staan tijdens zelfstandig werken. Start: 1–2 op p.77. Basis: alle begeleide opgaven 3 (p.77), 4 en 5 (p.78). Zelfstandig: 6–7 (p.79). Doel: 8 (p.80). Huiswerk: 3 t/m 8 maken en nakijken. Bonus 9 en herhaling 10–11 zijn extra en niet toegewezen. Volledige route heeft geen gemeten lestijd; maak zo nodig thuis of in een volgende les af.</a:t>
             </a:r>
           </a:p>
           <a:p xmlns:a="http://schemas.openxmlformats.org/drawingml/2006/main">
@@ -1277,7 +1277,7 @@
           <a:p xmlns:a="http://schemas.openxmlformats.org/drawingml/2006/main">
             <a:r>
               <a:rPr sz="1400"/>
-              <a:t>Start 1 haalt functie-invulling, assensnijpunten en driehoeksoppervlakte op. Eerdere kennismaking bewijst geen beheersing: verwijs bij vastlopen naar p.74. Start 2 is verkenning van formeel CS. Lees op p.72 de blokken Betalingsbereidheid, Werkelijk betaalde prijs en Consumentensurplus. Laat leerlingen hun gebruikte definitie en twijfel aanwijzen. Geef nog geen uitgewerkt antwoord. Keer na de uitleg, bij de tweede overzichtsdia, terug naar 1–2: laat leerlingen beide antwoorden opnieuw bekijken en hun redenering voor 2 verbeteren vóór het basiswerk. Geef dan zo nodig feedback op reeds gemaakt werk.</a:t>
+              <a:t>Start 1 haalt functie-invulling, assensnijpunten en driehoeksoppervlakte op. Eerdere kennismaking bewijst geen beheersing: verwijs bij vastlopen naar p.75. Start 2 is verkenning van formeel CS. Lees op p.73 de blokken Betalingsbereidheid, Werkelijk betaalde prijs en Consumentensurplus. Laat leerlingen hun gebruikte definitie en twijfel aanwijzen. Geef nog geen uitgewerkt antwoord. Keer na de uitleg, bij de tweede overzichtsdia, terug naar 1–2: laat leerlingen beide antwoorden opnieuw bekijken en hun redenering voor 2 verbeteren vóór het basiswerk. Geef dan zo nodig feedback op reeds gemaakt werk.</a:t>
             </a:r>
           </a:p>
           <a:p xmlns:a="http://schemas.openxmlformats.org/drawingml/2006/main">
@@ -1325,13 +1325,13 @@
           <a:p xmlns:a="http://schemas.openxmlformats.org/drawingml/2006/main">
             <a:r>
               <a:rPr sz="1400"/>
-              <a:t>Bron: Boek 2, chatuitgave 2026, gedrukte pagina 72, 74, 76–79. https://github.com/meijer1973/4veco-lessen/blob/d53080f38ebbdbba319e6d9b89dcba86067a72be/Boek%202%20-%20Kosten%2C%20opbrengsten%2C%20elasticiteit%20en%20surplus/edities/chat-2026/boek/Boek_2_Compleet.pdf</a:t>
+              <a:t>Bron: Boek 2, chatuitgave 2026, gedrukte pagina 73, 75, 77–80. https://github.com/meijer1973/4veco-lessen/blob/a8940a7a79e22857a3e306a91fe923c48c63e716/Boek%202%20-%20Kosten%2C%20opbrengsten%2C%20elasticiteit%20en%20surplus/edities/chat-2026/boek/Boek_2_Compleet.pdf</a:t>
             </a:r>
           </a:p>
           <a:p xmlns:a="http://schemas.openxmlformats.org/drawingml/2006/main">
             <a:r>
               <a:rPr sz="1400"/>
-              <a:t>Antwoordmodel: https://github.com/meijer1973/4veco-lessen/blob/d53080f38ebbdbba319e6d9b89dcba86067a72be/Boek%202%20-%20Kosten%2C%20opbrengsten%2C%20elasticiteit%20en%20surplus/edities/chat-2026/boek/Boek_2_Compleet_Antwoorden.pdf</a:t>
+              <a:t>Antwoordmodel: https://github.com/meijer1973/4veco-lessen/blob/a8940a7a79e22857a3e306a91fe923c48c63e716/Boek%202%20-%20Kosten%2C%20opbrengsten%2C%20elasticiteit%20en%20surplus/edities/chat-2026/boek/Boek_2_Compleet_Antwoorden.pdf</a:t>
             </a:r>
           </a:p>
           <a:p xmlns:a="http://schemas.openxmlformats.org/drawingml/2006/main">
@@ -1456,13 +1456,13 @@
           <a:p xmlns:a="http://schemas.openxmlformats.org/drawingml/2006/main">
             <a:r>
               <a:rPr sz="1400"/>
-              <a:t>Bron: Boek 2, chatuitgave 2026, gedrukte pagina 79. https://github.com/meijer1973/4veco-lessen/blob/d53080f38ebbdbba319e6d9b89dcba86067a72be/Boek%202%20-%20Kosten%2C%20opbrengsten%2C%20elasticiteit%20en%20surplus/edities/chat-2026/boek/Boek_2_Compleet.pdf</a:t>
+              <a:t>Bron: Boek 2, chatuitgave 2026, gedrukte pagina 80. https://github.com/meijer1973/4veco-lessen/blob/a8940a7a79e22857a3e306a91fe923c48c63e716/Boek%202%20-%20Kosten%2C%20opbrengsten%2C%20elasticiteit%20en%20surplus/edities/chat-2026/boek/Boek_2_Compleet.pdf</a:t>
             </a:r>
           </a:p>
           <a:p xmlns:a="http://schemas.openxmlformats.org/drawingml/2006/main">
             <a:r>
               <a:rPr sz="1400"/>
-              <a:t>Antwoordmodel: https://github.com/meijer1973/4veco-lessen/blob/d53080f38ebbdbba319e6d9b89dcba86067a72be/Boek%202%20-%20Kosten%2C%20opbrengsten%2C%20elasticiteit%20en%20surplus/edities/chat-2026/boek/Boek_2_Compleet_Antwoorden.pdf</a:t>
+              <a:t>Antwoordmodel: https://github.com/meijer1973/4veco-lessen/blob/a8940a7a79e22857a3e306a91fe923c48c63e716/Boek%202%20-%20Kosten%2C%20opbrengsten%2C%20elasticiteit%20en%20surplus/edities/chat-2026/boek/Boek_2_Compleet_Antwoorden.pdf</a:t>
             </a:r>
           </a:p>
           <a:p xmlns:a="http://schemas.openxmlformats.org/drawingml/2006/main">
@@ -1587,13 +1587,13 @@
           <a:p xmlns:a="http://schemas.openxmlformats.org/drawingml/2006/main">
             <a:r>
               <a:rPr sz="1400"/>
-              <a:t>Bron: Boek 2, chatuitgave 2026, gedrukte pagina 79. https://github.com/meijer1973/4veco-lessen/blob/d53080f38ebbdbba319e6d9b89dcba86067a72be/Boek%202%20-%20Kosten%2C%20opbrengsten%2C%20elasticiteit%20en%20surplus/edities/chat-2026/boek/Boek_2_Compleet.pdf</a:t>
+              <a:t>Bron: Boek 2, chatuitgave 2026, gedrukte pagina 80. https://github.com/meijer1973/4veco-lessen/blob/a8940a7a79e22857a3e306a91fe923c48c63e716/Boek%202%20-%20Kosten%2C%20opbrengsten%2C%20elasticiteit%20en%20surplus/edities/chat-2026/boek/Boek_2_Compleet.pdf</a:t>
             </a:r>
           </a:p>
           <a:p xmlns:a="http://schemas.openxmlformats.org/drawingml/2006/main">
             <a:r>
               <a:rPr sz="1400"/>
-              <a:t>Antwoordmodel: https://github.com/meijer1973/4veco-lessen/blob/d53080f38ebbdbba319e6d9b89dcba86067a72be/Boek%202%20-%20Kosten%2C%20opbrengsten%2C%20elasticiteit%20en%20surplus/edities/chat-2026/boek/Boek_2_Compleet_Antwoorden.pdf</a:t>
+              <a:t>Antwoordmodel: https://github.com/meijer1973/4veco-lessen/blob/a8940a7a79e22857a3e306a91fe923c48c63e716/Boek%202%20-%20Kosten%2C%20opbrengsten%2C%20elasticiteit%20en%20surplus/edities/chat-2026/boek/Boek_2_Compleet_Antwoorden.pdf</a:t>
             </a:r>
           </a:p>
           <a:p xmlns:a="http://schemas.openxmlformats.org/drawingml/2006/main">
@@ -1718,13 +1718,13 @@
           <a:p xmlns:a="http://schemas.openxmlformats.org/drawingml/2006/main">
             <a:r>
               <a:rPr sz="1400"/>
-              <a:t>Bron: Boek 2, chatuitgave 2026, gedrukte pagina 79. https://github.com/meijer1973/4veco-lessen/blob/d53080f38ebbdbba319e6d9b89dcba86067a72be/Boek%202%20-%20Kosten%2C%20opbrengsten%2C%20elasticiteit%20en%20surplus/edities/chat-2026/boek/Boek_2_Compleet.pdf</a:t>
+              <a:t>Bron: Boek 2, chatuitgave 2026, gedrukte pagina 80. https://github.com/meijer1973/4veco-lessen/blob/a8940a7a79e22857a3e306a91fe923c48c63e716/Boek%202%20-%20Kosten%2C%20opbrengsten%2C%20elasticiteit%20en%20surplus/edities/chat-2026/boek/Boek_2_Compleet.pdf</a:t>
             </a:r>
           </a:p>
           <a:p xmlns:a="http://schemas.openxmlformats.org/drawingml/2006/main">
             <a:r>
               <a:rPr sz="1400"/>
-              <a:t>Antwoordmodel: https://github.com/meijer1973/4veco-lessen/blob/d53080f38ebbdbba319e6d9b89dcba86067a72be/Boek%202%20-%20Kosten%2C%20opbrengsten%2C%20elasticiteit%20en%20surplus/edities/chat-2026/boek/Boek_2_Compleet_Antwoorden.pdf</a:t>
+              <a:t>Antwoordmodel: https://github.com/meijer1973/4veco-lessen/blob/a8940a7a79e22857a3e306a91fe923c48c63e716/Boek%202%20-%20Kosten%2C%20opbrengsten%2C%20elasticiteit%20en%20surplus/edities/chat-2026/boek/Boek_2_Compleet_Antwoorden.pdf</a:t>
             </a:r>
           </a:p>
           <a:p xmlns:a="http://schemas.openxmlformats.org/drawingml/2006/main">
@@ -1849,13 +1849,13 @@
           <a:p xmlns:a="http://schemas.openxmlformats.org/drawingml/2006/main">
             <a:r>
               <a:rPr sz="1400"/>
-              <a:t>Bron: Boek 2, chatuitgave 2026, gedrukte pagina 79. https://github.com/meijer1973/4veco-lessen/blob/d53080f38ebbdbba319e6d9b89dcba86067a72be/Boek%202%20-%20Kosten%2C%20opbrengsten%2C%20elasticiteit%20en%20surplus/edities/chat-2026/boek/Boek_2_Compleet.pdf</a:t>
+              <a:t>Bron: Boek 2, chatuitgave 2026, gedrukte pagina 80. https://github.com/meijer1973/4veco-lessen/blob/a8940a7a79e22857a3e306a91fe923c48c63e716/Boek%202%20-%20Kosten%2C%20opbrengsten%2C%20elasticiteit%20en%20surplus/edities/chat-2026/boek/Boek_2_Compleet.pdf</a:t>
             </a:r>
           </a:p>
           <a:p xmlns:a="http://schemas.openxmlformats.org/drawingml/2006/main">
             <a:r>
               <a:rPr sz="1400"/>
-              <a:t>Antwoordmodel: https://github.com/meijer1973/4veco-lessen/blob/d53080f38ebbdbba319e6d9b89dcba86067a72be/Boek%202%20-%20Kosten%2C%20opbrengsten%2C%20elasticiteit%20en%20surplus/edities/chat-2026/boek/Boek_2_Compleet_Antwoorden.pdf</a:t>
+              <a:t>Antwoordmodel: https://github.com/meijer1973/4veco-lessen/blob/a8940a7a79e22857a3e306a91fe923c48c63e716/Boek%202%20-%20Kosten%2C%20opbrengsten%2C%20elasticiteit%20en%20surplus/edities/chat-2026/boek/Boek_2_Compleet_Antwoorden.pdf</a:t>
             </a:r>
           </a:p>
           <a:p xmlns:a="http://schemas.openxmlformats.org/drawingml/2006/main">
@@ -1980,13 +1980,13 @@
           <a:p xmlns:a="http://schemas.openxmlformats.org/drawingml/2006/main">
             <a:r>
               <a:rPr sz="1400"/>
-              <a:t>Bron: Boek 2, chatuitgave 2026, gedrukte pagina 72–75. https://github.com/meijer1973/4veco-lessen/blob/d53080f38ebbdbba319e6d9b89dcba86067a72be/Boek%202%20-%20Kosten%2C%20opbrengsten%2C%20elasticiteit%20en%20surplus/edities/chat-2026/boek/Boek_2_Compleet.pdf</a:t>
+              <a:t>Bron: Boek 2, chatuitgave 2026, gedrukte pagina 73–76. https://github.com/meijer1973/4veco-lessen/blob/a8940a7a79e22857a3e306a91fe923c48c63e716/Boek%202%20-%20Kosten%2C%20opbrengsten%2C%20elasticiteit%20en%20surplus/edities/chat-2026/boek/Boek_2_Compleet.pdf</a:t>
             </a:r>
           </a:p>
           <a:p xmlns:a="http://schemas.openxmlformats.org/drawingml/2006/main">
             <a:r>
               <a:rPr sz="1400"/>
-              <a:t>Antwoordmodel: https://github.com/meijer1973/4veco-lessen/blob/d53080f38ebbdbba319e6d9b89dcba86067a72be/Boek%202%20-%20Kosten%2C%20opbrengsten%2C%20elasticiteit%20en%20surplus/edities/chat-2026/boek/Boek_2_Compleet_Antwoorden.pdf</a:t>
+              <a:t>Antwoordmodel: https://github.com/meijer1973/4veco-lessen/blob/a8940a7a79e22857a3e306a91fe923c48c63e716/Boek%202%20-%20Kosten%2C%20opbrengsten%2C%20elasticiteit%20en%20surplus/edities/chat-2026/boek/Boek_2_Compleet_Antwoorden.pdf</a:t>
             </a:r>
           </a:p>
           <a:p xmlns:a="http://schemas.openxmlformats.org/drawingml/2006/main">
@@ -2111,13 +2111,13 @@
           <a:p xmlns:a="http://schemas.openxmlformats.org/drawingml/2006/main">
             <a:r>
               <a:rPr sz="1400"/>
-              <a:t>Bron: Boek 2, chatuitgave 2026, gedrukte pagina 79. https://github.com/meijer1973/4veco-lessen/blob/d53080f38ebbdbba319e6d9b89dcba86067a72be/Boek%202%20-%20Kosten%2C%20opbrengsten%2C%20elasticiteit%20en%20surplus/edities/chat-2026/boek/Boek_2_Compleet.pdf</a:t>
+              <a:t>Bron: Boek 2, chatuitgave 2026, gedrukte pagina 80. https://github.com/meijer1973/4veco-lessen/blob/a8940a7a79e22857a3e306a91fe923c48c63e716/Boek%202%20-%20Kosten%2C%20opbrengsten%2C%20elasticiteit%20en%20surplus/edities/chat-2026/boek/Boek_2_Compleet.pdf</a:t>
             </a:r>
           </a:p>
           <a:p xmlns:a="http://schemas.openxmlformats.org/drawingml/2006/main">
             <a:r>
               <a:rPr sz="1400"/>
-              <a:t>Antwoordmodel: https://github.com/meijer1973/4veco-lessen/blob/d53080f38ebbdbba319e6d9b89dcba86067a72be/Boek%202%20-%20Kosten%2C%20opbrengsten%2C%20elasticiteit%20en%20surplus/edities/chat-2026/boek/Boek_2_Compleet_Antwoorden.pdf</a:t>
+              <a:t>Antwoordmodel: https://github.com/meijer1973/4veco-lessen/blob/a8940a7a79e22857a3e306a91fe923c48c63e716/Boek%202%20-%20Kosten%2C%20opbrengsten%2C%20elasticiteit%20en%20surplus/edities/chat-2026/boek/Boek_2_Compleet_Antwoorden.pdf</a:t>
             </a:r>
           </a:p>
           <a:p xmlns:a="http://schemas.openxmlformats.org/drawingml/2006/main">
@@ -2242,13 +2242,13 @@
           <a:p xmlns:a="http://schemas.openxmlformats.org/drawingml/2006/main">
             <a:r>
               <a:rPr sz="1400"/>
-              <a:t>Bron: Boek 2, chatuitgave 2026, gedrukte pagina 79. https://github.com/meijer1973/4veco-lessen/blob/d53080f38ebbdbba319e6d9b89dcba86067a72be/Boek%202%20-%20Kosten%2C%20opbrengsten%2C%20elasticiteit%20en%20surplus/edities/chat-2026/boek/Boek_2_Compleet.pdf</a:t>
+              <a:t>Bron: Boek 2, chatuitgave 2026, gedrukte pagina 80. https://github.com/meijer1973/4veco-lessen/blob/a8940a7a79e22857a3e306a91fe923c48c63e716/Boek%202%20-%20Kosten%2C%20opbrengsten%2C%20elasticiteit%20en%20surplus/edities/chat-2026/boek/Boek_2_Compleet.pdf</a:t>
             </a:r>
           </a:p>
           <a:p xmlns:a="http://schemas.openxmlformats.org/drawingml/2006/main">
             <a:r>
               <a:rPr sz="1400"/>
-              <a:t>Antwoordmodel: https://github.com/meijer1973/4veco-lessen/blob/d53080f38ebbdbba319e6d9b89dcba86067a72be/Boek%202%20-%20Kosten%2C%20opbrengsten%2C%20elasticiteit%20en%20surplus/edities/chat-2026/boek/Boek_2_Compleet_Antwoorden.pdf</a:t>
+              <a:t>Antwoordmodel: https://github.com/meijer1973/4veco-lessen/blob/a8940a7a79e22857a3e306a91fe923c48c63e716/Boek%202%20-%20Kosten%2C%20opbrengsten%2C%20elasticiteit%20en%20surplus/edities/chat-2026/boek/Boek_2_Compleet_Antwoorden.pdf</a:t>
             </a:r>
           </a:p>
           <a:p xmlns:a="http://schemas.openxmlformats.org/drawingml/2006/main">
@@ -2373,13 +2373,13 @@
           <a:p xmlns:a="http://schemas.openxmlformats.org/drawingml/2006/main">
             <a:r>
               <a:rPr sz="1400"/>
-              <a:t>Bron: Boek 2, chatuitgave 2026, gedrukte pagina 79. https://github.com/meijer1973/4veco-lessen/blob/d53080f38ebbdbba319e6d9b89dcba86067a72be/Boek%202%20-%20Kosten%2C%20opbrengsten%2C%20elasticiteit%20en%20surplus/edities/chat-2026/boek/Boek_2_Compleet.pdf</a:t>
+              <a:t>Bron: Boek 2, chatuitgave 2026, gedrukte pagina 80. https://github.com/meijer1973/4veco-lessen/blob/a8940a7a79e22857a3e306a91fe923c48c63e716/Boek%202%20-%20Kosten%2C%20opbrengsten%2C%20elasticiteit%20en%20surplus/edities/chat-2026/boek/Boek_2_Compleet.pdf</a:t>
             </a:r>
           </a:p>
           <a:p xmlns:a="http://schemas.openxmlformats.org/drawingml/2006/main">
             <a:r>
               <a:rPr sz="1400"/>
-              <a:t>Antwoordmodel: https://github.com/meijer1973/4veco-lessen/blob/d53080f38ebbdbba319e6d9b89dcba86067a72be/Boek%202%20-%20Kosten%2C%20opbrengsten%2C%20elasticiteit%20en%20surplus/edities/chat-2026/boek/Boek_2_Compleet_Antwoorden.pdf</a:t>
+              <a:t>Antwoordmodel: https://github.com/meijer1973/4veco-lessen/blob/a8940a7a79e22857a3e306a91fe923c48c63e716/Boek%202%20-%20Kosten%2C%20opbrengsten%2C%20elasticiteit%20en%20surplus/edities/chat-2026/boek/Boek_2_Compleet_Antwoorden.pdf</a:t>
             </a:r>
           </a:p>
           <a:p xmlns:a="http://schemas.openxmlformats.org/drawingml/2006/main">
@@ -2504,13 +2504,13 @@
           <a:p xmlns:a="http://schemas.openxmlformats.org/drawingml/2006/main">
             <a:r>
               <a:rPr sz="1400"/>
-              <a:t>Bron: Boek 2, chatuitgave 2026, gedrukte pagina 79. https://github.com/meijer1973/4veco-lessen/blob/d53080f38ebbdbba319e6d9b89dcba86067a72be/Boek%202%20-%20Kosten%2C%20opbrengsten%2C%20elasticiteit%20en%20surplus/edities/chat-2026/boek/Boek_2_Compleet.pdf</a:t>
+              <a:t>Bron: Boek 2, chatuitgave 2026, gedrukte pagina 80. https://github.com/meijer1973/4veco-lessen/blob/a8940a7a79e22857a3e306a91fe923c48c63e716/Boek%202%20-%20Kosten%2C%20opbrengsten%2C%20elasticiteit%20en%20surplus/edities/chat-2026/boek/Boek_2_Compleet.pdf</a:t>
             </a:r>
           </a:p>
           <a:p xmlns:a="http://schemas.openxmlformats.org/drawingml/2006/main">
             <a:r>
               <a:rPr sz="1400"/>
-              <a:t>Antwoordmodel: https://github.com/meijer1973/4veco-lessen/blob/d53080f38ebbdbba319e6d9b89dcba86067a72be/Boek%202%20-%20Kosten%2C%20opbrengsten%2C%20elasticiteit%20en%20surplus/edities/chat-2026/boek/Boek_2_Compleet_Antwoorden.pdf</a:t>
+              <a:t>Antwoordmodel: https://github.com/meijer1973/4veco-lessen/blob/a8940a7a79e22857a3e306a91fe923c48c63e716/Boek%202%20-%20Kosten%2C%20opbrengsten%2C%20elasticiteit%20en%20surplus/edities/chat-2026/boek/Boek_2_Compleet_Antwoorden.pdf</a:t>
             </a:r>
           </a:p>
           <a:p xmlns:a="http://schemas.openxmlformats.org/drawingml/2006/main">
@@ -2635,13 +2635,13 @@
           <a:p xmlns:a="http://schemas.openxmlformats.org/drawingml/2006/main">
             <a:r>
               <a:rPr sz="1400"/>
-              <a:t>Bron: Boek 2, chatuitgave 2026, gedrukte pagina 79. https://github.com/meijer1973/4veco-lessen/blob/d53080f38ebbdbba319e6d9b89dcba86067a72be/Boek%202%20-%20Kosten%2C%20opbrengsten%2C%20elasticiteit%20en%20surplus/edities/chat-2026/boek/Boek_2_Compleet.pdf</a:t>
+              <a:t>Bron: Boek 2, chatuitgave 2026, gedrukte pagina 80. https://github.com/meijer1973/4veco-lessen/blob/a8940a7a79e22857a3e306a91fe923c48c63e716/Boek%202%20-%20Kosten%2C%20opbrengsten%2C%20elasticiteit%20en%20surplus/edities/chat-2026/boek/Boek_2_Compleet.pdf</a:t>
             </a:r>
           </a:p>
           <a:p xmlns:a="http://schemas.openxmlformats.org/drawingml/2006/main">
             <a:r>
               <a:rPr sz="1400"/>
-              <a:t>Antwoordmodel: https://github.com/meijer1973/4veco-lessen/blob/d53080f38ebbdbba319e6d9b89dcba86067a72be/Boek%202%20-%20Kosten%2C%20opbrengsten%2C%20elasticiteit%20en%20surplus/edities/chat-2026/boek/Boek_2_Compleet_Antwoorden.pdf</a:t>
+              <a:t>Antwoordmodel: https://github.com/meijer1973/4veco-lessen/blob/a8940a7a79e22857a3e306a91fe923c48c63e716/Boek%202%20-%20Kosten%2C%20opbrengsten%2C%20elasticiteit%20en%20surplus/edities/chat-2026/boek/Boek_2_Compleet_Antwoorden.pdf</a:t>
             </a:r>
           </a:p>
           <a:p xmlns:a="http://schemas.openxmlformats.org/drawingml/2006/main">
@@ -2718,7 +2718,7 @@
           <a:p xmlns:a="http://schemas.openxmlformats.org/drawingml/2006/main">
             <a:r>
               <a:rPr sz="1400"/>
-              <a:t>Uitleg: Laat deze dia staan tijdens afsluiting / huiswerk. Start: 1–2 op p.76. Basis: alle begeleide opgaven 3 (p.76), 4 en 5 (p.77). Zelfstandig: 6–7 (p.78). Doel: 8 (p.79). Huiswerk: 3 t/m 8 maken en nakijken. Bonus 9 en herhaling 10–11 zijn extra en niet toegewezen. Volledige route heeft geen gemeten lestijd; maak zo nodig thuis of in een volgende les af.</a:t>
+              <a:t>Uitleg: Laat deze dia staan tijdens afsluiting / huiswerk. Start: 1–2 op p.77. Basis: alle begeleide opgaven 3 (p.77), 4 en 5 (p.78). Zelfstandig: 6–7 (p.79). Doel: 8 (p.80). Huiswerk: 3 t/m 8 maken en nakijken. Bonus 9 en herhaling 10–11 zijn extra en niet toegewezen. Volledige route heeft geen gemeten lestijd; maak zo nodig thuis of in een volgende les af.</a:t>
             </a:r>
           </a:p>
           <a:p xmlns:a="http://schemas.openxmlformats.org/drawingml/2006/main">
@@ -2730,7 +2730,7 @@
           <a:p xmlns:a="http://schemas.openxmlformats.org/drawingml/2006/main">
             <a:r>
               <a:rPr sz="1400"/>
-              <a:t>Start 1 haalt functie-invulling, assensnijpunten en driehoeksoppervlakte op. Eerdere kennismaking bewijst geen beheersing: verwijs bij vastlopen naar p.74. Start 2 is verkenning van formeel CS. Lees op p.72 de blokken Betalingsbereidheid, Werkelijk betaalde prijs en Consumentensurplus. Laat leerlingen hun gebruikte definitie en twijfel aanwijzen. Geef nog geen uitgewerkt antwoord. Keer na de uitleg, bij de tweede overzichtsdia, terug naar 1–2: laat leerlingen beide antwoorden opnieuw bekijken en hun redenering voor 2 verbeteren vóór het basiswerk. Geef dan zo nodig feedback op reeds gemaakt werk.</a:t>
+              <a:t>Start 1 haalt functie-invulling, assensnijpunten en driehoeksoppervlakte op. Eerdere kennismaking bewijst geen beheersing: verwijs bij vastlopen naar p.75. Start 2 is verkenning van formeel CS. Lees op p.73 de blokken Betalingsbereidheid, Werkelijk betaalde prijs en Consumentensurplus. Laat leerlingen hun gebruikte definitie en twijfel aanwijzen. Geef nog geen uitgewerkt antwoord. Keer na de uitleg, bij de tweede overzichtsdia, terug naar 1–2: laat leerlingen beide antwoorden opnieuw bekijken en hun redenering voor 2 verbeteren vóór het basiswerk. Geef dan zo nodig feedback op reeds gemaakt werk.</a:t>
             </a:r>
           </a:p>
           <a:p xmlns:a="http://schemas.openxmlformats.org/drawingml/2006/main">
@@ -2778,13 +2778,13 @@
           <a:p xmlns:a="http://schemas.openxmlformats.org/drawingml/2006/main">
             <a:r>
               <a:rPr sz="1400"/>
-              <a:t>Bron: Boek 2, chatuitgave 2026, gedrukte pagina 72, 74, 76–79. https://github.com/meijer1973/4veco-lessen/blob/d53080f38ebbdbba319e6d9b89dcba86067a72be/Boek%202%20-%20Kosten%2C%20opbrengsten%2C%20elasticiteit%20en%20surplus/edities/chat-2026/boek/Boek_2_Compleet.pdf</a:t>
+              <a:t>Bron: Boek 2, chatuitgave 2026, gedrukte pagina 73, 75, 77–80. https://github.com/meijer1973/4veco-lessen/blob/a8940a7a79e22857a3e306a91fe923c48c63e716/Boek%202%20-%20Kosten%2C%20opbrengsten%2C%20elasticiteit%20en%20surplus/edities/chat-2026/boek/Boek_2_Compleet.pdf</a:t>
             </a:r>
           </a:p>
           <a:p xmlns:a="http://schemas.openxmlformats.org/drawingml/2006/main">
             <a:r>
               <a:rPr sz="1400"/>
-              <a:t>Antwoordmodel: https://github.com/meijer1973/4veco-lessen/blob/d53080f38ebbdbba319e6d9b89dcba86067a72be/Boek%202%20-%20Kosten%2C%20opbrengsten%2C%20elasticiteit%20en%20surplus/edities/chat-2026/boek/Boek_2_Compleet_Antwoorden.pdf</a:t>
+              <a:t>Antwoordmodel: https://github.com/meijer1973/4veco-lessen/blob/a8940a7a79e22857a3e306a91fe923c48c63e716/Boek%202%20-%20Kosten%2C%20opbrengsten%2C%20elasticiteit%20en%20surplus/edities/chat-2026/boek/Boek_2_Compleet_Antwoorden.pdf</a:t>
             </a:r>
           </a:p>
           <a:p xmlns:a="http://schemas.openxmlformats.org/drawingml/2006/main">
@@ -2909,13 +2909,13 @@
           <a:p xmlns:a="http://schemas.openxmlformats.org/drawingml/2006/main">
             <a:r>
               <a:rPr sz="1400"/>
-              <a:t>Bron: Boek 2, chatuitgave 2026, gedrukte pagina 72. https://github.com/meijer1973/4veco-lessen/blob/d53080f38ebbdbba319e6d9b89dcba86067a72be/Boek%202%20-%20Kosten%2C%20opbrengsten%2C%20elasticiteit%20en%20surplus/edities/chat-2026/boek/Boek_2_Compleet.pdf</a:t>
+              <a:t>Bron: Boek 2, chatuitgave 2026, gedrukte pagina 73. https://github.com/meijer1973/4veco-lessen/blob/a8940a7a79e22857a3e306a91fe923c48c63e716/Boek%202%20-%20Kosten%2C%20opbrengsten%2C%20elasticiteit%20en%20surplus/edities/chat-2026/boek/Boek_2_Compleet.pdf</a:t>
             </a:r>
           </a:p>
           <a:p xmlns:a="http://schemas.openxmlformats.org/drawingml/2006/main">
             <a:r>
               <a:rPr sz="1400"/>
-              <a:t>Antwoordmodel: https://github.com/meijer1973/4veco-lessen/blob/d53080f38ebbdbba319e6d9b89dcba86067a72be/Boek%202%20-%20Kosten%2C%20opbrengsten%2C%20elasticiteit%20en%20surplus/edities/chat-2026/boek/Boek_2_Compleet_Antwoorden.pdf</a:t>
+              <a:t>Antwoordmodel: https://github.com/meijer1973/4veco-lessen/blob/a8940a7a79e22857a3e306a91fe923c48c63e716/Boek%202%20-%20Kosten%2C%20opbrengsten%2C%20elasticiteit%20en%20surplus/edities/chat-2026/boek/Boek_2_Compleet_Antwoorden.pdf</a:t>
             </a:r>
           </a:p>
           <a:p xmlns:a="http://schemas.openxmlformats.org/drawingml/2006/main">
@@ -3040,13 +3040,13 @@
           <a:p xmlns:a="http://schemas.openxmlformats.org/drawingml/2006/main">
             <a:r>
               <a:rPr sz="1400"/>
-              <a:t>Bron: Boek 2, chatuitgave 2026, gedrukte pagina 72–73. https://github.com/meijer1973/4veco-lessen/blob/d53080f38ebbdbba319e6d9b89dcba86067a72be/Boek%202%20-%20Kosten%2C%20opbrengsten%2C%20elasticiteit%20en%20surplus/edities/chat-2026/boek/Boek_2_Compleet.pdf</a:t>
+              <a:t>Bron: Boek 2, chatuitgave 2026, gedrukte pagina 73–74. https://github.com/meijer1973/4veco-lessen/blob/a8940a7a79e22857a3e306a91fe923c48c63e716/Boek%202%20-%20Kosten%2C%20opbrengsten%2C%20elasticiteit%20en%20surplus/edities/chat-2026/boek/Boek_2_Compleet.pdf</a:t>
             </a:r>
           </a:p>
           <a:p xmlns:a="http://schemas.openxmlformats.org/drawingml/2006/main">
             <a:r>
               <a:rPr sz="1400"/>
-              <a:t>Antwoordmodel: https://github.com/meijer1973/4veco-lessen/blob/d53080f38ebbdbba319e6d9b89dcba86067a72be/Boek%202%20-%20Kosten%2C%20opbrengsten%2C%20elasticiteit%20en%20surplus/edities/chat-2026/boek/Boek_2_Compleet_Antwoorden.pdf</a:t>
+              <a:t>Antwoordmodel: https://github.com/meijer1973/4veco-lessen/blob/a8940a7a79e22857a3e306a91fe923c48c63e716/Boek%202%20-%20Kosten%2C%20opbrengsten%2C%20elasticiteit%20en%20surplus/edities/chat-2026/boek/Boek_2_Compleet_Antwoorden.pdf</a:t>
             </a:r>
           </a:p>
           <a:p xmlns:a="http://schemas.openxmlformats.org/drawingml/2006/main">
@@ -3171,13 +3171,13 @@
           <a:p xmlns:a="http://schemas.openxmlformats.org/drawingml/2006/main">
             <a:r>
               <a:rPr sz="1400"/>
-              <a:t>Bron: Boek 2, chatuitgave 2026, gedrukte pagina 73–75. https://github.com/meijer1973/4veco-lessen/blob/d53080f38ebbdbba319e6d9b89dcba86067a72be/Boek%202%20-%20Kosten%2C%20opbrengsten%2C%20elasticiteit%20en%20surplus/edities/chat-2026/boek/Boek_2_Compleet.pdf</a:t>
+              <a:t>Bron: Boek 2, chatuitgave 2026, gedrukte pagina 74–76. https://github.com/meijer1973/4veco-lessen/blob/a8940a7a79e22857a3e306a91fe923c48c63e716/Boek%202%20-%20Kosten%2C%20opbrengsten%2C%20elasticiteit%20en%20surplus/edities/chat-2026/boek/Boek_2_Compleet.pdf</a:t>
             </a:r>
           </a:p>
           <a:p xmlns:a="http://schemas.openxmlformats.org/drawingml/2006/main">
             <a:r>
               <a:rPr sz="1400"/>
-              <a:t>Antwoordmodel: https://github.com/meijer1973/4veco-lessen/blob/d53080f38ebbdbba319e6d9b89dcba86067a72be/Boek%202%20-%20Kosten%2C%20opbrengsten%2C%20elasticiteit%20en%20surplus/edities/chat-2026/boek/Boek_2_Compleet_Antwoorden.pdf</a:t>
+              <a:t>Antwoordmodel: https://github.com/meijer1973/4veco-lessen/blob/a8940a7a79e22857a3e306a91fe923c48c63e716/Boek%202%20-%20Kosten%2C%20opbrengsten%2C%20elasticiteit%20en%20surplus/edities/chat-2026/boek/Boek_2_Compleet_Antwoorden.pdf</a:t>
             </a:r>
           </a:p>
           <a:p xmlns:a="http://schemas.openxmlformats.org/drawingml/2006/main">
@@ -3302,13 +3302,13 @@
           <a:p xmlns:a="http://schemas.openxmlformats.org/drawingml/2006/main">
             <a:r>
               <a:rPr sz="1400"/>
-              <a:t>Bron: Boek 2, chatuitgave 2026, gedrukte pagina 74–75. https://github.com/meijer1973/4veco-lessen/blob/d53080f38ebbdbba319e6d9b89dcba86067a72be/Boek%202%20-%20Kosten%2C%20opbrengsten%2C%20elasticiteit%20en%20surplus/edities/chat-2026/boek/Boek_2_Compleet.pdf</a:t>
+              <a:t>Bron: Boek 2, chatuitgave 2026, gedrukte pagina 75–76. https://github.com/meijer1973/4veco-lessen/blob/a8940a7a79e22857a3e306a91fe923c48c63e716/Boek%202%20-%20Kosten%2C%20opbrengsten%2C%20elasticiteit%20en%20surplus/edities/chat-2026/boek/Boek_2_Compleet.pdf</a:t>
             </a:r>
           </a:p>
           <a:p xmlns:a="http://schemas.openxmlformats.org/drawingml/2006/main">
             <a:r>
               <a:rPr sz="1400"/>
-              <a:t>Antwoordmodel: https://github.com/meijer1973/4veco-lessen/blob/d53080f38ebbdbba319e6d9b89dcba86067a72be/Boek%202%20-%20Kosten%2C%20opbrengsten%2C%20elasticiteit%20en%20surplus/edities/chat-2026/boek/Boek_2_Compleet_Antwoorden.pdf</a:t>
+              <a:t>Antwoordmodel: https://github.com/meijer1973/4veco-lessen/blob/a8940a7a79e22857a3e306a91fe923c48c63e716/Boek%202%20-%20Kosten%2C%20opbrengsten%2C%20elasticiteit%20en%20surplus/edities/chat-2026/boek/Boek_2_Compleet_Antwoorden.pdf</a:t>
             </a:r>
           </a:p>
           <a:p xmlns:a="http://schemas.openxmlformats.org/drawingml/2006/main">
@@ -3433,13 +3433,13 @@
           <a:p xmlns:a="http://schemas.openxmlformats.org/drawingml/2006/main">
             <a:r>
               <a:rPr sz="1400"/>
-              <a:t>Bron: Boek 2, chatuitgave 2026, gedrukte pagina 74–75. https://github.com/meijer1973/4veco-lessen/blob/d53080f38ebbdbba319e6d9b89dcba86067a72be/Boek%202%20-%20Kosten%2C%20opbrengsten%2C%20elasticiteit%20en%20surplus/edities/chat-2026/boek/Boek_2_Compleet.pdf</a:t>
+              <a:t>Bron: Boek 2, chatuitgave 2026, gedrukte pagina 75–76. https://github.com/meijer1973/4veco-lessen/blob/a8940a7a79e22857a3e306a91fe923c48c63e716/Boek%202%20-%20Kosten%2C%20opbrengsten%2C%20elasticiteit%20en%20surplus/edities/chat-2026/boek/Boek_2_Compleet.pdf</a:t>
             </a:r>
           </a:p>
           <a:p xmlns:a="http://schemas.openxmlformats.org/drawingml/2006/main">
             <a:r>
               <a:rPr sz="1400"/>
-              <a:t>Antwoordmodel: https://github.com/meijer1973/4veco-lessen/blob/d53080f38ebbdbba319e6d9b89dcba86067a72be/Boek%202%20-%20Kosten%2C%20opbrengsten%2C%20elasticiteit%20en%20surplus/edities/chat-2026/boek/Boek_2_Compleet_Antwoorden.pdf</a:t>
+              <a:t>Antwoordmodel: https://github.com/meijer1973/4veco-lessen/blob/a8940a7a79e22857a3e306a91fe923c48c63e716/Boek%202%20-%20Kosten%2C%20opbrengsten%2C%20elasticiteit%20en%20surplus/edities/chat-2026/boek/Boek_2_Compleet_Antwoorden.pdf</a:t>
             </a:r>
           </a:p>
           <a:p xmlns:a="http://schemas.openxmlformats.org/drawingml/2006/main">
@@ -3564,13 +3564,13 @@
           <a:p xmlns:a="http://schemas.openxmlformats.org/drawingml/2006/main">
             <a:r>
               <a:rPr sz="1400"/>
-              <a:t>Bron: Boek 2, chatuitgave 2026, gedrukte pagina 74–75. https://github.com/meijer1973/4veco-lessen/blob/d53080f38ebbdbba319e6d9b89dcba86067a72be/Boek%202%20-%20Kosten%2C%20opbrengsten%2C%20elasticiteit%20en%20surplus/edities/chat-2026/boek/Boek_2_Compleet.pdf</a:t>
+              <a:t>Bron: Boek 2, chatuitgave 2026, gedrukte pagina 75–76. https://github.com/meijer1973/4veco-lessen/blob/a8940a7a79e22857a3e306a91fe923c48c63e716/Boek%202%20-%20Kosten%2C%20opbrengsten%2C%20elasticiteit%20en%20surplus/edities/chat-2026/boek/Boek_2_Compleet.pdf</a:t>
             </a:r>
           </a:p>
           <a:p xmlns:a="http://schemas.openxmlformats.org/drawingml/2006/main">
             <a:r>
               <a:rPr sz="1400"/>
-              <a:t>Antwoordmodel: https://github.com/meijer1973/4veco-lessen/blob/d53080f38ebbdbba319e6d9b89dcba86067a72be/Boek%202%20-%20Kosten%2C%20opbrengsten%2C%20elasticiteit%20en%20surplus/edities/chat-2026/boek/Boek_2_Compleet_Antwoorden.pdf</a:t>
+              <a:t>Antwoordmodel: https://github.com/meijer1973/4veco-lessen/blob/a8940a7a79e22857a3e306a91fe923c48c63e716/Boek%202%20-%20Kosten%2C%20opbrengsten%2C%20elasticiteit%20en%20surplus/edities/chat-2026/boek/Boek_2_Compleet_Antwoorden.pdf</a:t>
             </a:r>
           </a:p>
           <a:p xmlns:a="http://schemas.openxmlformats.org/drawingml/2006/main">
@@ -3695,13 +3695,13 @@
           <a:p xmlns:a="http://schemas.openxmlformats.org/drawingml/2006/main">
             <a:r>
               <a:rPr sz="1400"/>
-              <a:t>Bron: Boek 2, chatuitgave 2026, gedrukte pagina 74–75. https://github.com/meijer1973/4veco-lessen/blob/d53080f38ebbdbba319e6d9b89dcba86067a72be/Boek%202%20-%20Kosten%2C%20opbrengsten%2C%20elasticiteit%20en%20surplus/edities/chat-2026/boek/Boek_2_Compleet.pdf</a:t>
+              <a:t>Bron: Boek 2, chatuitgave 2026, gedrukte pagina 75–76. https://github.com/meijer1973/4veco-lessen/blob/a8940a7a79e22857a3e306a91fe923c48c63e716/Boek%202%20-%20Kosten%2C%20opbrengsten%2C%20elasticiteit%20en%20surplus/edities/chat-2026/boek/Boek_2_Compleet.pdf</a:t>
             </a:r>
           </a:p>
           <a:p xmlns:a="http://schemas.openxmlformats.org/drawingml/2006/main">
             <a:r>
               <a:rPr sz="1400"/>
-              <a:t>Antwoordmodel: https://github.com/meijer1973/4veco-lessen/blob/d53080f38ebbdbba319e6d9b89dcba86067a72be/Boek%202%20-%20Kosten%2C%20opbrengsten%2C%20elasticiteit%20en%20surplus/edities/chat-2026/boek/Boek_2_Compleet_Antwoorden.pdf</a:t>
+              <a:t>Antwoordmodel: https://github.com/meijer1973/4veco-lessen/blob/a8940a7a79e22857a3e306a91fe923c48c63e716/Boek%202%20-%20Kosten%2C%20opbrengsten%2C%20elasticiteit%20en%20surplus/edities/chat-2026/boek/Boek_2_Compleet_Antwoorden.pdf</a:t>
             </a:r>
           </a:p>
           <a:p xmlns:a="http://schemas.openxmlformats.org/drawingml/2006/main">
@@ -3775,7 +3775,7 @@
   </p:cSld>
   <p:clrMap bg1="lt1" tx1="dk1" bg2="lt2" tx2="dk2" accent1="accent1" accent2="accent2" accent3="accent3" accent4="accent4" accent5="accent5" accent6="accent6" hlink="hlink" folHlink="folHlink"/>
   <p:sldLayoutIdLst>
-    <p:sldLayoutId xmlns:r="http://schemas.openxmlformats.org/officeDocument/2006/relationships" id="2147483649" r:id="R0436971199fd4ed5"/>
+    <p:sldLayoutId xmlns:r="http://schemas.openxmlformats.org/officeDocument/2006/relationships" id="2147483649" r:id="R1e8385e4b6e14fdc"/>
   </p:sldLayoutIdLst>
   <p:txStyles>
     <p:titleStyle>
@@ -10066,7 +10066,7 @@
           <p:cNvPr id="29" name="Deze les: §2.3.1 Consumentensurplus">
             <a:extLst xmlns:a="http://schemas.openxmlformats.org/drawingml/2006/main">
               <a:ext uri="{FF2B5EF4-FFF2-40B4-BE49-F238E27FC236}">
-                <a16:creationId xmlns:a16="http://schemas.microsoft.com/office/drawing/2014/main" id="{FF5812A4-8A4D-405B-BDE1-E7F172000D68}"/>
+                <a16:creationId xmlns:a16="http://schemas.microsoft.com/office/drawing/2014/main" id="{F334BFA3-0CF3-4B1A-99D3-E9FD72AE3451}"/>
               </a:ext>
             </a:extLst>
           </p:cNvPr>
@@ -10123,7 +10123,7 @@
           <p:cNvPr id="2" name="">
             <a:extLst xmlns:a="http://schemas.openxmlformats.org/drawingml/2006/main">
               <a:ext uri="{FF2B5EF4-FFF2-40B4-BE49-F238E27FC236}">
-                <a16:creationId xmlns:a16="http://schemas.microsoft.com/office/drawing/2014/main" id="{AF0F5884-FE5F-4F80-A012-2E358A2A869C}"/>
+                <a16:creationId xmlns:a16="http://schemas.microsoft.com/office/drawing/2014/main" id="{EE345B75-0A24-4106-9280-DF0336B7777B}"/>
               </a:ext>
             </a:extLst>
           </p:cNvPr>
@@ -10152,7 +10152,7 @@
           <p:cNvPr id="3" name="§2.3.1 Consumentensurplus">
             <a:extLst xmlns:a="http://schemas.openxmlformats.org/drawingml/2006/main">
               <a:ext uri="{FF2B5EF4-FFF2-40B4-BE49-F238E27FC236}">
-                <a16:creationId xmlns:a16="http://schemas.microsoft.com/office/drawing/2014/main" id="{B0FCB845-97B8-444B-A82A-819D8D11771A}"/>
+                <a16:creationId xmlns:a16="http://schemas.microsoft.com/office/drawing/2014/main" id="{2A2A19D9-531B-4C21-8382-E85C1CA882F3}"/>
               </a:ext>
             </a:extLst>
           </p:cNvPr>
@@ -10209,7 +10209,7 @@
           <p:cNvPr id="4" name="1">
             <a:extLst xmlns:a="http://schemas.openxmlformats.org/drawingml/2006/main">
               <a:ext uri="{FF2B5EF4-FFF2-40B4-BE49-F238E27FC236}">
-                <a16:creationId xmlns:a16="http://schemas.microsoft.com/office/drawing/2014/main" id="{AB8712DF-525B-4F29-BDE2-A227D82773D8}"/>
+                <a16:creationId xmlns:a16="http://schemas.microsoft.com/office/drawing/2014/main" id="{F31405DA-9B1D-4DE6-AAE5-6D2D225C2552}"/>
               </a:ext>
             </a:extLst>
           </p:cNvPr>
@@ -10266,7 +10266,7 @@
           <p:cNvPr id="5" name="phase">
             <a:extLst xmlns:a="http://schemas.openxmlformats.org/drawingml/2006/main">
               <a:ext uri="{FF2B5EF4-FFF2-40B4-BE49-F238E27FC236}">
-                <a16:creationId xmlns:a16="http://schemas.microsoft.com/office/drawing/2014/main" id="{B7C17F5D-0046-42E5-930E-2641F6AC380F}"/>
+                <a16:creationId xmlns:a16="http://schemas.microsoft.com/office/drawing/2014/main" id="{F47EB194-2FE8-402C-B84F-8D30D20A2D32}"/>
               </a:ext>
             </a:extLst>
           </p:cNvPr>
@@ -10323,7 +10323,7 @@
           <p:cNvPr id="6" name="Lesroute">
             <a:extLst xmlns:a="http://schemas.openxmlformats.org/drawingml/2006/main">
               <a:ext uri="{FF2B5EF4-FFF2-40B4-BE49-F238E27FC236}">
-                <a16:creationId xmlns:a16="http://schemas.microsoft.com/office/drawing/2014/main" id="{878BEF56-27FA-43B6-BAEB-0DA7094F88AB}"/>
+                <a16:creationId xmlns:a16="http://schemas.microsoft.com/office/drawing/2014/main" id="{A5CBBF7C-D006-4FEE-A109-47B5E1510AEE}"/>
               </a:ext>
             </a:extLst>
           </p:cNvPr>
@@ -10380,7 +10380,7 @@
           <p:cNvPr id="7" name="route-number-1">
             <a:extLst xmlns:a="http://schemas.openxmlformats.org/drawingml/2006/main">
               <a:ext uri="{FF2B5EF4-FFF2-40B4-BE49-F238E27FC236}">
-                <a16:creationId xmlns:a16="http://schemas.microsoft.com/office/drawing/2014/main" id="{6F372BBB-8BAE-41D8-8CFF-E47357E5BBBE}"/>
+                <a16:creationId xmlns:a16="http://schemas.microsoft.com/office/drawing/2014/main" id="{1E3A228F-59C3-4D51-A21B-BE1533FFB729}"/>
               </a:ext>
             </a:extLst>
           </p:cNvPr>
@@ -10437,7 +10437,7 @@
           <p:cNvPr id="8" name="route-1">
             <a:extLst xmlns:a="http://schemas.openxmlformats.org/drawingml/2006/main">
               <a:ext uri="{FF2B5EF4-FFF2-40B4-BE49-F238E27FC236}">
-                <a16:creationId xmlns:a16="http://schemas.microsoft.com/office/drawing/2014/main" id="{D740E608-3BA2-45A8-88D7-EE412805D3DF}"/>
+                <a16:creationId xmlns:a16="http://schemas.microsoft.com/office/drawing/2014/main" id="{89644A90-5A42-4080-A559-8F07B9EB4964}"/>
               </a:ext>
             </a:extLst>
           </p:cNvPr>
@@ -10494,7 +10494,7 @@
           <p:cNvPr id="9" name="route-number-2">
             <a:extLst xmlns:a="http://schemas.openxmlformats.org/drawingml/2006/main">
               <a:ext uri="{FF2B5EF4-FFF2-40B4-BE49-F238E27FC236}">
-                <a16:creationId xmlns:a16="http://schemas.microsoft.com/office/drawing/2014/main" id="{2226C09E-D40B-4EDF-8A50-2FBCD9029611}"/>
+                <a16:creationId xmlns:a16="http://schemas.microsoft.com/office/drawing/2014/main" id="{CEDC40CA-9870-49C3-8815-7A57AB3E3389}"/>
               </a:ext>
             </a:extLst>
           </p:cNvPr>
@@ -10551,7 +10551,7 @@
           <p:cNvPr id="10" name="route-2">
             <a:extLst xmlns:a="http://schemas.openxmlformats.org/drawingml/2006/main">
               <a:ext uri="{FF2B5EF4-FFF2-40B4-BE49-F238E27FC236}">
-                <a16:creationId xmlns:a16="http://schemas.microsoft.com/office/drawing/2014/main" id="{A8913AC4-2AA7-4C7C-BCBC-DA12BA9CA2BD}"/>
+                <a16:creationId xmlns:a16="http://schemas.microsoft.com/office/drawing/2014/main" id="{00BD8BF8-9561-4F35-9D8E-4E5B30B2DD52}"/>
               </a:ext>
             </a:extLst>
           </p:cNvPr>
@@ -10608,7 +10608,7 @@
           <p:cNvPr id="11" name="route-number-3">
             <a:extLst xmlns:a="http://schemas.openxmlformats.org/drawingml/2006/main">
               <a:ext uri="{FF2B5EF4-FFF2-40B4-BE49-F238E27FC236}">
-                <a16:creationId xmlns:a16="http://schemas.microsoft.com/office/drawing/2014/main" id="{E9076661-8CFD-4A1A-86AD-3898C476FCA8}"/>
+                <a16:creationId xmlns:a16="http://schemas.microsoft.com/office/drawing/2014/main" id="{EAABE449-EFED-4036-96C9-AF028925DC14}"/>
               </a:ext>
             </a:extLst>
           </p:cNvPr>
@@ -10665,7 +10665,7 @@
           <p:cNvPr id="12" name="route-3">
             <a:extLst xmlns:a="http://schemas.openxmlformats.org/drawingml/2006/main">
               <a:ext uri="{FF2B5EF4-FFF2-40B4-BE49-F238E27FC236}">
-                <a16:creationId xmlns:a16="http://schemas.microsoft.com/office/drawing/2014/main" id="{93EDD645-D9E6-4CEF-9087-AAC05EE5C8A3}"/>
+                <a16:creationId xmlns:a16="http://schemas.microsoft.com/office/drawing/2014/main" id="{E6592F82-8321-4F05-BCD6-6BAB4399784D}"/>
               </a:ext>
             </a:extLst>
           </p:cNvPr>
@@ -10722,7 +10722,7 @@
           <p:cNvPr id="13" name="route-number-4">
             <a:extLst xmlns:a="http://schemas.openxmlformats.org/drawingml/2006/main">
               <a:ext uri="{FF2B5EF4-FFF2-40B4-BE49-F238E27FC236}">
-                <a16:creationId xmlns:a16="http://schemas.microsoft.com/office/drawing/2014/main" id="{C8EA164F-E6C3-4CBD-B7F4-64F4AD66B72B}"/>
+                <a16:creationId xmlns:a16="http://schemas.microsoft.com/office/drawing/2014/main" id="{019F5397-2F0B-48D5-B66F-2588F1DFF0F1}"/>
               </a:ext>
             </a:extLst>
           </p:cNvPr>
@@ -10779,7 +10779,7 @@
           <p:cNvPr id="14" name="route-4">
             <a:extLst xmlns:a="http://schemas.openxmlformats.org/drawingml/2006/main">
               <a:ext uri="{FF2B5EF4-FFF2-40B4-BE49-F238E27FC236}">
-                <a16:creationId xmlns:a16="http://schemas.microsoft.com/office/drawing/2014/main" id="{9920421F-F1C5-47D3-AF7D-26D9B874602F}"/>
+                <a16:creationId xmlns:a16="http://schemas.microsoft.com/office/drawing/2014/main" id="{420450AA-14CA-41DB-AB05-AA6D5102EBFB}"/>
               </a:ext>
             </a:extLst>
           </p:cNvPr>
@@ -10836,7 +10836,7 @@
           <p:cNvPr id="15" name="route-number-5">
             <a:extLst xmlns:a="http://schemas.openxmlformats.org/drawingml/2006/main">
               <a:ext uri="{FF2B5EF4-FFF2-40B4-BE49-F238E27FC236}">
-                <a16:creationId xmlns:a16="http://schemas.microsoft.com/office/drawing/2014/main" id="{96E97F44-E03F-4177-A4ED-A8B219BF247F}"/>
+                <a16:creationId xmlns:a16="http://schemas.microsoft.com/office/drawing/2014/main" id="{144960E0-2E93-469E-9477-9AF5856ABB78}"/>
               </a:ext>
             </a:extLst>
           </p:cNvPr>
@@ -10893,7 +10893,7 @@
           <p:cNvPr id="16" name="route-5">
             <a:extLst xmlns:a="http://schemas.openxmlformats.org/drawingml/2006/main">
               <a:ext uri="{FF2B5EF4-FFF2-40B4-BE49-F238E27FC236}">
-                <a16:creationId xmlns:a16="http://schemas.microsoft.com/office/drawing/2014/main" id="{A4250CD3-C45D-4BD7-9955-B060C776779F}"/>
+                <a16:creationId xmlns:a16="http://schemas.microsoft.com/office/drawing/2014/main" id="{CA283FBC-5C4C-4613-A64E-EA57396F59B3}"/>
               </a:ext>
             </a:extLst>
           </p:cNvPr>
@@ -10950,7 +10950,7 @@
           <p:cNvPr id="17" name="route-number-6">
             <a:extLst xmlns:a="http://schemas.openxmlformats.org/drawingml/2006/main">
               <a:ext uri="{FF2B5EF4-FFF2-40B4-BE49-F238E27FC236}">
-                <a16:creationId xmlns:a16="http://schemas.microsoft.com/office/drawing/2014/main" id="{C56163C0-200D-46D2-B64E-DE2C3F427A8F}"/>
+                <a16:creationId xmlns:a16="http://schemas.microsoft.com/office/drawing/2014/main" id="{2AA11FB1-271D-4401-A4CE-B5808729918B}"/>
               </a:ext>
             </a:extLst>
           </p:cNvPr>
@@ -11007,7 +11007,7 @@
           <p:cNvPr id="18" name="route-6">
             <a:extLst xmlns:a="http://schemas.openxmlformats.org/drawingml/2006/main">
               <a:ext uri="{FF2B5EF4-FFF2-40B4-BE49-F238E27FC236}">
-                <a16:creationId xmlns:a16="http://schemas.microsoft.com/office/drawing/2014/main" id="{63A2FDE1-3F94-4CD1-A779-E4675A259BAE}"/>
+                <a16:creationId xmlns:a16="http://schemas.microsoft.com/office/drawing/2014/main" id="{D47CF85B-2373-44A6-B338-8F95331E94DE}"/>
               </a:ext>
             </a:extLst>
           </p:cNvPr>
@@ -11064,7 +11064,7 @@
           <p:cNvPr id="19" name="route-number-7">
             <a:extLst xmlns:a="http://schemas.openxmlformats.org/drawingml/2006/main">
               <a:ext uri="{FF2B5EF4-FFF2-40B4-BE49-F238E27FC236}">
-                <a16:creationId xmlns:a16="http://schemas.microsoft.com/office/drawing/2014/main" id="{D5F93557-0E0C-4042-8D4B-E9257533B08F}"/>
+                <a16:creationId xmlns:a16="http://schemas.microsoft.com/office/drawing/2014/main" id="{F0535959-BBB4-4BED-9D0B-E5E9A7966767}"/>
               </a:ext>
             </a:extLst>
           </p:cNvPr>
@@ -11121,7 +11121,7 @@
           <p:cNvPr id="20" name="route-7">
             <a:extLst xmlns:a="http://schemas.openxmlformats.org/drawingml/2006/main">
               <a:ext uri="{FF2B5EF4-FFF2-40B4-BE49-F238E27FC236}">
-                <a16:creationId xmlns:a16="http://schemas.microsoft.com/office/drawing/2014/main" id="{BB636B54-C5FE-4F3E-BCA4-2EEA00810AEC}"/>
+                <a16:creationId xmlns:a16="http://schemas.microsoft.com/office/drawing/2014/main" id="{CABB7494-FB08-4C42-8DB5-41A0117825CF}"/>
               </a:ext>
             </a:extLst>
           </p:cNvPr>
@@ -11178,7 +11178,7 @@
           <p:cNvPr id="21" name="Lesdoelen">
             <a:extLst xmlns:a="http://schemas.openxmlformats.org/drawingml/2006/main">
               <a:ext uri="{FF2B5EF4-FFF2-40B4-BE49-F238E27FC236}">
-                <a16:creationId xmlns:a16="http://schemas.microsoft.com/office/drawing/2014/main" id="{412E0BCF-E3C5-4719-8D02-392583D22D3B}"/>
+                <a16:creationId xmlns:a16="http://schemas.microsoft.com/office/drawing/2014/main" id="{47B1AA27-46CE-45D3-A825-08F8B5A8820A}"/>
               </a:ext>
             </a:extLst>
           </p:cNvPr>
@@ -11235,7 +11235,7 @@
           <p:cNvPr id="22" name="overview-goals">
             <a:extLst xmlns:a="http://schemas.openxmlformats.org/drawingml/2006/main">
               <a:ext uri="{FF2B5EF4-FFF2-40B4-BE49-F238E27FC236}">
-                <a16:creationId xmlns:a16="http://schemas.microsoft.com/office/drawing/2014/main" id="{356D3FF7-CEEA-45FE-9BDB-0645D267327F}"/>
+                <a16:creationId xmlns:a16="http://schemas.microsoft.com/office/drawing/2014/main" id="{F5DDC564-9BD5-451C-A0C7-B63BA3A0D6DA}"/>
               </a:ext>
             </a:extLst>
           </p:cNvPr>
@@ -11338,7 +11338,7 @@
           <p:cNvPr id="23" name="">
             <a:extLst xmlns:a="http://schemas.openxmlformats.org/drawingml/2006/main">
               <a:ext uri="{FF2B5EF4-FFF2-40B4-BE49-F238E27FC236}">
-                <a16:creationId xmlns:a16="http://schemas.microsoft.com/office/drawing/2014/main" id="{B312F5D8-82C1-4E1D-BF4A-6E015E71D425}"/>
+                <a16:creationId xmlns:a16="http://schemas.microsoft.com/office/drawing/2014/main" id="{08B721BB-A918-4B8A-9B3E-920B764519DC}"/>
               </a:ext>
             </a:extLst>
           </p:cNvPr>
@@ -11367,7 +11367,7 @@
           <p:cNvPr id="24" name="Startopdracht">
             <a:extLst xmlns:a="http://schemas.openxmlformats.org/drawingml/2006/main">
               <a:ext uri="{FF2B5EF4-FFF2-40B4-BE49-F238E27FC236}">
-                <a16:creationId xmlns:a16="http://schemas.microsoft.com/office/drawing/2014/main" id="{47BDB04D-84B3-498F-AEE2-E35B3D6300DA}"/>
+                <a16:creationId xmlns:a16="http://schemas.microsoft.com/office/drawing/2014/main" id="{D0E7F706-A24E-4D83-84CB-C39414852852}"/>
               </a:ext>
             </a:extLst>
           </p:cNvPr>
@@ -11424,7 +11424,7 @@
           <p:cNvPr id="25" name="overview-start">
             <a:extLst xmlns:a="http://schemas.openxmlformats.org/drawingml/2006/main">
               <a:ext uri="{FF2B5EF4-FFF2-40B4-BE49-F238E27FC236}">
-                <a16:creationId xmlns:a16="http://schemas.microsoft.com/office/drawing/2014/main" id="{EE256EEF-2A4D-48BB-925D-1E83993969E9}"/>
+                <a16:creationId xmlns:a16="http://schemas.microsoft.com/office/drawing/2014/main" id="{0371AC6F-EFB3-4D36-ADA8-31AFA2E978CA}"/>
               </a:ext>
             </a:extLst>
           </p:cNvPr>
@@ -11471,7 +11471,7 @@
                 <a:ea typeface="Arial"/>
                 <a:cs typeface="Arial"/>
               </a:rPr>
-              <a:t>Pagina 76 · Opgaven 1 en 2</a:t>
+              <a:t>Pagina 77 · Opgaven 1 en 2</a:t>
             </a:r>
           </a:p>
           <a:p xmlns:a="http://schemas.openxmlformats.org/drawingml/2006/main">
@@ -11494,7 +11494,7 @@
                 <a:ea typeface="Arial"/>
                 <a:cs typeface="Arial"/>
               </a:rPr>
-              <a:t>2: verkennen met theorie p. 72</a:t>
+              <a:t>2: verkennen met theorie p. 73</a:t>
             </a:r>
           </a:p>
           <a:p xmlns:a="http://schemas.openxmlformats.org/drawingml/2006/main">
@@ -11517,7 +11517,7 @@
                 <a:ea typeface="Arial"/>
                 <a:cs typeface="Arial"/>
               </a:rPr>
-              <a:t>Reken- en tekenhulp: p. 74</a:t>
+              <a:t>Reken- en tekenhulp: p. 75</a:t>
             </a:r>
           </a:p>
         </p:txBody>
@@ -11527,7 +11527,7 @@
           <p:cNvPr id="26" name="">
             <a:extLst xmlns:a="http://schemas.openxmlformats.org/drawingml/2006/main">
               <a:ext uri="{FF2B5EF4-FFF2-40B4-BE49-F238E27FC236}">
-                <a16:creationId xmlns:a16="http://schemas.microsoft.com/office/drawing/2014/main" id="{DEAE4578-CD5A-4CBC-8804-D200820F75DA}"/>
+                <a16:creationId xmlns:a16="http://schemas.microsoft.com/office/drawing/2014/main" id="{835CF05F-1837-4268-BFCA-D7AC16DEE900}"/>
               </a:ext>
             </a:extLst>
           </p:cNvPr>
@@ -11556,7 +11556,7 @@
           <p:cNvPr id="27" name="Huiswerk">
             <a:extLst xmlns:a="http://schemas.openxmlformats.org/drawingml/2006/main">
               <a:ext uri="{FF2B5EF4-FFF2-40B4-BE49-F238E27FC236}">
-                <a16:creationId xmlns:a16="http://schemas.microsoft.com/office/drawing/2014/main" id="{C25BECB6-2679-4DA0-9F3F-081695D2FD34}"/>
+                <a16:creationId xmlns:a16="http://schemas.microsoft.com/office/drawing/2014/main" id="{8D303624-D44D-49B5-AB0A-937AA4CB259B}"/>
               </a:ext>
             </a:extLst>
           </p:cNvPr>
@@ -11613,7 +11613,7 @@
           <p:cNvPr id="28" name="overview-homework">
             <a:extLst xmlns:a="http://schemas.openxmlformats.org/drawingml/2006/main">
               <a:ext uri="{FF2B5EF4-FFF2-40B4-BE49-F238E27FC236}">
-                <a16:creationId xmlns:a16="http://schemas.microsoft.com/office/drawing/2014/main" id="{34641D93-31D8-46F0-9637-5E07628637B2}"/>
+                <a16:creationId xmlns:a16="http://schemas.microsoft.com/office/drawing/2014/main" id="{C59F5DD1-4B27-407E-A503-F457DBECEB31}"/>
               </a:ext>
             </a:extLst>
           </p:cNvPr>
@@ -11760,7 +11760,7 @@
     </p:spTree>
     <p:extLst>
       <p:ext uri="{BB962C8B-B14F-4D97-AF65-F5344CB8AC3E}">
-        <p14:creationId xmlns:p14="http://schemas.microsoft.com/office/powerpoint/2010/main" val="225579732"/>
+        <p14:creationId xmlns:p14="http://schemas.microsoft.com/office/powerpoint/2010/main" val="1992687842"/>
       </p:ext>
     </p:extLst>
   </p:cSld>
@@ -11791,7 +11791,7 @@
           <p:cNvPr id="10" name="Het consumentensurplus als gebied">
             <a:extLst xmlns:a="http://schemas.openxmlformats.org/drawingml/2006/main">
               <a:ext uri="{FF2B5EF4-FFF2-40B4-BE49-F238E27FC236}">
-                <a16:creationId xmlns:a16="http://schemas.microsoft.com/office/drawing/2014/main" id="{086347C1-8037-4972-A21C-3E02648660E5}"/>
+                <a16:creationId xmlns:a16="http://schemas.microsoft.com/office/drawing/2014/main" id="{377CB3FA-77ED-4B83-9BE5-6C5242809E78}"/>
               </a:ext>
             </a:extLst>
           </p:cNvPr>
@@ -11848,7 +11848,7 @@
           <p:cNvPr id="2" name="">
             <a:extLst xmlns:a="http://schemas.openxmlformats.org/drawingml/2006/main">
               <a:ext uri="{FF2B5EF4-FFF2-40B4-BE49-F238E27FC236}">
-                <a16:creationId xmlns:a16="http://schemas.microsoft.com/office/drawing/2014/main" id="{99D2C65D-2A5E-4A8A-87DD-0E5C76DC97B2}"/>
+                <a16:creationId xmlns:a16="http://schemas.microsoft.com/office/drawing/2014/main" id="{52931CC7-AF15-4882-900E-E50581EF73AB}"/>
               </a:ext>
             </a:extLst>
           </p:cNvPr>
@@ -11877,7 +11877,7 @@
           <p:cNvPr id="3" name="Uitlegvoorbeeld — niet uit het boek">
             <a:extLst xmlns:a="http://schemas.openxmlformats.org/drawingml/2006/main">
               <a:ext uri="{FF2B5EF4-FFF2-40B4-BE49-F238E27FC236}">
-                <a16:creationId xmlns:a16="http://schemas.microsoft.com/office/drawing/2014/main" id="{A866DE4C-231C-441A-BE5C-EA0460D510AF}"/>
+                <a16:creationId xmlns:a16="http://schemas.microsoft.com/office/drawing/2014/main" id="{A5BFCCAE-7CEE-4816-8AF5-0BC54BFCAC5B}"/>
               </a:ext>
             </a:extLst>
           </p:cNvPr>
@@ -11934,7 +11934,7 @@
           <p:cNvPr id="4" name="10">
             <a:extLst xmlns:a="http://schemas.openxmlformats.org/drawingml/2006/main">
               <a:ext uri="{FF2B5EF4-FFF2-40B4-BE49-F238E27FC236}">
-                <a16:creationId xmlns:a16="http://schemas.microsoft.com/office/drawing/2014/main" id="{6C12A2C1-0333-4C2B-8422-C572794D4666}"/>
+                <a16:creationId xmlns:a16="http://schemas.microsoft.com/office/drawing/2014/main" id="{AA4FD3F4-C809-4671-85CC-7896282D1D8C}"/>
               </a:ext>
             </a:extLst>
           </p:cNvPr>
@@ -11991,7 +11991,7 @@
           <p:cNvPr id="5" name="Theatermiddag: de 48 verkochte kaartjes">
             <a:extLst xmlns:a="http://schemas.openxmlformats.org/drawingml/2006/main">
               <a:ext uri="{FF2B5EF4-FFF2-40B4-BE49-F238E27FC236}">
-                <a16:creationId xmlns:a16="http://schemas.microsoft.com/office/drawing/2014/main" id="{BCD12788-C981-40AF-AF4D-EE5657B0672E}"/>
+                <a16:creationId xmlns:a16="http://schemas.microsoft.com/office/drawing/2014/main" id="{81E63DE5-581C-44CC-B463-A1AF7546BAB5}"/>
               </a:ext>
             </a:extLst>
           </p:cNvPr>
@@ -12055,7 +12055,7 @@
         </p:xfrm>
         <a:graphic xmlns:a="http://schemas.openxmlformats.org/drawingml/2006/main">
           <a:graphicData uri="http://schemas.openxmlformats.org/drawingml/2006/chart">
-            <c:chart xmlns:r="http://schemas.openxmlformats.org/officeDocument/2006/relationships" xmlns:c="http://schemas.openxmlformats.org/drawingml/2006/chart" r:id="R506ca7b6f72d42db"/>
+            <c:chart xmlns:r="http://schemas.openxmlformats.org/officeDocument/2006/relationships" xmlns:c="http://schemas.openxmlformats.org/drawingml/2006/chart" r:id="R7b00d7f792a34f7d"/>
           </a:graphicData>
         </a:graphic>
       </p:graphicFrame>
@@ -12064,7 +12064,7 @@
           <p:cNvPr id="7" name="CS">
             <a:extLst xmlns:a="http://schemas.openxmlformats.org/drawingml/2006/main">
               <a:ext uri="{FF2B5EF4-FFF2-40B4-BE49-F238E27FC236}">
-                <a16:creationId xmlns:a16="http://schemas.microsoft.com/office/drawing/2014/main" id="{376E9308-71FB-4935-ABB8-A88992BF2C1D}"/>
+                <a16:creationId xmlns:a16="http://schemas.microsoft.com/office/drawing/2014/main" id="{559FC998-C0C7-431D-9B8B-0167806C184E}"/>
               </a:ext>
             </a:extLst>
           </p:cNvPr>
@@ -12121,7 +12121,7 @@
           <p:cNvPr id="8" name="Onder V&#10;Boven P = 16&#10;Van Q = 0 tot 48">
             <a:extLst xmlns:a="http://schemas.openxmlformats.org/drawingml/2006/main">
               <a:ext uri="{FF2B5EF4-FFF2-40B4-BE49-F238E27FC236}">
-                <a16:creationId xmlns:a16="http://schemas.microsoft.com/office/drawing/2014/main" id="{FF98130E-C701-4142-9346-0AB1174BCBFE}"/>
+                <a16:creationId xmlns:a16="http://schemas.microsoft.com/office/drawing/2014/main" id="{3E556B20-B6C5-4803-B55E-A5B23DFADF0D}"/>
               </a:ext>
             </a:extLst>
           </p:cNvPr>
@@ -12224,7 +12224,7 @@
           <p:cNvPr id="9" name="Basis: 48 kaartjes&#10;Hoogte: 40 − 16&#10;= € 24 per kaartje">
             <a:extLst xmlns:a="http://schemas.openxmlformats.org/drawingml/2006/main">
               <a:ext uri="{FF2B5EF4-FFF2-40B4-BE49-F238E27FC236}">
-                <a16:creationId xmlns:a16="http://schemas.microsoft.com/office/drawing/2014/main" id="{7803F272-1223-4FB5-93ED-7010FE6FD720}"/>
+                <a16:creationId xmlns:a16="http://schemas.microsoft.com/office/drawing/2014/main" id="{2C3EF310-DA70-45F2-A657-24E4065A4968}"/>
               </a:ext>
             </a:extLst>
           </p:cNvPr>
@@ -12325,7 +12325,7 @@
     </p:spTree>
     <p:extLst>
       <p:ext uri="{BB962C8B-B14F-4D97-AF65-F5344CB8AC3E}">
-        <p14:creationId xmlns:p14="http://schemas.microsoft.com/office/powerpoint/2010/main" val="92293856"/>
+        <p14:creationId xmlns:p14="http://schemas.microsoft.com/office/powerpoint/2010/main" val="559789741"/>
       </p:ext>
     </p:extLst>
   </p:cSld>
@@ -12356,7 +12356,7 @@
           <p:cNvPr id="10" name="De oppervlakte berekenen">
             <a:extLst xmlns:a="http://schemas.openxmlformats.org/drawingml/2006/main">
               <a:ext uri="{FF2B5EF4-FFF2-40B4-BE49-F238E27FC236}">
-                <a16:creationId xmlns:a16="http://schemas.microsoft.com/office/drawing/2014/main" id="{8F04FD71-4405-4B85-8E04-8E2F09901DE8}"/>
+                <a16:creationId xmlns:a16="http://schemas.microsoft.com/office/drawing/2014/main" id="{4E66F683-46AE-4A7D-82E0-DD4CAEC41CCE}"/>
               </a:ext>
             </a:extLst>
           </p:cNvPr>
@@ -12413,7 +12413,7 @@
           <p:cNvPr id="2" name="">
             <a:extLst xmlns:a="http://schemas.openxmlformats.org/drawingml/2006/main">
               <a:ext uri="{FF2B5EF4-FFF2-40B4-BE49-F238E27FC236}">
-                <a16:creationId xmlns:a16="http://schemas.microsoft.com/office/drawing/2014/main" id="{96F0E6F8-17DA-4AC7-8DEE-7B116EA47773}"/>
+                <a16:creationId xmlns:a16="http://schemas.microsoft.com/office/drawing/2014/main" id="{D5BEE92E-3B4A-4689-8BD2-DF71655690B1}"/>
               </a:ext>
             </a:extLst>
           </p:cNvPr>
@@ -12442,7 +12442,7 @@
           <p:cNvPr id="3" name="Uitlegvoorbeeld — niet uit het boek">
             <a:extLst xmlns:a="http://schemas.openxmlformats.org/drawingml/2006/main">
               <a:ext uri="{FF2B5EF4-FFF2-40B4-BE49-F238E27FC236}">
-                <a16:creationId xmlns:a16="http://schemas.microsoft.com/office/drawing/2014/main" id="{A5BD8956-92F6-420A-B31D-A058B561B93C}"/>
+                <a16:creationId xmlns:a16="http://schemas.microsoft.com/office/drawing/2014/main" id="{17986074-5245-4C95-8675-FB6C64533544}"/>
               </a:ext>
             </a:extLst>
           </p:cNvPr>
@@ -12499,7 +12499,7 @@
           <p:cNvPr id="4" name="11">
             <a:extLst xmlns:a="http://schemas.openxmlformats.org/drawingml/2006/main">
               <a:ext uri="{FF2B5EF4-FFF2-40B4-BE49-F238E27FC236}">
-                <a16:creationId xmlns:a16="http://schemas.microsoft.com/office/drawing/2014/main" id="{A02AC651-39D8-471B-BB6B-00EE85B09EBC}"/>
+                <a16:creationId xmlns:a16="http://schemas.microsoft.com/office/drawing/2014/main" id="{75FAAC0C-61ED-49FB-8227-2A592F4FA1BC}"/>
               </a:ext>
             </a:extLst>
           </p:cNvPr>
@@ -12556,7 +12556,7 @@
           <p:cNvPr id="5" name="Een driehoek is de helft van basis × hoogte.">
             <a:extLst xmlns:a="http://schemas.openxmlformats.org/drawingml/2006/main">
               <a:ext uri="{FF2B5EF4-FFF2-40B4-BE49-F238E27FC236}">
-                <a16:creationId xmlns:a16="http://schemas.microsoft.com/office/drawing/2014/main" id="{91F89DEF-2278-4A12-8D59-DBD0C76959C4}"/>
+                <a16:creationId xmlns:a16="http://schemas.microsoft.com/office/drawing/2014/main" id="{0230F6E3-C5ED-4CE5-91FD-34774DC15126}"/>
               </a:ext>
             </a:extLst>
           </p:cNvPr>
@@ -12735,7 +12735,7 @@
           <p:cNvPr id="7" name="CS = ½ × basis × hoogte">
             <a:extLst xmlns:a="http://schemas.openxmlformats.org/drawingml/2006/main">
               <a:ext uri="{FF2B5EF4-FFF2-40B4-BE49-F238E27FC236}">
-                <a16:creationId xmlns:a16="http://schemas.microsoft.com/office/drawing/2014/main" id="{C9D3425A-6BEB-4715-AD68-5135C2F5D2FB}"/>
+                <a16:creationId xmlns:a16="http://schemas.microsoft.com/office/drawing/2014/main" id="{AA1ADEE3-D1DE-4F5B-9114-BCAA42ACF297}"/>
               </a:ext>
             </a:extLst>
           </p:cNvPr>
@@ -12792,7 +12792,7 @@
           <p:cNvPr id="8" name="CS = ½ × 48 × 24 = € 576">
             <a:extLst xmlns:a="http://schemas.openxmlformats.org/drawingml/2006/main">
               <a:ext uri="{FF2B5EF4-FFF2-40B4-BE49-F238E27FC236}">
-                <a16:creationId xmlns:a16="http://schemas.microsoft.com/office/drawing/2014/main" id="{1613ACDC-AF8F-4581-A2D8-2C664325D47A}"/>
+                <a16:creationId xmlns:a16="http://schemas.microsoft.com/office/drawing/2014/main" id="{AD5D3CD9-BCC4-4F43-A023-0125DF04EB06}"/>
               </a:ext>
             </a:extLst>
           </p:cNvPr>
@@ -12849,7 +12849,7 @@
           <p:cNvPr id="9" name="Kaartjes × € per kaartje = €">
             <a:extLst xmlns:a="http://schemas.openxmlformats.org/drawingml/2006/main">
               <a:ext uri="{FF2B5EF4-FFF2-40B4-BE49-F238E27FC236}">
-                <a16:creationId xmlns:a16="http://schemas.microsoft.com/office/drawing/2014/main" id="{29590F9B-D290-4D2B-B56A-C853A2DBFE85}"/>
+                <a16:creationId xmlns:a16="http://schemas.microsoft.com/office/drawing/2014/main" id="{396811EA-6C03-48B0-BBEE-9A87F7ABB963}"/>
               </a:ext>
             </a:extLst>
           </p:cNvPr>
@@ -12904,7 +12904,7 @@
     </p:spTree>
     <p:extLst>
       <p:ext uri="{BB962C8B-B14F-4D97-AF65-F5344CB8AC3E}">
-        <p14:creationId xmlns:p14="http://schemas.microsoft.com/office/powerpoint/2010/main" val="1485898938"/>
+        <p14:creationId xmlns:p14="http://schemas.microsoft.com/office/powerpoint/2010/main" val="1640229572"/>
       </p:ext>
     </p:extLst>
   </p:cSld>
@@ -12935,7 +12935,7 @@
           <p:cNvPr id="8" name="Voordeel en betaling">
             <a:extLst xmlns:a="http://schemas.openxmlformats.org/drawingml/2006/main">
               <a:ext uri="{FF2B5EF4-FFF2-40B4-BE49-F238E27FC236}">
-                <a16:creationId xmlns:a16="http://schemas.microsoft.com/office/drawing/2014/main" id="{3A25DC80-147E-4C0D-B1A0-34E478257850}"/>
+                <a16:creationId xmlns:a16="http://schemas.microsoft.com/office/drawing/2014/main" id="{142DD3BE-12EE-46B6-9DEA-3BA19C0F078A}"/>
               </a:ext>
             </a:extLst>
           </p:cNvPr>
@@ -12992,7 +12992,7 @@
           <p:cNvPr id="2" name="">
             <a:extLst xmlns:a="http://schemas.openxmlformats.org/drawingml/2006/main">
               <a:ext uri="{FF2B5EF4-FFF2-40B4-BE49-F238E27FC236}">
-                <a16:creationId xmlns:a16="http://schemas.microsoft.com/office/drawing/2014/main" id="{B2022B26-5C31-42F6-B4E5-ADB135D0F219}"/>
+                <a16:creationId xmlns:a16="http://schemas.microsoft.com/office/drawing/2014/main" id="{CED614C3-770C-4746-AAFA-ECE55464552A}"/>
               </a:ext>
             </a:extLst>
           </p:cNvPr>
@@ -13021,7 +13021,7 @@
           <p:cNvPr id="3" name="Uitlegvoorbeeld — niet uit het boek">
             <a:extLst xmlns:a="http://schemas.openxmlformats.org/drawingml/2006/main">
               <a:ext uri="{FF2B5EF4-FFF2-40B4-BE49-F238E27FC236}">
-                <a16:creationId xmlns:a16="http://schemas.microsoft.com/office/drawing/2014/main" id="{064B283B-4BE1-4953-A6EA-071DDABAD054}"/>
+                <a16:creationId xmlns:a16="http://schemas.microsoft.com/office/drawing/2014/main" id="{7A378A29-BE07-4244-8EA8-323FBC29F71D}"/>
               </a:ext>
             </a:extLst>
           </p:cNvPr>
@@ -13078,7 +13078,7 @@
           <p:cNvPr id="4" name="12">
             <a:extLst xmlns:a="http://schemas.openxmlformats.org/drawingml/2006/main">
               <a:ext uri="{FF2B5EF4-FFF2-40B4-BE49-F238E27FC236}">
-                <a16:creationId xmlns:a16="http://schemas.microsoft.com/office/drawing/2014/main" id="{B6B38EF9-52ED-489D-9A40-CE82835FB592}"/>
+                <a16:creationId xmlns:a16="http://schemas.microsoft.com/office/drawing/2014/main" id="{D2BE2C12-47E3-4D62-8B92-95894FAA84A5}"/>
               </a:ext>
             </a:extLst>
           </p:cNvPr>
@@ -13135,7 +13135,7 @@
           <p:cNvPr id="5" name="Theatermiddag: 48 verkochte kaartjes bij P = € 16">
             <a:extLst xmlns:a="http://schemas.openxmlformats.org/drawingml/2006/main">
               <a:ext uri="{FF2B5EF4-FFF2-40B4-BE49-F238E27FC236}">
-                <a16:creationId xmlns:a16="http://schemas.microsoft.com/office/drawing/2014/main" id="{B404C2CD-25A7-458E-A517-C2918DD479CE}"/>
+                <a16:creationId xmlns:a16="http://schemas.microsoft.com/office/drawing/2014/main" id="{2CBE363C-EE6B-4EA6-888C-CC6B4B350CD6}"/>
               </a:ext>
             </a:extLst>
           </p:cNvPr>
@@ -13437,7 +13437,7 @@
           <p:cNvPr id="7" name="De kopers hebben samen € 576 meer over voor de 48 kaartjes d">
             <a:extLst xmlns:a="http://schemas.openxmlformats.org/drawingml/2006/main">
               <a:ext uri="{FF2B5EF4-FFF2-40B4-BE49-F238E27FC236}">
-                <a16:creationId xmlns:a16="http://schemas.microsoft.com/office/drawing/2014/main" id="{6FC8759A-AA77-46AE-9279-11219B45AC59}"/>
+                <a16:creationId xmlns:a16="http://schemas.microsoft.com/office/drawing/2014/main" id="{4DF2CEE9-96A5-49FA-AFCC-2846D1C489C6}"/>
               </a:ext>
             </a:extLst>
           </p:cNvPr>
@@ -13492,7 +13492,7 @@
     </p:spTree>
     <p:extLst>
       <p:ext uri="{BB962C8B-B14F-4D97-AF65-F5344CB8AC3E}">
-        <p14:creationId xmlns:p14="http://schemas.microsoft.com/office/powerpoint/2010/main" val="1351355162"/>
+        <p14:creationId xmlns:p14="http://schemas.microsoft.com/office/powerpoint/2010/main" val="400704686"/>
       </p:ext>
     </p:extLst>
   </p:cSld>
@@ -13523,7 +13523,7 @@
           <p:cNvPr id="8" name="Korte controle">
             <a:extLst xmlns:a="http://schemas.openxmlformats.org/drawingml/2006/main">
               <a:ext uri="{FF2B5EF4-FFF2-40B4-BE49-F238E27FC236}">
-                <a16:creationId xmlns:a16="http://schemas.microsoft.com/office/drawing/2014/main" id="{B91199BF-EB1D-459D-8C21-E9F14085D448}"/>
+                <a16:creationId xmlns:a16="http://schemas.microsoft.com/office/drawing/2014/main" id="{53EE18A3-B03E-4EAC-B9C9-424B6584B985}"/>
               </a:ext>
             </a:extLst>
           </p:cNvPr>
@@ -13580,7 +13580,7 @@
           <p:cNvPr id="2" name="">
             <a:extLst xmlns:a="http://schemas.openxmlformats.org/drawingml/2006/main">
               <a:ext uri="{FF2B5EF4-FFF2-40B4-BE49-F238E27FC236}">
-                <a16:creationId xmlns:a16="http://schemas.microsoft.com/office/drawing/2014/main" id="{404FAE29-EC3A-421B-92E4-DE17E5E59E9D}"/>
+                <a16:creationId xmlns:a16="http://schemas.microsoft.com/office/drawing/2014/main" id="{4C8F602E-115E-47FE-9A7E-7C891312C5A0}"/>
               </a:ext>
             </a:extLst>
           </p:cNvPr>
@@ -13609,7 +13609,7 @@
           <p:cNvPr id="3" name="Uitlegvoorbeeld — niet uit het boek">
             <a:extLst xmlns:a="http://schemas.openxmlformats.org/drawingml/2006/main">
               <a:ext uri="{FF2B5EF4-FFF2-40B4-BE49-F238E27FC236}">
-                <a16:creationId xmlns:a16="http://schemas.microsoft.com/office/drawing/2014/main" id="{C6069FE4-2E52-4F9D-8E11-A94467AB33A9}"/>
+                <a16:creationId xmlns:a16="http://schemas.microsoft.com/office/drawing/2014/main" id="{D1195A23-B0F8-41D1-A5DC-8A890A6F7397}"/>
               </a:ext>
             </a:extLst>
           </p:cNvPr>
@@ -13666,7 +13666,7 @@
           <p:cNvPr id="4" name="13">
             <a:extLst xmlns:a="http://schemas.openxmlformats.org/drawingml/2006/main">
               <a:ext uri="{FF2B5EF4-FFF2-40B4-BE49-F238E27FC236}">
-                <a16:creationId xmlns:a16="http://schemas.microsoft.com/office/drawing/2014/main" id="{FD97943B-AF70-4320-AEAB-7C01E9B47A78}"/>
+                <a16:creationId xmlns:a16="http://schemas.microsoft.com/office/drawing/2014/main" id="{FBBA028B-75F4-4BB7-9B85-7AC258D9778C}"/>
               </a:ext>
             </a:extLst>
           </p:cNvPr>
@@ -13723,7 +13723,7 @@
           <p:cNvPr id="5" name="Theatermiddag: P = 40 − 0,5Q, prijs € 16 en Q = 48">
             <a:extLst xmlns:a="http://schemas.openxmlformats.org/drawingml/2006/main">
               <a:ext uri="{FF2B5EF4-FFF2-40B4-BE49-F238E27FC236}">
-                <a16:creationId xmlns:a16="http://schemas.microsoft.com/office/drawing/2014/main" id="{BF13446A-B983-4A31-B1D6-62815DB76D96}"/>
+                <a16:creationId xmlns:a16="http://schemas.microsoft.com/office/drawing/2014/main" id="{1B308FAF-CD63-45BB-8F42-1FC26E1D37A1}"/>
               </a:ext>
             </a:extLst>
           </p:cNvPr>
@@ -13780,7 +13780,7 @@
           <p:cNvPr id="6" name="Een leerling rekent: CS = ½ × 48 × 16.">
             <a:extLst xmlns:a="http://schemas.openxmlformats.org/drawingml/2006/main">
               <a:ext uri="{FF2B5EF4-FFF2-40B4-BE49-F238E27FC236}">
-                <a16:creationId xmlns:a16="http://schemas.microsoft.com/office/drawing/2014/main" id="{3F9F0894-F6BD-456E-96A9-F975E231C455}"/>
+                <a16:creationId xmlns:a16="http://schemas.microsoft.com/office/drawing/2014/main" id="{755F5DCC-1763-470F-BC5A-65CEA11B1CF8}"/>
               </a:ext>
             </a:extLst>
           </p:cNvPr>
@@ -13837,7 +13837,7 @@
           <p:cNvPr id="7" name="Welk deel van deze berekening moet veranderen?&#10;Leg uit met d">
             <a:extLst xmlns:a="http://schemas.openxmlformats.org/drawingml/2006/main">
               <a:ext uri="{FF2B5EF4-FFF2-40B4-BE49-F238E27FC236}">
-                <a16:creationId xmlns:a16="http://schemas.microsoft.com/office/drawing/2014/main" id="{FE7B60A2-5F5E-48BF-A3A0-0E14EE171C29}"/>
+                <a16:creationId xmlns:a16="http://schemas.microsoft.com/office/drawing/2014/main" id="{8B51ACB2-5F26-48CE-A098-9596D7D38D83}"/>
               </a:ext>
             </a:extLst>
           </p:cNvPr>
@@ -13915,7 +13915,7 @@
     </p:spTree>
     <p:extLst>
       <p:ext uri="{BB962C8B-B14F-4D97-AF65-F5344CB8AC3E}">
-        <p14:creationId xmlns:p14="http://schemas.microsoft.com/office/powerpoint/2010/main" val="1740792286"/>
+        <p14:creationId xmlns:p14="http://schemas.microsoft.com/office/powerpoint/2010/main" val="2123674896"/>
       </p:ext>
     </p:extLst>
   </p:cSld>
@@ -13946,7 +13946,7 @@
           <p:cNvPr id="10" name="Korte controle: de juiste hoogte">
             <a:extLst xmlns:a="http://schemas.openxmlformats.org/drawingml/2006/main">
               <a:ext uri="{FF2B5EF4-FFF2-40B4-BE49-F238E27FC236}">
-                <a16:creationId xmlns:a16="http://schemas.microsoft.com/office/drawing/2014/main" id="{B621E991-6160-4E1A-85FE-5C71B53CC0E4}"/>
+                <a16:creationId xmlns:a16="http://schemas.microsoft.com/office/drawing/2014/main" id="{5957C033-1B76-42EB-9A91-1EAE7568D26F}"/>
               </a:ext>
             </a:extLst>
           </p:cNvPr>
@@ -14003,7 +14003,7 @@
           <p:cNvPr id="2" name="">
             <a:extLst xmlns:a="http://schemas.openxmlformats.org/drawingml/2006/main">
               <a:ext uri="{FF2B5EF4-FFF2-40B4-BE49-F238E27FC236}">
-                <a16:creationId xmlns:a16="http://schemas.microsoft.com/office/drawing/2014/main" id="{BE32F150-2255-4EDF-BA3C-F7E35A35D32D}"/>
+                <a16:creationId xmlns:a16="http://schemas.microsoft.com/office/drawing/2014/main" id="{EDC8D2E7-F820-445B-A031-A5E792678335}"/>
               </a:ext>
             </a:extLst>
           </p:cNvPr>
@@ -14032,7 +14032,7 @@
           <p:cNvPr id="3" name="Uitlegvoorbeeld — niet uit het boek">
             <a:extLst xmlns:a="http://schemas.openxmlformats.org/drawingml/2006/main">
               <a:ext uri="{FF2B5EF4-FFF2-40B4-BE49-F238E27FC236}">
-                <a16:creationId xmlns:a16="http://schemas.microsoft.com/office/drawing/2014/main" id="{CF673D2B-68D9-43AC-AA6E-FC4340E0CA8D}"/>
+                <a16:creationId xmlns:a16="http://schemas.microsoft.com/office/drawing/2014/main" id="{B3383904-DB17-4B2E-AEE9-BDA1AE82E68A}"/>
               </a:ext>
             </a:extLst>
           </p:cNvPr>
@@ -14089,7 +14089,7 @@
           <p:cNvPr id="4" name="14">
             <a:extLst xmlns:a="http://schemas.openxmlformats.org/drawingml/2006/main">
               <a:ext uri="{FF2B5EF4-FFF2-40B4-BE49-F238E27FC236}">
-                <a16:creationId xmlns:a16="http://schemas.microsoft.com/office/drawing/2014/main" id="{8D623142-63FF-4DA1-9EC4-3AC5E2B93F8C}"/>
+                <a16:creationId xmlns:a16="http://schemas.microsoft.com/office/drawing/2014/main" id="{01DF43D9-37DC-4DD3-B5C7-901604CA157C}"/>
               </a:ext>
             </a:extLst>
           </p:cNvPr>
@@ -14146,7 +14146,7 @@
           <p:cNvPr id="5" name="Theatermiddag: P = 40 − 0,5Q, prijs € 16 en Q = 48">
             <a:extLst xmlns:a="http://schemas.openxmlformats.org/drawingml/2006/main">
               <a:ext uri="{FF2B5EF4-FFF2-40B4-BE49-F238E27FC236}">
-                <a16:creationId xmlns:a16="http://schemas.microsoft.com/office/drawing/2014/main" id="{3F380E35-257C-4CA3-AF3C-6D93BCFBAA95}"/>
+                <a16:creationId xmlns:a16="http://schemas.microsoft.com/office/drawing/2014/main" id="{DD73838D-91FA-41EF-985E-4B132D54F088}"/>
               </a:ext>
             </a:extLst>
           </p:cNvPr>
@@ -14203,7 +14203,7 @@
           <p:cNvPr id="6" name="Een leerling rekent: CS = ½ × 48 × 16.">
             <a:extLst xmlns:a="http://schemas.openxmlformats.org/drawingml/2006/main">
               <a:ext uri="{FF2B5EF4-FFF2-40B4-BE49-F238E27FC236}">
-                <a16:creationId xmlns:a16="http://schemas.microsoft.com/office/drawing/2014/main" id="{D438EE32-C845-4F55-BED7-13E012AE6799}"/>
+                <a16:creationId xmlns:a16="http://schemas.microsoft.com/office/drawing/2014/main" id="{E07A058D-2239-4E00-95FF-ED7ECA1E84C5}"/>
               </a:ext>
             </a:extLst>
           </p:cNvPr>
@@ -14260,7 +14260,7 @@
           <p:cNvPr id="7" name="De hoogte is 40 − 16 = € 24 per kaartje.">
             <a:extLst xmlns:a="http://schemas.openxmlformats.org/drawingml/2006/main">
               <a:ext uri="{FF2B5EF4-FFF2-40B4-BE49-F238E27FC236}">
-                <a16:creationId xmlns:a16="http://schemas.microsoft.com/office/drawing/2014/main" id="{66034E0F-6945-4DC1-84EC-06F3189F9DB2}"/>
+                <a16:creationId xmlns:a16="http://schemas.microsoft.com/office/drawing/2014/main" id="{A45769D4-4C80-4B73-98C4-11E114BD6F3A}"/>
               </a:ext>
             </a:extLst>
           </p:cNvPr>
@@ -14317,7 +14317,7 @@
           <p:cNvPr id="8" name="CS = ½ × 48 × 24 = € 576">
             <a:extLst xmlns:a="http://schemas.openxmlformats.org/drawingml/2006/main">
               <a:ext uri="{FF2B5EF4-FFF2-40B4-BE49-F238E27FC236}">
-                <a16:creationId xmlns:a16="http://schemas.microsoft.com/office/drawing/2014/main" id="{C69FAE5D-0143-411A-A2D4-E4BE0037572A}"/>
+                <a16:creationId xmlns:a16="http://schemas.microsoft.com/office/drawing/2014/main" id="{829F14A2-FA11-4F4C-9831-C3D72EB8B0DF}"/>
               </a:ext>
             </a:extLst>
           </p:cNvPr>
@@ -14374,7 +14374,7 @@
           <p:cNvPr id="9" name="Je meet vanaf de prijslijn tot de bovenkant van V.">
             <a:extLst xmlns:a="http://schemas.openxmlformats.org/drawingml/2006/main">
               <a:ext uri="{FF2B5EF4-FFF2-40B4-BE49-F238E27FC236}">
-                <a16:creationId xmlns:a16="http://schemas.microsoft.com/office/drawing/2014/main" id="{BF963CBB-CB03-4602-B0FC-F07ABB42CAC3}"/>
+                <a16:creationId xmlns:a16="http://schemas.microsoft.com/office/drawing/2014/main" id="{73D896C0-0965-4D97-B3CA-E3B36ED43576}"/>
               </a:ext>
             </a:extLst>
           </p:cNvPr>
@@ -14429,7 +14429,7 @@
     </p:spTree>
     <p:extLst>
       <p:ext uri="{BB962C8B-B14F-4D97-AF65-F5344CB8AC3E}">
-        <p14:creationId xmlns:p14="http://schemas.microsoft.com/office/powerpoint/2010/main" val="55771752"/>
+        <p14:creationId xmlns:p14="http://schemas.microsoft.com/office/powerpoint/2010/main" val="540380562"/>
       </p:ext>
     </p:extLst>
   </p:cSld>
@@ -14460,7 +14460,7 @@
           <p:cNvPr id="29" name="Deze les: §2.3.1 Consumentensurplus">
             <a:extLst xmlns:a="http://schemas.openxmlformats.org/drawingml/2006/main">
               <a:ext uri="{FF2B5EF4-FFF2-40B4-BE49-F238E27FC236}">
-                <a16:creationId xmlns:a16="http://schemas.microsoft.com/office/drawing/2014/main" id="{24F88329-4502-41E8-BA34-445EDE091C94}"/>
+                <a16:creationId xmlns:a16="http://schemas.microsoft.com/office/drawing/2014/main" id="{90C65AEE-DD60-4688-9A98-F8E8BA537C13}"/>
               </a:ext>
             </a:extLst>
           </p:cNvPr>
@@ -14517,7 +14517,7 @@
           <p:cNvPr id="2" name="">
             <a:extLst xmlns:a="http://schemas.openxmlformats.org/drawingml/2006/main">
               <a:ext uri="{FF2B5EF4-FFF2-40B4-BE49-F238E27FC236}">
-                <a16:creationId xmlns:a16="http://schemas.microsoft.com/office/drawing/2014/main" id="{7D0BCEE1-1974-4FE1-AF49-6055D92A12CF}"/>
+                <a16:creationId xmlns:a16="http://schemas.microsoft.com/office/drawing/2014/main" id="{87860429-B8E6-4D9C-8F40-65D134E51E47}"/>
               </a:ext>
             </a:extLst>
           </p:cNvPr>
@@ -14546,7 +14546,7 @@
           <p:cNvPr id="3" name="§2.3.1 Consumentensurplus">
             <a:extLst xmlns:a="http://schemas.openxmlformats.org/drawingml/2006/main">
               <a:ext uri="{FF2B5EF4-FFF2-40B4-BE49-F238E27FC236}">
-                <a16:creationId xmlns:a16="http://schemas.microsoft.com/office/drawing/2014/main" id="{A55DDFE4-93A1-4852-8AE0-7C13837C2B3B}"/>
+                <a16:creationId xmlns:a16="http://schemas.microsoft.com/office/drawing/2014/main" id="{81069E59-28AF-4F3C-9C39-E3C65BBFBA32}"/>
               </a:ext>
             </a:extLst>
           </p:cNvPr>
@@ -14603,7 +14603,7 @@
           <p:cNvPr id="4" name="15">
             <a:extLst xmlns:a="http://schemas.openxmlformats.org/drawingml/2006/main">
               <a:ext uri="{FF2B5EF4-FFF2-40B4-BE49-F238E27FC236}">
-                <a16:creationId xmlns:a16="http://schemas.microsoft.com/office/drawing/2014/main" id="{C2FEC004-24E2-4F35-8D53-A1914C1B7908}"/>
+                <a16:creationId xmlns:a16="http://schemas.microsoft.com/office/drawing/2014/main" id="{0811E318-E865-4E06-A6E3-ABB785B9AA37}"/>
               </a:ext>
             </a:extLst>
           </p:cNvPr>
@@ -14660,7 +14660,7 @@
           <p:cNvPr id="5" name="phase">
             <a:extLst xmlns:a="http://schemas.openxmlformats.org/drawingml/2006/main">
               <a:ext uri="{FF2B5EF4-FFF2-40B4-BE49-F238E27FC236}">
-                <a16:creationId xmlns:a16="http://schemas.microsoft.com/office/drawing/2014/main" id="{D356C976-29FE-4AED-8445-818474A3D649}"/>
+                <a16:creationId xmlns:a16="http://schemas.microsoft.com/office/drawing/2014/main" id="{AFA3009D-48AB-4FF0-A94F-C37DDC077919}"/>
               </a:ext>
             </a:extLst>
           </p:cNvPr>
@@ -14717,7 +14717,7 @@
           <p:cNvPr id="6" name="Lesroute">
             <a:extLst xmlns:a="http://schemas.openxmlformats.org/drawingml/2006/main">
               <a:ext uri="{FF2B5EF4-FFF2-40B4-BE49-F238E27FC236}">
-                <a16:creationId xmlns:a16="http://schemas.microsoft.com/office/drawing/2014/main" id="{2148E028-BC29-45D1-8F84-D0D7E0CB97CF}"/>
+                <a16:creationId xmlns:a16="http://schemas.microsoft.com/office/drawing/2014/main" id="{FAC89F79-5082-4AAA-AA00-58423EDBCDE1}"/>
               </a:ext>
             </a:extLst>
           </p:cNvPr>
@@ -14774,7 +14774,7 @@
           <p:cNvPr id="7" name="route-number-1">
             <a:extLst xmlns:a="http://schemas.openxmlformats.org/drawingml/2006/main">
               <a:ext uri="{FF2B5EF4-FFF2-40B4-BE49-F238E27FC236}">
-                <a16:creationId xmlns:a16="http://schemas.microsoft.com/office/drawing/2014/main" id="{F3CA68B0-3863-4D16-975F-27E336BA2F16}"/>
+                <a16:creationId xmlns:a16="http://schemas.microsoft.com/office/drawing/2014/main" id="{4D0D7CB3-454D-41AB-9A04-8E7FF5783EEA}"/>
               </a:ext>
             </a:extLst>
           </p:cNvPr>
@@ -14831,7 +14831,7 @@
           <p:cNvPr id="8" name="route-1">
             <a:extLst xmlns:a="http://schemas.openxmlformats.org/drawingml/2006/main">
               <a:ext uri="{FF2B5EF4-FFF2-40B4-BE49-F238E27FC236}">
-                <a16:creationId xmlns:a16="http://schemas.microsoft.com/office/drawing/2014/main" id="{55565C16-DE2B-430D-95BB-C3D1948759AA}"/>
+                <a16:creationId xmlns:a16="http://schemas.microsoft.com/office/drawing/2014/main" id="{896E8B1D-E941-4A4F-BA5F-5B75E10AB3FC}"/>
               </a:ext>
             </a:extLst>
           </p:cNvPr>
@@ -14888,7 +14888,7 @@
           <p:cNvPr id="9" name="route-number-2">
             <a:extLst xmlns:a="http://schemas.openxmlformats.org/drawingml/2006/main">
               <a:ext uri="{FF2B5EF4-FFF2-40B4-BE49-F238E27FC236}">
-                <a16:creationId xmlns:a16="http://schemas.microsoft.com/office/drawing/2014/main" id="{CBB01813-110B-4A98-834E-D938B99749BF}"/>
+                <a16:creationId xmlns:a16="http://schemas.microsoft.com/office/drawing/2014/main" id="{1C15DC4B-ACA7-4B3C-B485-7936572E18A6}"/>
               </a:ext>
             </a:extLst>
           </p:cNvPr>
@@ -14945,7 +14945,7 @@
           <p:cNvPr id="10" name="route-2">
             <a:extLst xmlns:a="http://schemas.openxmlformats.org/drawingml/2006/main">
               <a:ext uri="{FF2B5EF4-FFF2-40B4-BE49-F238E27FC236}">
-                <a16:creationId xmlns:a16="http://schemas.microsoft.com/office/drawing/2014/main" id="{868ADA74-164D-44AB-A27B-57003E559F2E}"/>
+                <a16:creationId xmlns:a16="http://schemas.microsoft.com/office/drawing/2014/main" id="{C62735B8-B116-41A0-8E4D-9A244881BB1B}"/>
               </a:ext>
             </a:extLst>
           </p:cNvPr>
@@ -15002,7 +15002,7 @@
           <p:cNvPr id="11" name="route-number-3">
             <a:extLst xmlns:a="http://schemas.openxmlformats.org/drawingml/2006/main">
               <a:ext uri="{FF2B5EF4-FFF2-40B4-BE49-F238E27FC236}">
-                <a16:creationId xmlns:a16="http://schemas.microsoft.com/office/drawing/2014/main" id="{450A085E-DC44-4673-93BD-83515AD68A3E}"/>
+                <a16:creationId xmlns:a16="http://schemas.microsoft.com/office/drawing/2014/main" id="{DCBDC5A6-481D-4ACF-9BAE-B77A09F861F8}"/>
               </a:ext>
             </a:extLst>
           </p:cNvPr>
@@ -15059,7 +15059,7 @@
           <p:cNvPr id="12" name="route-3">
             <a:extLst xmlns:a="http://schemas.openxmlformats.org/drawingml/2006/main">
               <a:ext uri="{FF2B5EF4-FFF2-40B4-BE49-F238E27FC236}">
-                <a16:creationId xmlns:a16="http://schemas.microsoft.com/office/drawing/2014/main" id="{81FEF1BD-A7A5-4CB1-A67D-AC1FBC5D81FD}"/>
+                <a16:creationId xmlns:a16="http://schemas.microsoft.com/office/drawing/2014/main" id="{304F434F-197D-4941-877A-3A3E0EFDC366}"/>
               </a:ext>
             </a:extLst>
           </p:cNvPr>
@@ -15116,7 +15116,7 @@
           <p:cNvPr id="13" name="route-number-4">
             <a:extLst xmlns:a="http://schemas.openxmlformats.org/drawingml/2006/main">
               <a:ext uri="{FF2B5EF4-FFF2-40B4-BE49-F238E27FC236}">
-                <a16:creationId xmlns:a16="http://schemas.microsoft.com/office/drawing/2014/main" id="{DC3A224D-399F-4F22-8A84-1AF753B8B7D2}"/>
+                <a16:creationId xmlns:a16="http://schemas.microsoft.com/office/drawing/2014/main" id="{7CAB30E1-1C13-43F8-93A4-4FB103E8C4CB}"/>
               </a:ext>
             </a:extLst>
           </p:cNvPr>
@@ -15173,7 +15173,7 @@
           <p:cNvPr id="14" name="route-4">
             <a:extLst xmlns:a="http://schemas.openxmlformats.org/drawingml/2006/main">
               <a:ext uri="{FF2B5EF4-FFF2-40B4-BE49-F238E27FC236}">
-                <a16:creationId xmlns:a16="http://schemas.microsoft.com/office/drawing/2014/main" id="{9531E94F-DBFE-4CF1-9944-650414DD4891}"/>
+                <a16:creationId xmlns:a16="http://schemas.microsoft.com/office/drawing/2014/main" id="{F1A1602B-F1DF-4C41-9275-EFBE6B364AED}"/>
               </a:ext>
             </a:extLst>
           </p:cNvPr>
@@ -15230,7 +15230,7 @@
           <p:cNvPr id="15" name="route-number-5">
             <a:extLst xmlns:a="http://schemas.openxmlformats.org/drawingml/2006/main">
               <a:ext uri="{FF2B5EF4-FFF2-40B4-BE49-F238E27FC236}">
-                <a16:creationId xmlns:a16="http://schemas.microsoft.com/office/drawing/2014/main" id="{827EA2D9-6B6C-4E96-9369-C8E6A1B539E9}"/>
+                <a16:creationId xmlns:a16="http://schemas.microsoft.com/office/drawing/2014/main" id="{B764AA73-594F-4B32-AAD6-709871B4E990}"/>
               </a:ext>
             </a:extLst>
           </p:cNvPr>
@@ -15287,7 +15287,7 @@
           <p:cNvPr id="16" name="route-5">
             <a:extLst xmlns:a="http://schemas.openxmlformats.org/drawingml/2006/main">
               <a:ext uri="{FF2B5EF4-FFF2-40B4-BE49-F238E27FC236}">
-                <a16:creationId xmlns:a16="http://schemas.microsoft.com/office/drawing/2014/main" id="{3504FA95-2EDE-41DD-8D9E-441164BDC9ED}"/>
+                <a16:creationId xmlns:a16="http://schemas.microsoft.com/office/drawing/2014/main" id="{14255181-F603-4598-BE24-BD330DDBB2B3}"/>
               </a:ext>
             </a:extLst>
           </p:cNvPr>
@@ -15344,7 +15344,7 @@
           <p:cNvPr id="17" name="route-number-6">
             <a:extLst xmlns:a="http://schemas.openxmlformats.org/drawingml/2006/main">
               <a:ext uri="{FF2B5EF4-FFF2-40B4-BE49-F238E27FC236}">
-                <a16:creationId xmlns:a16="http://schemas.microsoft.com/office/drawing/2014/main" id="{FADB291F-3A11-4E83-A60A-90C2C3E6103F}"/>
+                <a16:creationId xmlns:a16="http://schemas.microsoft.com/office/drawing/2014/main" id="{D0342F7C-AFEB-4D32-95D5-FED5A554C302}"/>
               </a:ext>
             </a:extLst>
           </p:cNvPr>
@@ -15401,7 +15401,7 @@
           <p:cNvPr id="18" name="route-6">
             <a:extLst xmlns:a="http://schemas.openxmlformats.org/drawingml/2006/main">
               <a:ext uri="{FF2B5EF4-FFF2-40B4-BE49-F238E27FC236}">
-                <a16:creationId xmlns:a16="http://schemas.microsoft.com/office/drawing/2014/main" id="{9B0C9D74-F691-4F92-A167-38CF93D1AD48}"/>
+                <a16:creationId xmlns:a16="http://schemas.microsoft.com/office/drawing/2014/main" id="{18D54A1C-2A73-4596-869E-1CC5C38CDDCB}"/>
               </a:ext>
             </a:extLst>
           </p:cNvPr>
@@ -15458,7 +15458,7 @@
           <p:cNvPr id="19" name="route-number-7">
             <a:extLst xmlns:a="http://schemas.openxmlformats.org/drawingml/2006/main">
               <a:ext uri="{FF2B5EF4-FFF2-40B4-BE49-F238E27FC236}">
-                <a16:creationId xmlns:a16="http://schemas.microsoft.com/office/drawing/2014/main" id="{C533A431-A85A-48BA-8A23-0606CA027609}"/>
+                <a16:creationId xmlns:a16="http://schemas.microsoft.com/office/drawing/2014/main" id="{3D71B4D0-FB92-45C4-A366-F88832E4A131}"/>
               </a:ext>
             </a:extLst>
           </p:cNvPr>
@@ -15515,7 +15515,7 @@
           <p:cNvPr id="20" name="route-7">
             <a:extLst xmlns:a="http://schemas.openxmlformats.org/drawingml/2006/main">
               <a:ext uri="{FF2B5EF4-FFF2-40B4-BE49-F238E27FC236}">
-                <a16:creationId xmlns:a16="http://schemas.microsoft.com/office/drawing/2014/main" id="{5DD16CFE-F04A-4CE1-8BA7-BB52A9E23C96}"/>
+                <a16:creationId xmlns:a16="http://schemas.microsoft.com/office/drawing/2014/main" id="{9F9C75BD-F8C4-4D31-9728-2D23BB369654}"/>
               </a:ext>
             </a:extLst>
           </p:cNvPr>
@@ -15572,7 +15572,7 @@
           <p:cNvPr id="21" name="Lesdoelen">
             <a:extLst xmlns:a="http://schemas.openxmlformats.org/drawingml/2006/main">
               <a:ext uri="{FF2B5EF4-FFF2-40B4-BE49-F238E27FC236}">
-                <a16:creationId xmlns:a16="http://schemas.microsoft.com/office/drawing/2014/main" id="{477B30FB-6561-4A1A-8DCA-F2BCF9844A73}"/>
+                <a16:creationId xmlns:a16="http://schemas.microsoft.com/office/drawing/2014/main" id="{54F17C33-395E-40BF-BFF2-024610091C8A}"/>
               </a:ext>
             </a:extLst>
           </p:cNvPr>
@@ -15629,7 +15629,7 @@
           <p:cNvPr id="22" name="overview-goals">
             <a:extLst xmlns:a="http://schemas.openxmlformats.org/drawingml/2006/main">
               <a:ext uri="{FF2B5EF4-FFF2-40B4-BE49-F238E27FC236}">
-                <a16:creationId xmlns:a16="http://schemas.microsoft.com/office/drawing/2014/main" id="{C02AC544-44C9-497F-95A0-6DFC18854EAD}"/>
+                <a16:creationId xmlns:a16="http://schemas.microsoft.com/office/drawing/2014/main" id="{29C00D12-C698-43FE-8CE6-8B9A9E92308B}"/>
               </a:ext>
             </a:extLst>
           </p:cNvPr>
@@ -15732,7 +15732,7 @@
           <p:cNvPr id="23" name="">
             <a:extLst xmlns:a="http://schemas.openxmlformats.org/drawingml/2006/main">
               <a:ext uri="{FF2B5EF4-FFF2-40B4-BE49-F238E27FC236}">
-                <a16:creationId xmlns:a16="http://schemas.microsoft.com/office/drawing/2014/main" id="{A14F1CBB-C407-4C89-814F-4F9B4432C3A7}"/>
+                <a16:creationId xmlns:a16="http://schemas.microsoft.com/office/drawing/2014/main" id="{8C46B3C8-7BEA-43F8-A65B-05BCF7C368B7}"/>
               </a:ext>
             </a:extLst>
           </p:cNvPr>
@@ -15761,7 +15761,7 @@
           <p:cNvPr id="24" name="Startopdracht">
             <a:extLst xmlns:a="http://schemas.openxmlformats.org/drawingml/2006/main">
               <a:ext uri="{FF2B5EF4-FFF2-40B4-BE49-F238E27FC236}">
-                <a16:creationId xmlns:a16="http://schemas.microsoft.com/office/drawing/2014/main" id="{3D1A9F87-9AA5-4B16-B8E7-B3894AC54758}"/>
+                <a16:creationId xmlns:a16="http://schemas.microsoft.com/office/drawing/2014/main" id="{31F23BBB-B26E-43FE-809B-2AF9A5EEBAEB}"/>
               </a:ext>
             </a:extLst>
           </p:cNvPr>
@@ -15818,7 +15818,7 @@
           <p:cNvPr id="25" name="overview-start">
             <a:extLst xmlns:a="http://schemas.openxmlformats.org/drawingml/2006/main">
               <a:ext uri="{FF2B5EF4-FFF2-40B4-BE49-F238E27FC236}">
-                <a16:creationId xmlns:a16="http://schemas.microsoft.com/office/drawing/2014/main" id="{496C3248-C6E8-4C28-B589-DC4170840EB4}"/>
+                <a16:creationId xmlns:a16="http://schemas.microsoft.com/office/drawing/2014/main" id="{28EEE8D5-7D79-4FE0-BC5E-AB8061EC6745}"/>
               </a:ext>
             </a:extLst>
           </p:cNvPr>
@@ -15865,7 +15865,7 @@
                 <a:ea typeface="Arial"/>
                 <a:cs typeface="Arial"/>
               </a:rPr>
-              <a:t>Pagina 76 · Opgaven 1 en 2</a:t>
+              <a:t>Pagina 77 · Opgaven 1 en 2</a:t>
             </a:r>
           </a:p>
           <a:p xmlns:a="http://schemas.openxmlformats.org/drawingml/2006/main">
@@ -15888,7 +15888,7 @@
                 <a:ea typeface="Arial"/>
                 <a:cs typeface="Arial"/>
               </a:rPr>
-              <a:t>2: verkennen met theorie p. 72</a:t>
+              <a:t>2: verkennen met theorie p. 73</a:t>
             </a:r>
           </a:p>
           <a:p xmlns:a="http://schemas.openxmlformats.org/drawingml/2006/main">
@@ -15911,7 +15911,7 @@
                 <a:ea typeface="Arial"/>
                 <a:cs typeface="Arial"/>
               </a:rPr>
-              <a:t>Reken- en tekenhulp: p. 74</a:t>
+              <a:t>Reken- en tekenhulp: p. 75</a:t>
             </a:r>
           </a:p>
         </p:txBody>
@@ -15921,7 +15921,7 @@
           <p:cNvPr id="26" name="">
             <a:extLst xmlns:a="http://schemas.openxmlformats.org/drawingml/2006/main">
               <a:ext uri="{FF2B5EF4-FFF2-40B4-BE49-F238E27FC236}">
-                <a16:creationId xmlns:a16="http://schemas.microsoft.com/office/drawing/2014/main" id="{C0C5834A-0B39-4D64-BBFD-FEAC99998114}"/>
+                <a16:creationId xmlns:a16="http://schemas.microsoft.com/office/drawing/2014/main" id="{E033A94A-76AD-4CF7-8F18-0421FDF84ADA}"/>
               </a:ext>
             </a:extLst>
           </p:cNvPr>
@@ -15950,7 +15950,7 @@
           <p:cNvPr id="27" name="Huiswerk">
             <a:extLst xmlns:a="http://schemas.openxmlformats.org/drawingml/2006/main">
               <a:ext uri="{FF2B5EF4-FFF2-40B4-BE49-F238E27FC236}">
-                <a16:creationId xmlns:a16="http://schemas.microsoft.com/office/drawing/2014/main" id="{270329B9-59C5-4049-BE08-A3AABFB894D3}"/>
+                <a16:creationId xmlns:a16="http://schemas.microsoft.com/office/drawing/2014/main" id="{8D668AEA-8092-4C8B-A94F-4FBB4B278DBF}"/>
               </a:ext>
             </a:extLst>
           </p:cNvPr>
@@ -16007,7 +16007,7 @@
           <p:cNvPr id="28" name="overview-homework">
             <a:extLst xmlns:a="http://schemas.openxmlformats.org/drawingml/2006/main">
               <a:ext uri="{FF2B5EF4-FFF2-40B4-BE49-F238E27FC236}">
-                <a16:creationId xmlns:a16="http://schemas.microsoft.com/office/drawing/2014/main" id="{7EA125FA-90E6-47E6-9F75-76675D25348F}"/>
+                <a16:creationId xmlns:a16="http://schemas.microsoft.com/office/drawing/2014/main" id="{05921CC7-3FD2-4039-936A-ABDC7DF9AB05}"/>
               </a:ext>
             </a:extLst>
           </p:cNvPr>
@@ -16154,7 +16154,7 @@
     </p:spTree>
     <p:extLst>
       <p:ext uri="{BB962C8B-B14F-4D97-AF65-F5344CB8AC3E}">
-        <p14:creationId xmlns:p14="http://schemas.microsoft.com/office/powerpoint/2010/main" val="2040510265"/>
+        <p14:creationId xmlns:p14="http://schemas.microsoft.com/office/powerpoint/2010/main" val="1957705811"/>
       </p:ext>
     </p:extLst>
   </p:cSld>
@@ -16185,7 +16185,7 @@
           <p:cNvPr id="11" name="Opgave 8 · Concertkaartjes">
             <a:extLst xmlns:a="http://schemas.openxmlformats.org/drawingml/2006/main">
               <a:ext uri="{FF2B5EF4-FFF2-40B4-BE49-F238E27FC236}">
-                <a16:creationId xmlns:a16="http://schemas.microsoft.com/office/drawing/2014/main" id="{C504CFC3-C0C3-43ED-8E5E-150FA14BC1A9}"/>
+                <a16:creationId xmlns:a16="http://schemas.microsoft.com/office/drawing/2014/main" id="{A86B9464-4907-4E2A-B3F8-66E69EC28238}"/>
               </a:ext>
             </a:extLst>
           </p:cNvPr>
@@ -16242,7 +16242,7 @@
           <p:cNvPr id="2" name="">
             <a:extLst xmlns:a="http://schemas.openxmlformats.org/drawingml/2006/main">
               <a:ext uri="{FF2B5EF4-FFF2-40B4-BE49-F238E27FC236}">
-                <a16:creationId xmlns:a16="http://schemas.microsoft.com/office/drawing/2014/main" id="{C9F09173-4F21-41DB-ADE5-58A2F08002C3}"/>
+                <a16:creationId xmlns:a16="http://schemas.microsoft.com/office/drawing/2014/main" id="{3F336862-6B50-412B-B3FC-92761C119CBD}"/>
               </a:ext>
             </a:extLst>
           </p:cNvPr>
@@ -16268,10 +16268,10 @@
       </p:sp>
       <p:sp>
         <p:nvSpPr>
-          <p:cNvPr id="3" name="§2.3.1 Consumentensurplus · Opgave 8 · Boekpagina 79">
+          <p:cNvPr id="3" name="§2.3.1 Consumentensurplus · Opgave 8 · Boekpagina 80">
             <a:extLst xmlns:a="http://schemas.openxmlformats.org/drawingml/2006/main">
               <a:ext uri="{FF2B5EF4-FFF2-40B4-BE49-F238E27FC236}">
-                <a16:creationId xmlns:a16="http://schemas.microsoft.com/office/drawing/2014/main" id="{688DD500-E879-4B97-AE83-60FD3A755EA8}"/>
+                <a16:creationId xmlns:a16="http://schemas.microsoft.com/office/drawing/2014/main" id="{55919636-D5FD-447C-AF4E-C333ADDBDC87}"/>
               </a:ext>
             </a:extLst>
           </p:cNvPr>
@@ -16318,7 +16318,7 @@
                 <a:ea typeface="Arial"/>
                 <a:cs typeface="Arial"/>
               </a:rPr>
-              <a:t>§2.3.1 Consumentensurplus · Opgave 8 · Boekpagina 79</a:t>
+              <a:t>§2.3.1 Consumentensurplus · Opgave 8 · Boekpagina 80</a:t>
             </a:r>
           </a:p>
         </p:txBody>
@@ -16328,7 +16328,7 @@
           <p:cNvPr id="4" name="16">
             <a:extLst xmlns:a="http://schemas.openxmlformats.org/drawingml/2006/main">
               <a:ext uri="{FF2B5EF4-FFF2-40B4-BE49-F238E27FC236}">
-                <a16:creationId xmlns:a16="http://schemas.microsoft.com/office/drawing/2014/main" id="{435A3541-6CA1-42EF-9CC5-0B7C2CAEB271}"/>
+                <a16:creationId xmlns:a16="http://schemas.microsoft.com/office/drawing/2014/main" id="{C582BD27-7D2B-43B0-A34D-26BF64857497}"/>
               </a:ext>
             </a:extLst>
           </p:cNvPr>
@@ -16385,7 +16385,7 @@
           <p:cNvPr id="5" name="Voor concertkaartjes geldt de vraagfunctie:">
             <a:extLst xmlns:a="http://schemas.openxmlformats.org/drawingml/2006/main">
               <a:ext uri="{FF2B5EF4-FFF2-40B4-BE49-F238E27FC236}">
-                <a16:creationId xmlns:a16="http://schemas.microsoft.com/office/drawing/2014/main" id="{EDD96075-6075-4AEE-A4FA-E01366A592B7}"/>
+                <a16:creationId xmlns:a16="http://schemas.microsoft.com/office/drawing/2014/main" id="{FB2EFB52-37DC-41B1-BB39-A41B307C456F}"/>
               </a:ext>
             </a:extLst>
           </p:cNvPr>
@@ -16442,7 +16442,7 @@
           <p:cNvPr id="6" name="P = 50 − 0,5Q">
             <a:extLst xmlns:a="http://schemas.openxmlformats.org/drawingml/2006/main">
               <a:ext uri="{FF2B5EF4-FFF2-40B4-BE49-F238E27FC236}">
-                <a16:creationId xmlns:a16="http://schemas.microsoft.com/office/drawing/2014/main" id="{C3F1B6E6-1CB2-47D5-B32A-53791094C002}"/>
+                <a16:creationId xmlns:a16="http://schemas.microsoft.com/office/drawing/2014/main" id="{DC8D263C-CCDF-4347-BFED-E46C0D123011}"/>
               </a:ext>
             </a:extLst>
           </p:cNvPr>
@@ -16499,7 +16499,7 @@
           <p:cNvPr id="7" name="P is de prijs in euro per kaartje.&#10;Q is het aantal gevraagde">
             <a:extLst xmlns:a="http://schemas.openxmlformats.org/drawingml/2006/main">
               <a:ext uri="{FF2B5EF4-FFF2-40B4-BE49-F238E27FC236}">
-                <a16:creationId xmlns:a16="http://schemas.microsoft.com/office/drawing/2014/main" id="{3EC71131-2FF4-4219-A980-D35C1A9E94ED}"/>
+                <a16:creationId xmlns:a16="http://schemas.microsoft.com/office/drawing/2014/main" id="{03B38FBC-C885-47D1-B2F6-8C34FFF4C764}"/>
               </a:ext>
             </a:extLst>
           </p:cNvPr>
@@ -16579,7 +16579,7 @@
           <p:cNvPr id="8" name="De gegeven marktprijs is € 20.">
             <a:extLst xmlns:a="http://schemas.openxmlformats.org/drawingml/2006/main">
               <a:ext uri="{FF2B5EF4-FFF2-40B4-BE49-F238E27FC236}">
-                <a16:creationId xmlns:a16="http://schemas.microsoft.com/office/drawing/2014/main" id="{E150F1A0-60AE-4855-8BEF-B62300EC6FC6}"/>
+                <a16:creationId xmlns:a16="http://schemas.microsoft.com/office/drawing/2014/main" id="{DF333EF5-605E-4CA4-8131-CC6D41856B14}"/>
               </a:ext>
             </a:extLst>
           </p:cNvPr>
@@ -16636,7 +16636,7 @@
           <p:cNvPr id="9" name="Er zijn voldoende kaartjes beschikbaar. Alle bij deze prijs ">
             <a:extLst xmlns:a="http://schemas.openxmlformats.org/drawingml/2006/main">
               <a:ext uri="{FF2B5EF4-FFF2-40B4-BE49-F238E27FC236}">
-                <a16:creationId xmlns:a16="http://schemas.microsoft.com/office/drawing/2014/main" id="{BC4D5F56-30C7-4ADF-9E46-A2B7AE6C226E}"/>
+                <a16:creationId xmlns:a16="http://schemas.microsoft.com/office/drawing/2014/main" id="{64678038-46A6-41B3-86D0-53B7BD03CC4D}"/>
               </a:ext>
             </a:extLst>
           </p:cNvPr>
@@ -16693,7 +16693,7 @@
           <p:cNvPr id="10" name="Er is in deze opgave geen aanbodfunctie.">
             <a:extLst xmlns:a="http://schemas.openxmlformats.org/drawingml/2006/main">
               <a:ext uri="{FF2B5EF4-FFF2-40B4-BE49-F238E27FC236}">
-                <a16:creationId xmlns:a16="http://schemas.microsoft.com/office/drawing/2014/main" id="{F5CE2CC3-B693-4820-BFC7-71A20AB9CE70}"/>
+                <a16:creationId xmlns:a16="http://schemas.microsoft.com/office/drawing/2014/main" id="{F39CBEBF-50B9-474D-A436-0C31D00BBEAE}"/>
               </a:ext>
             </a:extLst>
           </p:cNvPr>
@@ -16748,7 +16748,7 @@
     </p:spTree>
     <p:extLst>
       <p:ext uri="{BB962C8B-B14F-4D97-AF65-F5344CB8AC3E}">
-        <p14:creationId xmlns:p14="http://schemas.microsoft.com/office/powerpoint/2010/main" val="280009668"/>
+        <p14:creationId xmlns:p14="http://schemas.microsoft.com/office/powerpoint/2010/main" val="533109915"/>
       </p:ext>
     </p:extLst>
   </p:cSld>
@@ -16779,7 +16779,7 @@
           <p:cNvPr id="10" name="Opgave 8 · Deelvragen a en b">
             <a:extLst xmlns:a="http://schemas.openxmlformats.org/drawingml/2006/main">
               <a:ext uri="{FF2B5EF4-FFF2-40B4-BE49-F238E27FC236}">
-                <a16:creationId xmlns:a16="http://schemas.microsoft.com/office/drawing/2014/main" id="{297BFDB9-F5AC-40B3-9452-D50838901A55}"/>
+                <a16:creationId xmlns:a16="http://schemas.microsoft.com/office/drawing/2014/main" id="{AC29BB23-DDA1-4A73-BB6D-75E609D686AC}"/>
               </a:ext>
             </a:extLst>
           </p:cNvPr>
@@ -16836,7 +16836,7 @@
           <p:cNvPr id="2" name="">
             <a:extLst xmlns:a="http://schemas.openxmlformats.org/drawingml/2006/main">
               <a:ext uri="{FF2B5EF4-FFF2-40B4-BE49-F238E27FC236}">
-                <a16:creationId xmlns:a16="http://schemas.microsoft.com/office/drawing/2014/main" id="{D85DA1A7-0A8E-4103-92CD-1B273F6BFB9C}"/>
+                <a16:creationId xmlns:a16="http://schemas.microsoft.com/office/drawing/2014/main" id="{37D81A9E-59EF-40EA-BB35-F1543D4095F4}"/>
               </a:ext>
             </a:extLst>
           </p:cNvPr>
@@ -16862,10 +16862,10 @@
       </p:sp>
       <p:sp>
         <p:nvSpPr>
-          <p:cNvPr id="3" name="§2.3.1 Consumentensurplus · Opgave 8 · Boekpagina 79">
+          <p:cNvPr id="3" name="§2.3.1 Consumentensurplus · Opgave 8 · Boekpagina 80">
             <a:extLst xmlns:a="http://schemas.openxmlformats.org/drawingml/2006/main">
               <a:ext uri="{FF2B5EF4-FFF2-40B4-BE49-F238E27FC236}">
-                <a16:creationId xmlns:a16="http://schemas.microsoft.com/office/drawing/2014/main" id="{7B27A079-D1E5-41FE-AB07-F40D07BE4D0F}"/>
+                <a16:creationId xmlns:a16="http://schemas.microsoft.com/office/drawing/2014/main" id="{7563B3ED-59C2-4F4E-AF63-4C0076DD0433}"/>
               </a:ext>
             </a:extLst>
           </p:cNvPr>
@@ -16912,7 +16912,7 @@
                 <a:ea typeface="Arial"/>
                 <a:cs typeface="Arial"/>
               </a:rPr>
-              <a:t>§2.3.1 Consumentensurplus · Opgave 8 · Boekpagina 79</a:t>
+              <a:t>§2.3.1 Consumentensurplus · Opgave 8 · Boekpagina 80</a:t>
             </a:r>
           </a:p>
         </p:txBody>
@@ -16922,7 +16922,7 @@
           <p:cNvPr id="4" name="17">
             <a:extLst xmlns:a="http://schemas.openxmlformats.org/drawingml/2006/main">
               <a:ext uri="{FF2B5EF4-FFF2-40B4-BE49-F238E27FC236}">
-                <a16:creationId xmlns:a16="http://schemas.microsoft.com/office/drawing/2014/main" id="{E06499AC-A397-41E0-A245-B6ABA270A8EA}"/>
+                <a16:creationId xmlns:a16="http://schemas.microsoft.com/office/drawing/2014/main" id="{D832F8FB-7CDF-4B0C-ABC7-5ED7CE5E839F}"/>
               </a:ext>
             </a:extLst>
           </p:cNvPr>
@@ -16979,7 +16979,7 @@
           <p:cNvPr id="5" name="a) Bereken de gevraagde hoeveelheid bij P = € 20.&#10;Noem dit n">
             <a:extLst xmlns:a="http://schemas.openxmlformats.org/drawingml/2006/main">
               <a:ext uri="{FF2B5EF4-FFF2-40B4-BE49-F238E27FC236}">
-                <a16:creationId xmlns:a16="http://schemas.microsoft.com/office/drawing/2014/main" id="{D6A43C1F-5AFB-4362-A558-6FEEDEBE2FBC}"/>
+                <a16:creationId xmlns:a16="http://schemas.microsoft.com/office/drawing/2014/main" id="{DC778AF4-7BE0-4B9A-ABDF-9AB6CD5AA605}"/>
               </a:ext>
             </a:extLst>
           </p:cNvPr>
@@ -17059,7 +17059,7 @@
           <p:cNvPr id="6" name="">
             <a:extLst xmlns:a="http://schemas.openxmlformats.org/drawingml/2006/main">
               <a:ext uri="{FF2B5EF4-FFF2-40B4-BE49-F238E27FC236}">
-                <a16:creationId xmlns:a16="http://schemas.microsoft.com/office/drawing/2014/main" id="{DFF30B57-BFF3-4FD5-8675-6DD7CD1B153A}"/>
+                <a16:creationId xmlns:a16="http://schemas.microsoft.com/office/drawing/2014/main" id="{31400671-5014-4651-AF2E-3AD512932542}"/>
               </a:ext>
             </a:extLst>
           </p:cNvPr>
@@ -17088,7 +17088,7 @@
           <p:cNvPr id="7" name="b) Teken de vraaglijn en de horizontale prijslijn in één ass">
             <a:extLst xmlns:a="http://schemas.openxmlformats.org/drawingml/2006/main">
               <a:ext uri="{FF2B5EF4-FFF2-40B4-BE49-F238E27FC236}">
-                <a16:creationId xmlns:a16="http://schemas.microsoft.com/office/drawing/2014/main" id="{4D36C430-C1F2-4FCE-9916-BDCD243E8947}"/>
+                <a16:creationId xmlns:a16="http://schemas.microsoft.com/office/drawing/2014/main" id="{E192D8CE-0436-42E6-B3A0-A470A26A26E1}"/>
               </a:ext>
             </a:extLst>
           </p:cNvPr>
@@ -17145,7 +17145,7 @@
           <p:cNvPr id="8" name="Benoem de horizontale as als Q (kaartjes) en de verticale as">
             <a:extLst xmlns:a="http://schemas.openxmlformats.org/drawingml/2006/main">
               <a:ext uri="{FF2B5EF4-FFF2-40B4-BE49-F238E27FC236}">
-                <a16:creationId xmlns:a16="http://schemas.microsoft.com/office/drawing/2014/main" id="{DC3BF09E-01F9-4E4D-AF06-96B6551518BE}"/>
+                <a16:creationId xmlns:a16="http://schemas.microsoft.com/office/drawing/2014/main" id="{614EAFB4-7E77-4B87-874B-E2B1FD22CC4F}"/>
               </a:ext>
             </a:extLst>
           </p:cNvPr>
@@ -17202,7 +17202,7 @@
           <p:cNvPr id="9" name="Noteer de snijpunten van de vraaglijn en het snijpunt met de">
             <a:extLst xmlns:a="http://schemas.openxmlformats.org/drawingml/2006/main">
               <a:ext uri="{FF2B5EF4-FFF2-40B4-BE49-F238E27FC236}">
-                <a16:creationId xmlns:a16="http://schemas.microsoft.com/office/drawing/2014/main" id="{0C4A727F-FE2A-4F0C-9280-8C04E5C8F1BC}"/>
+                <a16:creationId xmlns:a16="http://schemas.microsoft.com/office/drawing/2014/main" id="{C4E17A95-5A88-4A4E-B645-B2486001C310}"/>
               </a:ext>
             </a:extLst>
           </p:cNvPr>
@@ -17257,7 +17257,7 @@
     </p:spTree>
     <p:extLst>
       <p:ext uri="{BB962C8B-B14F-4D97-AF65-F5344CB8AC3E}">
-        <p14:creationId xmlns:p14="http://schemas.microsoft.com/office/powerpoint/2010/main" val="1689807430"/>
+        <p14:creationId xmlns:p14="http://schemas.microsoft.com/office/powerpoint/2010/main" val="1138918970"/>
       </p:ext>
     </p:extLst>
   </p:cSld>
@@ -17288,7 +17288,7 @@
           <p:cNvPr id="10" name="Opgave 8 · Deelvragen c, d en e">
             <a:extLst xmlns:a="http://schemas.openxmlformats.org/drawingml/2006/main">
               <a:ext uri="{FF2B5EF4-FFF2-40B4-BE49-F238E27FC236}">
-                <a16:creationId xmlns:a16="http://schemas.microsoft.com/office/drawing/2014/main" id="{05891264-10C9-4D38-91C2-A1B964FD357A}"/>
+                <a16:creationId xmlns:a16="http://schemas.microsoft.com/office/drawing/2014/main" id="{78E8DE27-26E7-409B-9487-7895607C7757}"/>
               </a:ext>
             </a:extLst>
           </p:cNvPr>
@@ -17345,7 +17345,7 @@
           <p:cNvPr id="2" name="">
             <a:extLst xmlns:a="http://schemas.openxmlformats.org/drawingml/2006/main">
               <a:ext uri="{FF2B5EF4-FFF2-40B4-BE49-F238E27FC236}">
-                <a16:creationId xmlns:a16="http://schemas.microsoft.com/office/drawing/2014/main" id="{84866138-EE0C-4761-A50D-4FFA8B94C5D5}"/>
+                <a16:creationId xmlns:a16="http://schemas.microsoft.com/office/drawing/2014/main" id="{6CEFBFD8-ACA9-4225-AB8F-0C410296D245}"/>
               </a:ext>
             </a:extLst>
           </p:cNvPr>
@@ -17371,10 +17371,10 @@
       </p:sp>
       <p:sp>
         <p:nvSpPr>
-          <p:cNvPr id="3" name="§2.3.1 Consumentensurplus · Opgave 8 · Boekpagina 79">
+          <p:cNvPr id="3" name="§2.3.1 Consumentensurplus · Opgave 8 · Boekpagina 80">
             <a:extLst xmlns:a="http://schemas.openxmlformats.org/drawingml/2006/main">
               <a:ext uri="{FF2B5EF4-FFF2-40B4-BE49-F238E27FC236}">
-                <a16:creationId xmlns:a16="http://schemas.microsoft.com/office/drawing/2014/main" id="{C1DD148A-561C-475E-805D-F6D484CC42D4}"/>
+                <a16:creationId xmlns:a16="http://schemas.microsoft.com/office/drawing/2014/main" id="{85E0004E-260C-4136-802E-B9456ABBA152}"/>
               </a:ext>
             </a:extLst>
           </p:cNvPr>
@@ -17421,7 +17421,7 @@
                 <a:ea typeface="Arial"/>
                 <a:cs typeface="Arial"/>
               </a:rPr>
-              <a:t>§2.3.1 Consumentensurplus · Opgave 8 · Boekpagina 79</a:t>
+              <a:t>§2.3.1 Consumentensurplus · Opgave 8 · Boekpagina 80</a:t>
             </a:r>
           </a:p>
         </p:txBody>
@@ -17431,7 +17431,7 @@
           <p:cNvPr id="4" name="18">
             <a:extLst xmlns:a="http://schemas.openxmlformats.org/drawingml/2006/main">
               <a:ext uri="{FF2B5EF4-FFF2-40B4-BE49-F238E27FC236}">
-                <a16:creationId xmlns:a16="http://schemas.microsoft.com/office/drawing/2014/main" id="{AABED581-F9B7-4209-A8FF-C79575603A5D}"/>
+                <a16:creationId xmlns:a16="http://schemas.microsoft.com/office/drawing/2014/main" id="{31C869F4-9157-4D11-9932-66EA4A6924E0}"/>
               </a:ext>
             </a:extLst>
           </p:cNvPr>
@@ -17488,7 +17488,7 @@
           <p:cNvPr id="5" name="c) Arceer en benoem in je grafiek het consumentensurplus.">
             <a:extLst xmlns:a="http://schemas.openxmlformats.org/drawingml/2006/main">
               <a:ext uri="{FF2B5EF4-FFF2-40B4-BE49-F238E27FC236}">
-                <a16:creationId xmlns:a16="http://schemas.microsoft.com/office/drawing/2014/main" id="{A4881D6A-FB74-48A8-BD51-055B7D3CC1AD}"/>
+                <a16:creationId xmlns:a16="http://schemas.microsoft.com/office/drawing/2014/main" id="{DA0C2C57-A442-4B1B-9103-587E88D70223}"/>
               </a:ext>
             </a:extLst>
           </p:cNvPr>
@@ -17545,7 +17545,7 @@
           <p:cNvPr id="6" name="">
             <a:extLst xmlns:a="http://schemas.openxmlformats.org/drawingml/2006/main">
               <a:ext uri="{FF2B5EF4-FFF2-40B4-BE49-F238E27FC236}">
-                <a16:creationId xmlns:a16="http://schemas.microsoft.com/office/drawing/2014/main" id="{85A12C99-A202-4B3D-AA4F-BE529C6C9DE9}"/>
+                <a16:creationId xmlns:a16="http://schemas.microsoft.com/office/drawing/2014/main" id="{A47D0CA1-7966-4FEA-AF68-43B6E3494040}"/>
               </a:ext>
             </a:extLst>
           </p:cNvPr>
@@ -17574,7 +17574,7 @@
           <p:cNvPr id="7" name="d) Bereken het consumentensurplus als oppervlakte van een dr">
             <a:extLst xmlns:a="http://schemas.openxmlformats.org/drawingml/2006/main">
               <a:ext uri="{FF2B5EF4-FFF2-40B4-BE49-F238E27FC236}">
-                <a16:creationId xmlns:a16="http://schemas.microsoft.com/office/drawing/2014/main" id="{BFA592CC-928A-470D-8F70-3B1AF960CE9F}"/>
+                <a16:creationId xmlns:a16="http://schemas.microsoft.com/office/drawing/2014/main" id="{DBE8D445-259E-478D-AC26-A39399DAE6D5}"/>
               </a:ext>
             </a:extLst>
           </p:cNvPr>
@@ -17654,7 +17654,7 @@
           <p:cNvPr id="8" name="">
             <a:extLst xmlns:a="http://schemas.openxmlformats.org/drawingml/2006/main">
               <a:ext uri="{FF2B5EF4-FFF2-40B4-BE49-F238E27FC236}">
-                <a16:creationId xmlns:a16="http://schemas.microsoft.com/office/drawing/2014/main" id="{F9A6A02F-C673-45E5-B654-6F53B473CE1E}"/>
+                <a16:creationId xmlns:a16="http://schemas.microsoft.com/office/drawing/2014/main" id="{21362D1B-A26D-49DE-AA08-34B091952F5F}"/>
               </a:ext>
             </a:extLst>
           </p:cNvPr>
@@ -17683,7 +17683,7 @@
           <p:cNvPr id="9" name="e) Leg uit wat het berekende consumentensurplus voor de kope">
             <a:extLst xmlns:a="http://schemas.openxmlformats.org/drawingml/2006/main">
               <a:ext uri="{FF2B5EF4-FFF2-40B4-BE49-F238E27FC236}">
-                <a16:creationId xmlns:a16="http://schemas.microsoft.com/office/drawing/2014/main" id="{33C728A5-87A3-47D5-AA22-AF3CC1CD5C12}"/>
+                <a16:creationId xmlns:a16="http://schemas.microsoft.com/office/drawing/2014/main" id="{EB66E375-D2DA-4516-8790-08C63C036367}"/>
               </a:ext>
             </a:extLst>
           </p:cNvPr>
@@ -17738,7 +17738,7 @@
     </p:spTree>
     <p:extLst>
       <p:ext uri="{BB962C8B-B14F-4D97-AF65-F5344CB8AC3E}">
-        <p14:creationId xmlns:p14="http://schemas.microsoft.com/office/powerpoint/2010/main" val="1426729537"/>
+        <p14:creationId xmlns:p14="http://schemas.microsoft.com/office/powerpoint/2010/main" val="1200990774"/>
       </p:ext>
     </p:extLst>
   </p:cSld>
@@ -17769,7 +17769,7 @@
           <p:cNvPr id="14" name="Opgave 8a · De gevraagde hoeveelheid">
             <a:extLst xmlns:a="http://schemas.openxmlformats.org/drawingml/2006/main">
               <a:ext uri="{FF2B5EF4-FFF2-40B4-BE49-F238E27FC236}">
-                <a16:creationId xmlns:a16="http://schemas.microsoft.com/office/drawing/2014/main" id="{F6259ACB-0148-47D5-BE3F-084773FA0112}"/>
+                <a16:creationId xmlns:a16="http://schemas.microsoft.com/office/drawing/2014/main" id="{6D052633-17F4-4777-B804-C62FB4B23217}"/>
               </a:ext>
             </a:extLst>
           </p:cNvPr>
@@ -17826,7 +17826,7 @@
           <p:cNvPr id="2" name="">
             <a:extLst xmlns:a="http://schemas.openxmlformats.org/drawingml/2006/main">
               <a:ext uri="{FF2B5EF4-FFF2-40B4-BE49-F238E27FC236}">
-                <a16:creationId xmlns:a16="http://schemas.microsoft.com/office/drawing/2014/main" id="{394BB4FF-D5CE-46D5-B91A-2B6A5CF4AA6E}"/>
+                <a16:creationId xmlns:a16="http://schemas.microsoft.com/office/drawing/2014/main" id="{7CF5A3A5-37F0-4435-A3DE-9DB1365E163F}"/>
               </a:ext>
             </a:extLst>
           </p:cNvPr>
@@ -17852,10 +17852,10 @@
       </p:sp>
       <p:sp>
         <p:nvSpPr>
-          <p:cNvPr id="3" name="§2.3.1 Consumentensurplus · Opgave 8 · Boekpagina 79">
+          <p:cNvPr id="3" name="§2.3.1 Consumentensurplus · Opgave 8 · Boekpagina 80">
             <a:extLst xmlns:a="http://schemas.openxmlformats.org/drawingml/2006/main">
               <a:ext uri="{FF2B5EF4-FFF2-40B4-BE49-F238E27FC236}">
-                <a16:creationId xmlns:a16="http://schemas.microsoft.com/office/drawing/2014/main" id="{7714C602-9F28-4D78-9B9D-7310765AA2F9}"/>
+                <a16:creationId xmlns:a16="http://schemas.microsoft.com/office/drawing/2014/main" id="{E1888F02-16C7-41A0-98E6-11325A99E66B}"/>
               </a:ext>
             </a:extLst>
           </p:cNvPr>
@@ -17902,7 +17902,7 @@
                 <a:ea typeface="Arial"/>
                 <a:cs typeface="Arial"/>
               </a:rPr>
-              <a:t>§2.3.1 Consumentensurplus · Opgave 8 · Boekpagina 79</a:t>
+              <a:t>§2.3.1 Consumentensurplus · Opgave 8 · Boekpagina 80</a:t>
             </a:r>
           </a:p>
         </p:txBody>
@@ -17912,7 +17912,7 @@
           <p:cNvPr id="4" name="19">
             <a:extLst xmlns:a="http://schemas.openxmlformats.org/drawingml/2006/main">
               <a:ext uri="{FF2B5EF4-FFF2-40B4-BE49-F238E27FC236}">
-                <a16:creationId xmlns:a16="http://schemas.microsoft.com/office/drawing/2014/main" id="{BFEAC39F-B428-440F-8EFF-D0CE791FF29F}"/>
+                <a16:creationId xmlns:a16="http://schemas.microsoft.com/office/drawing/2014/main" id="{F3BD7CCE-0AC7-416C-819D-06EE77FFD0D5}"/>
               </a:ext>
             </a:extLst>
           </p:cNvPr>
@@ -17969,7 +17969,7 @@
           <p:cNvPr id="5" name="P = 50 − 0,5Q en P = € 20">
             <a:extLst xmlns:a="http://schemas.openxmlformats.org/drawingml/2006/main">
               <a:ext uri="{FF2B5EF4-FFF2-40B4-BE49-F238E27FC236}">
-                <a16:creationId xmlns:a16="http://schemas.microsoft.com/office/drawing/2014/main" id="{E4AD1C6D-0E59-4145-B327-E0153A213F2C}"/>
+                <a16:creationId xmlns:a16="http://schemas.microsoft.com/office/drawing/2014/main" id="{981E1747-D07B-49FA-83FD-114709594304}"/>
               </a:ext>
             </a:extLst>
           </p:cNvPr>
@@ -18026,7 +18026,7 @@
           <p:cNvPr id="6" name="Invullen">
             <a:extLst xmlns:a="http://schemas.openxmlformats.org/drawingml/2006/main">
               <a:ext uri="{FF2B5EF4-FFF2-40B4-BE49-F238E27FC236}">
-                <a16:creationId xmlns:a16="http://schemas.microsoft.com/office/drawing/2014/main" id="{36A9D65F-893A-40D4-9645-6325237A7A9F}"/>
+                <a16:creationId xmlns:a16="http://schemas.microsoft.com/office/drawing/2014/main" id="{B261D9EB-A38A-476B-9834-1D01AF381BB5}"/>
               </a:ext>
             </a:extLst>
           </p:cNvPr>
@@ -18083,7 +18083,7 @@
           <p:cNvPr id="7" name="20 = 50 − 0,5Q">
             <a:extLst xmlns:a="http://schemas.openxmlformats.org/drawingml/2006/main">
               <a:ext uri="{FF2B5EF4-FFF2-40B4-BE49-F238E27FC236}">
-                <a16:creationId xmlns:a16="http://schemas.microsoft.com/office/drawing/2014/main" id="{BE41E896-502B-4105-ACD0-674884400A2A}"/>
+                <a16:creationId xmlns:a16="http://schemas.microsoft.com/office/drawing/2014/main" id="{F255599D-60A5-4D38-9311-B536F0515FA7}"/>
               </a:ext>
             </a:extLst>
           </p:cNvPr>
@@ -18140,7 +18140,7 @@
           <p:cNvPr id="8" name="Herschrijven">
             <a:extLst xmlns:a="http://schemas.openxmlformats.org/drawingml/2006/main">
               <a:ext uri="{FF2B5EF4-FFF2-40B4-BE49-F238E27FC236}">
-                <a16:creationId xmlns:a16="http://schemas.microsoft.com/office/drawing/2014/main" id="{C0B837F3-BFB6-4642-A90B-5402F633FA65}"/>
+                <a16:creationId xmlns:a16="http://schemas.microsoft.com/office/drawing/2014/main" id="{F181C49A-CA3D-48CC-A883-B523B3255B56}"/>
               </a:ext>
             </a:extLst>
           </p:cNvPr>
@@ -18197,7 +18197,7 @@
           <p:cNvPr id="9" name="0,5Q = 50 − 20 = 30">
             <a:extLst xmlns:a="http://schemas.openxmlformats.org/drawingml/2006/main">
               <a:ext uri="{FF2B5EF4-FFF2-40B4-BE49-F238E27FC236}">
-                <a16:creationId xmlns:a16="http://schemas.microsoft.com/office/drawing/2014/main" id="{82F51146-3FEB-4FAD-B745-1ACA9ACEE234}"/>
+                <a16:creationId xmlns:a16="http://schemas.microsoft.com/office/drawing/2014/main" id="{456AB193-D9DB-4B43-99CC-715F84998A00}"/>
               </a:ext>
             </a:extLst>
           </p:cNvPr>
@@ -18254,7 +18254,7 @@
           <p:cNvPr id="10" name="Delen">
             <a:extLst xmlns:a="http://schemas.openxmlformats.org/drawingml/2006/main">
               <a:ext uri="{FF2B5EF4-FFF2-40B4-BE49-F238E27FC236}">
-                <a16:creationId xmlns:a16="http://schemas.microsoft.com/office/drawing/2014/main" id="{F4BC1C07-0B6C-408C-AFF4-84FF10B6C170}"/>
+                <a16:creationId xmlns:a16="http://schemas.microsoft.com/office/drawing/2014/main" id="{04128EBC-70F2-47B4-ABFA-3F07C4A74783}"/>
               </a:ext>
             </a:extLst>
           </p:cNvPr>
@@ -18311,7 +18311,7 @@
           <p:cNvPr id="11" name="Q = 30 / 0,5 = 60 kaartjes">
             <a:extLst xmlns:a="http://schemas.openxmlformats.org/drawingml/2006/main">
               <a:ext uri="{FF2B5EF4-FFF2-40B4-BE49-F238E27FC236}">
-                <a16:creationId xmlns:a16="http://schemas.microsoft.com/office/drawing/2014/main" id="{2748797E-8508-41F9-85C9-6DEB71720DB1}"/>
+                <a16:creationId xmlns:a16="http://schemas.microsoft.com/office/drawing/2014/main" id="{1EE49BF7-5D81-4202-95B7-75A041645371}"/>
               </a:ext>
             </a:extLst>
           </p:cNvPr>
@@ -18368,7 +18368,7 @@
           <p:cNvPr id="12" name="Controle: 50 − 0,5 × 60 = € 20 per kaartje">
             <a:extLst xmlns:a="http://schemas.openxmlformats.org/drawingml/2006/main">
               <a:ext uri="{FF2B5EF4-FFF2-40B4-BE49-F238E27FC236}">
-                <a16:creationId xmlns:a16="http://schemas.microsoft.com/office/drawing/2014/main" id="{6DF2C14F-9799-4E3D-9BAA-666CE568B0FB}"/>
+                <a16:creationId xmlns:a16="http://schemas.microsoft.com/office/drawing/2014/main" id="{67DFC607-463A-4641-9F2E-C728DC43DC47}"/>
               </a:ext>
             </a:extLst>
           </p:cNvPr>
@@ -18425,7 +18425,7 @@
           <p:cNvPr id="13" name="Gevraagd én verkocht. Zonder aanbodfunctie geen berekend eve">
             <a:extLst xmlns:a="http://schemas.openxmlformats.org/drawingml/2006/main">
               <a:ext uri="{FF2B5EF4-FFF2-40B4-BE49-F238E27FC236}">
-                <a16:creationId xmlns:a16="http://schemas.microsoft.com/office/drawing/2014/main" id="{3B51E56D-FD52-44A4-9676-23A8F59BD527}"/>
+                <a16:creationId xmlns:a16="http://schemas.microsoft.com/office/drawing/2014/main" id="{C171857C-F5B2-4323-B77D-77492844FC31}"/>
               </a:ext>
             </a:extLst>
           </p:cNvPr>
@@ -18480,7 +18480,7 @@
     </p:spTree>
     <p:extLst>
       <p:ext uri="{BB962C8B-B14F-4D97-AF65-F5344CB8AC3E}">
-        <p14:creationId xmlns:p14="http://schemas.microsoft.com/office/powerpoint/2010/main" val="1144577514"/>
+        <p14:creationId xmlns:p14="http://schemas.microsoft.com/office/powerpoint/2010/main" val="1101634699"/>
       </p:ext>
     </p:extLst>
   </p:cSld>
@@ -18511,7 +18511,7 @@
           <p:cNvPr id="16" name="Wat kun je na deze les?">
             <a:extLst xmlns:a="http://schemas.openxmlformats.org/drawingml/2006/main">
               <a:ext uri="{FF2B5EF4-FFF2-40B4-BE49-F238E27FC236}">
-                <a16:creationId xmlns:a16="http://schemas.microsoft.com/office/drawing/2014/main" id="{5D54F4EF-7A10-40ED-A5CA-7D717029403B}"/>
+                <a16:creationId xmlns:a16="http://schemas.microsoft.com/office/drawing/2014/main" id="{D39600CD-77C5-4E0D-AE7C-6FB6B650B26B}"/>
               </a:ext>
             </a:extLst>
           </p:cNvPr>
@@ -18568,7 +18568,7 @@
           <p:cNvPr id="2" name="">
             <a:extLst xmlns:a="http://schemas.openxmlformats.org/drawingml/2006/main">
               <a:ext uri="{FF2B5EF4-FFF2-40B4-BE49-F238E27FC236}">
-                <a16:creationId xmlns:a16="http://schemas.microsoft.com/office/drawing/2014/main" id="{1B568D99-DC89-4571-AE82-07A31A2EFA25}"/>
+                <a16:creationId xmlns:a16="http://schemas.microsoft.com/office/drawing/2014/main" id="{0DAECFFC-0B55-4DF6-B488-E594F2A8FFD1}"/>
               </a:ext>
             </a:extLst>
           </p:cNvPr>
@@ -18597,7 +18597,7 @@
           <p:cNvPr id="3" name="§2.3.1 Consumentensurplus">
             <a:extLst xmlns:a="http://schemas.openxmlformats.org/drawingml/2006/main">
               <a:ext uri="{FF2B5EF4-FFF2-40B4-BE49-F238E27FC236}">
-                <a16:creationId xmlns:a16="http://schemas.microsoft.com/office/drawing/2014/main" id="{4E5C1477-70B9-4FEF-B556-F0C77A1802F6}"/>
+                <a16:creationId xmlns:a16="http://schemas.microsoft.com/office/drawing/2014/main" id="{7BA02E67-2F3A-4CB2-BA7F-0AB460092E50}"/>
               </a:ext>
             </a:extLst>
           </p:cNvPr>
@@ -18654,7 +18654,7 @@
           <p:cNvPr id="4" name="2">
             <a:extLst xmlns:a="http://schemas.openxmlformats.org/drawingml/2006/main">
               <a:ext uri="{FF2B5EF4-FFF2-40B4-BE49-F238E27FC236}">
-                <a16:creationId xmlns:a16="http://schemas.microsoft.com/office/drawing/2014/main" id="{850E7231-462D-46DA-843B-D9CFBEFB9984}"/>
+                <a16:creationId xmlns:a16="http://schemas.microsoft.com/office/drawing/2014/main" id="{06E3AB11-7D20-41C9-96C8-4733B298CC02}"/>
               </a:ext>
             </a:extLst>
           </p:cNvPr>
@@ -18711,7 +18711,7 @@
           <p:cNvPr id="5" name="Hoeveelheid">
             <a:extLst xmlns:a="http://schemas.openxmlformats.org/drawingml/2006/main">
               <a:ext uri="{FF2B5EF4-FFF2-40B4-BE49-F238E27FC236}">
-                <a16:creationId xmlns:a16="http://schemas.microsoft.com/office/drawing/2014/main" id="{833DC11D-5A8E-439A-921B-69C71E368386}"/>
+                <a16:creationId xmlns:a16="http://schemas.microsoft.com/office/drawing/2014/main" id="{7A20D8F5-A049-46EB-98F0-4FF67745BFE1}"/>
               </a:ext>
             </a:extLst>
           </p:cNvPr>
@@ -18768,7 +18768,7 @@
           <p:cNvPr id="6" name="Je berekent Q bij een gegeven prijs.">
             <a:extLst xmlns:a="http://schemas.openxmlformats.org/drawingml/2006/main">
               <a:ext uri="{FF2B5EF4-FFF2-40B4-BE49-F238E27FC236}">
-                <a16:creationId xmlns:a16="http://schemas.microsoft.com/office/drawing/2014/main" id="{FCBFE678-387A-4858-B2F6-03A44B37931E}"/>
+                <a16:creationId xmlns:a16="http://schemas.microsoft.com/office/drawing/2014/main" id="{B443B5E4-494A-4582-9AE6-03673ECED6E3}"/>
               </a:ext>
             </a:extLst>
           </p:cNvPr>
@@ -18825,7 +18825,7 @@
           <p:cNvPr id="7" name="">
             <a:extLst xmlns:a="http://schemas.openxmlformats.org/drawingml/2006/main">
               <a:ext uri="{FF2B5EF4-FFF2-40B4-BE49-F238E27FC236}">
-                <a16:creationId xmlns:a16="http://schemas.microsoft.com/office/drawing/2014/main" id="{4FDD273D-40AF-4C6C-AFEF-4E7C01258D63}"/>
+                <a16:creationId xmlns:a16="http://schemas.microsoft.com/office/drawing/2014/main" id="{D38A575F-E539-4D16-8426-72C78650287E}"/>
               </a:ext>
             </a:extLst>
           </p:cNvPr>
@@ -18854,7 +18854,7 @@
           <p:cNvPr id="8" name="Grafiek">
             <a:extLst xmlns:a="http://schemas.openxmlformats.org/drawingml/2006/main">
               <a:ext uri="{FF2B5EF4-FFF2-40B4-BE49-F238E27FC236}">
-                <a16:creationId xmlns:a16="http://schemas.microsoft.com/office/drawing/2014/main" id="{21CCD393-CAE7-409E-AF8A-436D47FCB492}"/>
+                <a16:creationId xmlns:a16="http://schemas.microsoft.com/office/drawing/2014/main" id="{74D28911-18D0-4550-8E1E-82156EA419B1}"/>
               </a:ext>
             </a:extLst>
           </p:cNvPr>
@@ -18911,7 +18911,7 @@
           <p:cNvPr id="9" name="Je tekent V en de prijslijn met assen, eenheden en snijpunte">
             <a:extLst xmlns:a="http://schemas.openxmlformats.org/drawingml/2006/main">
               <a:ext uri="{FF2B5EF4-FFF2-40B4-BE49-F238E27FC236}">
-                <a16:creationId xmlns:a16="http://schemas.microsoft.com/office/drawing/2014/main" id="{930E0010-6E8F-479D-990F-6710AC217DE5}"/>
+                <a16:creationId xmlns:a16="http://schemas.microsoft.com/office/drawing/2014/main" id="{70478A3B-FA4F-4169-9C13-3C59AC4F0C25}"/>
               </a:ext>
             </a:extLst>
           </p:cNvPr>
@@ -18968,7 +18968,7 @@
           <p:cNvPr id="10" name="">
             <a:extLst xmlns:a="http://schemas.openxmlformats.org/drawingml/2006/main">
               <a:ext uri="{FF2B5EF4-FFF2-40B4-BE49-F238E27FC236}">
-                <a16:creationId xmlns:a16="http://schemas.microsoft.com/office/drawing/2014/main" id="{7D795629-EC48-4A49-BCA6-BF046A0F5500}"/>
+                <a16:creationId xmlns:a16="http://schemas.microsoft.com/office/drawing/2014/main" id="{7052D5AD-7026-4F18-AA41-F0B4122F160F}"/>
               </a:ext>
             </a:extLst>
           </p:cNvPr>
@@ -18997,7 +18997,7 @@
           <p:cNvPr id="11" name="Consumentensurplus">
             <a:extLst xmlns:a="http://schemas.openxmlformats.org/drawingml/2006/main">
               <a:ext uri="{FF2B5EF4-FFF2-40B4-BE49-F238E27FC236}">
-                <a16:creationId xmlns:a16="http://schemas.microsoft.com/office/drawing/2014/main" id="{6E521FD7-D02A-4595-8735-6E8E941B1A3E}"/>
+                <a16:creationId xmlns:a16="http://schemas.microsoft.com/office/drawing/2014/main" id="{B11036FD-F6AD-4592-80DF-3A5CD6046AA4}"/>
               </a:ext>
             </a:extLst>
           </p:cNvPr>
@@ -19054,7 +19054,7 @@
           <p:cNvPr id="12" name="Je arceert het gebied en berekent de oppervlakte.">
             <a:extLst xmlns:a="http://schemas.openxmlformats.org/drawingml/2006/main">
               <a:ext uri="{FF2B5EF4-FFF2-40B4-BE49-F238E27FC236}">
-                <a16:creationId xmlns:a16="http://schemas.microsoft.com/office/drawing/2014/main" id="{D644A0F1-A1C5-435F-A9A5-EBE8848CE389}"/>
+                <a16:creationId xmlns:a16="http://schemas.microsoft.com/office/drawing/2014/main" id="{24968572-B993-40A0-A236-7CD3C9607CD9}"/>
               </a:ext>
             </a:extLst>
           </p:cNvPr>
@@ -19111,7 +19111,7 @@
           <p:cNvPr id="13" name="">
             <a:extLst xmlns:a="http://schemas.openxmlformats.org/drawingml/2006/main">
               <a:ext uri="{FF2B5EF4-FFF2-40B4-BE49-F238E27FC236}">
-                <a16:creationId xmlns:a16="http://schemas.microsoft.com/office/drawing/2014/main" id="{C8945788-6A46-45F2-BC3D-72D85E95D276}"/>
+                <a16:creationId xmlns:a16="http://schemas.microsoft.com/office/drawing/2014/main" id="{93B28BBD-A319-44E9-8369-5E3783B3EE97}"/>
               </a:ext>
             </a:extLst>
           </p:cNvPr>
@@ -19140,7 +19140,7 @@
           <p:cNvPr id="14" name="Betekenis">
             <a:extLst xmlns:a="http://schemas.openxmlformats.org/drawingml/2006/main">
               <a:ext uri="{FF2B5EF4-FFF2-40B4-BE49-F238E27FC236}">
-                <a16:creationId xmlns:a16="http://schemas.microsoft.com/office/drawing/2014/main" id="{DC567A63-B8C8-4204-9565-726189691199}"/>
+                <a16:creationId xmlns:a16="http://schemas.microsoft.com/office/drawing/2014/main" id="{A686F7A3-6AC0-4F16-9E6C-3AF264E52DDC}"/>
               </a:ext>
             </a:extLst>
           </p:cNvPr>
@@ -19197,7 +19197,7 @@
           <p:cNvPr id="15" name="Je legt het gezamenlijke voordeel van de kopers uit.">
             <a:extLst xmlns:a="http://schemas.openxmlformats.org/drawingml/2006/main">
               <a:ext uri="{FF2B5EF4-FFF2-40B4-BE49-F238E27FC236}">
-                <a16:creationId xmlns:a16="http://schemas.microsoft.com/office/drawing/2014/main" id="{290F1D4A-831E-49F6-B82F-1F05A4253A43}"/>
+                <a16:creationId xmlns:a16="http://schemas.microsoft.com/office/drawing/2014/main" id="{2A71C021-1A42-4F19-B964-419810EDC5FA}"/>
               </a:ext>
             </a:extLst>
           </p:cNvPr>
@@ -19252,7 +19252,7 @@
     </p:spTree>
     <p:extLst>
       <p:ext uri="{BB962C8B-B14F-4D97-AF65-F5344CB8AC3E}">
-        <p14:creationId xmlns:p14="http://schemas.microsoft.com/office/powerpoint/2010/main" val="1419748949"/>
+        <p14:creationId xmlns:p14="http://schemas.microsoft.com/office/powerpoint/2010/main" val="2133722414"/>
       </p:ext>
     </p:extLst>
   </p:cSld>
@@ -19283,7 +19283,7 @@
           <p:cNvPr id="8" name="Opgave 8b · De punten berekenen">
             <a:extLst xmlns:a="http://schemas.openxmlformats.org/drawingml/2006/main">
               <a:ext uri="{FF2B5EF4-FFF2-40B4-BE49-F238E27FC236}">
-                <a16:creationId xmlns:a16="http://schemas.microsoft.com/office/drawing/2014/main" id="{CF36C5CB-13B6-4FC0-ACDC-1349A9ECBA79}"/>
+                <a16:creationId xmlns:a16="http://schemas.microsoft.com/office/drawing/2014/main" id="{EE8D1BA8-4CE4-4159-BE36-FB5FCA930246}"/>
               </a:ext>
             </a:extLst>
           </p:cNvPr>
@@ -19340,7 +19340,7 @@
           <p:cNvPr id="2" name="">
             <a:extLst xmlns:a="http://schemas.openxmlformats.org/drawingml/2006/main">
               <a:ext uri="{FF2B5EF4-FFF2-40B4-BE49-F238E27FC236}">
-                <a16:creationId xmlns:a16="http://schemas.microsoft.com/office/drawing/2014/main" id="{F46B422B-4F90-4373-B21C-1EE68501E406}"/>
+                <a16:creationId xmlns:a16="http://schemas.microsoft.com/office/drawing/2014/main" id="{5F3FAD01-56B1-4B62-93BB-A85670A5836F}"/>
               </a:ext>
             </a:extLst>
           </p:cNvPr>
@@ -19366,10 +19366,10 @@
       </p:sp>
       <p:sp>
         <p:nvSpPr>
-          <p:cNvPr id="3" name="§2.3.1 Consumentensurplus · Opgave 8 · Boekpagina 79">
+          <p:cNvPr id="3" name="§2.3.1 Consumentensurplus · Opgave 8 · Boekpagina 80">
             <a:extLst xmlns:a="http://schemas.openxmlformats.org/drawingml/2006/main">
               <a:ext uri="{FF2B5EF4-FFF2-40B4-BE49-F238E27FC236}">
-                <a16:creationId xmlns:a16="http://schemas.microsoft.com/office/drawing/2014/main" id="{17DB958F-EC74-4384-B463-D35C72E96B47}"/>
+                <a16:creationId xmlns:a16="http://schemas.microsoft.com/office/drawing/2014/main" id="{C5BCAFB5-727C-4823-B9A4-6FE80C36DF6E}"/>
               </a:ext>
             </a:extLst>
           </p:cNvPr>
@@ -19416,7 +19416,7 @@
                 <a:ea typeface="Arial"/>
                 <a:cs typeface="Arial"/>
               </a:rPr>
-              <a:t>§2.3.1 Consumentensurplus · Opgave 8 · Boekpagina 79</a:t>
+              <a:t>§2.3.1 Consumentensurplus · Opgave 8 · Boekpagina 80</a:t>
             </a:r>
           </a:p>
         </p:txBody>
@@ -19426,7 +19426,7 @@
           <p:cNvPr id="4" name="20">
             <a:extLst xmlns:a="http://schemas.openxmlformats.org/drawingml/2006/main">
               <a:ext uri="{FF2B5EF4-FFF2-40B4-BE49-F238E27FC236}">
-                <a16:creationId xmlns:a16="http://schemas.microsoft.com/office/drawing/2014/main" id="{A1DB528C-16C1-4E35-84EB-059289C45821}"/>
+                <a16:creationId xmlns:a16="http://schemas.microsoft.com/office/drawing/2014/main" id="{A47ABEF3-39B8-43D8-BDD3-5454037DA6D4}"/>
               </a:ext>
             </a:extLst>
           </p:cNvPr>
@@ -19483,7 +19483,7 @@
           <p:cNvPr id="5" name="Vraaglijn: P = 50 − 0,5Q">
             <a:extLst xmlns:a="http://schemas.openxmlformats.org/drawingml/2006/main">
               <a:ext uri="{FF2B5EF4-FFF2-40B4-BE49-F238E27FC236}">
-                <a16:creationId xmlns:a16="http://schemas.microsoft.com/office/drawing/2014/main" id="{953117B0-ED41-4172-91E5-0329B9450BA8}"/>
+                <a16:creationId xmlns:a16="http://schemas.microsoft.com/office/drawing/2014/main" id="{5D063820-5228-44F9-94C8-522B3BE20C91}"/>
               </a:ext>
             </a:extLst>
           </p:cNvPr>
@@ -19872,7 +19872,7 @@
           <p:cNvPr id="7" name="De eerste twee punten bepalen V.&#10;Het derde punt ligt ook op ">
             <a:extLst xmlns:a="http://schemas.openxmlformats.org/drawingml/2006/main">
               <a:ext uri="{FF2B5EF4-FFF2-40B4-BE49-F238E27FC236}">
-                <a16:creationId xmlns:a16="http://schemas.microsoft.com/office/drawing/2014/main" id="{069C0D72-5F38-4A79-8FED-A20FA19E6290}"/>
+                <a16:creationId xmlns:a16="http://schemas.microsoft.com/office/drawing/2014/main" id="{AE14D3C7-868E-4469-A0B4-121DFC95156B}"/>
               </a:ext>
             </a:extLst>
           </p:cNvPr>
@@ -19950,7 +19950,7 @@
     </p:spTree>
     <p:extLst>
       <p:ext uri="{BB962C8B-B14F-4D97-AF65-F5344CB8AC3E}">
-        <p14:creationId xmlns:p14="http://schemas.microsoft.com/office/powerpoint/2010/main" val="208955450"/>
+        <p14:creationId xmlns:p14="http://schemas.microsoft.com/office/powerpoint/2010/main" val="1570006710"/>
       </p:ext>
     </p:extLst>
   </p:cSld>
@@ -19981,7 +19981,7 @@
           <p:cNvPr id="11" name="Opgave 8b · Vraaglijn en prijslijn">
             <a:extLst xmlns:a="http://schemas.openxmlformats.org/drawingml/2006/main">
               <a:ext uri="{FF2B5EF4-FFF2-40B4-BE49-F238E27FC236}">
-                <a16:creationId xmlns:a16="http://schemas.microsoft.com/office/drawing/2014/main" id="{1EEF19D6-9F4E-4ACB-AEEC-27B97EDCF109}"/>
+                <a16:creationId xmlns:a16="http://schemas.microsoft.com/office/drawing/2014/main" id="{C3581ED8-802D-4F4E-A344-B055E1D340FA}"/>
               </a:ext>
             </a:extLst>
           </p:cNvPr>
@@ -20038,7 +20038,7 @@
           <p:cNvPr id="2" name="">
             <a:extLst xmlns:a="http://schemas.openxmlformats.org/drawingml/2006/main">
               <a:ext uri="{FF2B5EF4-FFF2-40B4-BE49-F238E27FC236}">
-                <a16:creationId xmlns:a16="http://schemas.microsoft.com/office/drawing/2014/main" id="{4E8259FC-C348-458E-A054-59B793906DEC}"/>
+                <a16:creationId xmlns:a16="http://schemas.microsoft.com/office/drawing/2014/main" id="{191371EE-7E6E-4EDB-969C-57D7407EA987}"/>
               </a:ext>
             </a:extLst>
           </p:cNvPr>
@@ -20064,10 +20064,10 @@
       </p:sp>
       <p:sp>
         <p:nvSpPr>
-          <p:cNvPr id="3" name="§2.3.1 Consumentensurplus · Opgave 8 · Boekpagina 79">
+          <p:cNvPr id="3" name="§2.3.1 Consumentensurplus · Opgave 8 · Boekpagina 80">
             <a:extLst xmlns:a="http://schemas.openxmlformats.org/drawingml/2006/main">
               <a:ext uri="{FF2B5EF4-FFF2-40B4-BE49-F238E27FC236}">
-                <a16:creationId xmlns:a16="http://schemas.microsoft.com/office/drawing/2014/main" id="{86C5AF12-5A70-41C4-8E6C-4CC778C97F0F}"/>
+                <a16:creationId xmlns:a16="http://schemas.microsoft.com/office/drawing/2014/main" id="{82A93C93-7AE2-4C0C-9E32-629D0900A3B3}"/>
               </a:ext>
             </a:extLst>
           </p:cNvPr>
@@ -20114,7 +20114,7 @@
                 <a:ea typeface="Arial"/>
                 <a:cs typeface="Arial"/>
               </a:rPr>
-              <a:t>§2.3.1 Consumentensurplus · Opgave 8 · Boekpagina 79</a:t>
+              <a:t>§2.3.1 Consumentensurplus · Opgave 8 · Boekpagina 80</a:t>
             </a:r>
           </a:p>
         </p:txBody>
@@ -20124,7 +20124,7 @@
           <p:cNvPr id="4" name="21">
             <a:extLst xmlns:a="http://schemas.openxmlformats.org/drawingml/2006/main">
               <a:ext uri="{FF2B5EF4-FFF2-40B4-BE49-F238E27FC236}">
-                <a16:creationId xmlns:a16="http://schemas.microsoft.com/office/drawing/2014/main" id="{67E1F20D-FE18-4B06-A371-EA746253A982}"/>
+                <a16:creationId xmlns:a16="http://schemas.microsoft.com/office/drawing/2014/main" id="{1ADB6524-5E3A-41F2-B24D-017FE73EF7D5}"/>
               </a:ext>
             </a:extLst>
           </p:cNvPr>
@@ -20181,7 +20181,7 @@
           <p:cNvPr id="5" name="Concertkaartjes: P = 50 − 0,5Q en prijs € 20">
             <a:extLst xmlns:a="http://schemas.openxmlformats.org/drawingml/2006/main">
               <a:ext uri="{FF2B5EF4-FFF2-40B4-BE49-F238E27FC236}">
-                <a16:creationId xmlns:a16="http://schemas.microsoft.com/office/drawing/2014/main" id="{459C56F9-C199-4F59-9D5C-CFD685EDCFC0}"/>
+                <a16:creationId xmlns:a16="http://schemas.microsoft.com/office/drawing/2014/main" id="{F56F2BD4-93D7-435D-80BE-657EEB7865C3}"/>
               </a:ext>
             </a:extLst>
           </p:cNvPr>
@@ -20245,7 +20245,7 @@
         </p:xfrm>
         <a:graphic xmlns:a="http://schemas.openxmlformats.org/drawingml/2006/main">
           <a:graphicData uri="http://schemas.openxmlformats.org/drawingml/2006/chart">
-            <c:chart xmlns:r="http://schemas.openxmlformats.org/officeDocument/2006/relationships" xmlns:c="http://schemas.openxmlformats.org/drawingml/2006/chart" r:id="Ra340818f6afb4631"/>
+            <c:chart xmlns:r="http://schemas.openxmlformats.org/officeDocument/2006/relationships" xmlns:c="http://schemas.openxmlformats.org/drawingml/2006/chart" r:id="Rc6fdfd5ea9a24300"/>
           </a:graphicData>
         </a:graphic>
       </p:graphicFrame>
@@ -20254,7 +20254,7 @@
           <p:cNvPr id="7" name="V door">
             <a:extLst xmlns:a="http://schemas.openxmlformats.org/drawingml/2006/main">
               <a:ext uri="{FF2B5EF4-FFF2-40B4-BE49-F238E27FC236}">
-                <a16:creationId xmlns:a16="http://schemas.microsoft.com/office/drawing/2014/main" id="{2BDDCF09-1BA9-4423-9BC4-0CDBC7B24B24}"/>
+                <a16:creationId xmlns:a16="http://schemas.microsoft.com/office/drawing/2014/main" id="{21A3FD41-4DF0-4BB6-BFE1-DE699E6B08F2}"/>
               </a:ext>
             </a:extLst>
           </p:cNvPr>
@@ -20311,7 +20311,7 @@
           <p:cNvPr id="8" name="(0; 50)&#10;en (100; 0)">
             <a:extLst xmlns:a="http://schemas.openxmlformats.org/drawingml/2006/main">
               <a:ext uri="{FF2B5EF4-FFF2-40B4-BE49-F238E27FC236}">
-                <a16:creationId xmlns:a16="http://schemas.microsoft.com/office/drawing/2014/main" id="{C548127F-9290-4DD1-A844-27E875829A84}"/>
+                <a16:creationId xmlns:a16="http://schemas.microsoft.com/office/drawing/2014/main" id="{5C406266-B51B-484B-A169-8B3C2D4F8CCB}"/>
               </a:ext>
             </a:extLst>
           </p:cNvPr>
@@ -20391,7 +20391,7 @@
           <p:cNvPr id="9" name="Prijslijn P = 20">
             <a:extLst xmlns:a="http://schemas.openxmlformats.org/drawingml/2006/main">
               <a:ext uri="{FF2B5EF4-FFF2-40B4-BE49-F238E27FC236}">
-                <a16:creationId xmlns:a16="http://schemas.microsoft.com/office/drawing/2014/main" id="{743D31F2-D6D0-4380-BE16-CA3465D25871}"/>
+                <a16:creationId xmlns:a16="http://schemas.microsoft.com/office/drawing/2014/main" id="{6CDB438E-6D28-4481-94D9-2096420C012A}"/>
               </a:ext>
             </a:extLst>
           </p:cNvPr>
@@ -20448,7 +20448,7 @@
           <p:cNvPr id="10" name="Snijpunt:&#10;(60; 20)">
             <a:extLst xmlns:a="http://schemas.openxmlformats.org/drawingml/2006/main">
               <a:ext uri="{FF2B5EF4-FFF2-40B4-BE49-F238E27FC236}">
-                <a16:creationId xmlns:a16="http://schemas.microsoft.com/office/drawing/2014/main" id="{E9CA4805-5E97-4EEE-AF0D-3BC547B6C0C9}"/>
+                <a16:creationId xmlns:a16="http://schemas.microsoft.com/office/drawing/2014/main" id="{C63CD628-3338-4384-8F27-7123F122A6E0}"/>
               </a:ext>
             </a:extLst>
           </p:cNvPr>
@@ -20526,7 +20526,7 @@
     </p:spTree>
     <p:extLst>
       <p:ext uri="{BB962C8B-B14F-4D97-AF65-F5344CB8AC3E}">
-        <p14:creationId xmlns:p14="http://schemas.microsoft.com/office/powerpoint/2010/main" val="885642232"/>
+        <p14:creationId xmlns:p14="http://schemas.microsoft.com/office/powerpoint/2010/main" val="398685207"/>
       </p:ext>
     </p:extLst>
   </p:cSld>
@@ -20557,7 +20557,7 @@
           <p:cNvPr id="10" name="Opgave 8c · Het CS-gebied">
             <a:extLst xmlns:a="http://schemas.openxmlformats.org/drawingml/2006/main">
               <a:ext uri="{FF2B5EF4-FFF2-40B4-BE49-F238E27FC236}">
-                <a16:creationId xmlns:a16="http://schemas.microsoft.com/office/drawing/2014/main" id="{48FB3B47-E311-4000-9513-3938FDE495AB}"/>
+                <a16:creationId xmlns:a16="http://schemas.microsoft.com/office/drawing/2014/main" id="{9E612214-B63D-4798-BA11-4E55D6A0CA4B}"/>
               </a:ext>
             </a:extLst>
           </p:cNvPr>
@@ -20614,7 +20614,7 @@
           <p:cNvPr id="2" name="">
             <a:extLst xmlns:a="http://schemas.openxmlformats.org/drawingml/2006/main">
               <a:ext uri="{FF2B5EF4-FFF2-40B4-BE49-F238E27FC236}">
-                <a16:creationId xmlns:a16="http://schemas.microsoft.com/office/drawing/2014/main" id="{94E3F679-5255-4F50-BC1E-ACEBF1C1F657}"/>
+                <a16:creationId xmlns:a16="http://schemas.microsoft.com/office/drawing/2014/main" id="{88756F01-5B43-4C34-9DC5-800B04C26FF8}"/>
               </a:ext>
             </a:extLst>
           </p:cNvPr>
@@ -20640,10 +20640,10 @@
       </p:sp>
       <p:sp>
         <p:nvSpPr>
-          <p:cNvPr id="3" name="§2.3.1 Consumentensurplus · Opgave 8 · Boekpagina 79">
+          <p:cNvPr id="3" name="§2.3.1 Consumentensurplus · Opgave 8 · Boekpagina 80">
             <a:extLst xmlns:a="http://schemas.openxmlformats.org/drawingml/2006/main">
               <a:ext uri="{FF2B5EF4-FFF2-40B4-BE49-F238E27FC236}">
-                <a16:creationId xmlns:a16="http://schemas.microsoft.com/office/drawing/2014/main" id="{BE5F4EF8-70A3-482A-BA54-804C05FC4000}"/>
+                <a16:creationId xmlns:a16="http://schemas.microsoft.com/office/drawing/2014/main" id="{1666B974-393B-42AD-B364-DED01790E82A}"/>
               </a:ext>
             </a:extLst>
           </p:cNvPr>
@@ -20690,7 +20690,7 @@
                 <a:ea typeface="Arial"/>
                 <a:cs typeface="Arial"/>
               </a:rPr>
-              <a:t>§2.3.1 Consumentensurplus · Opgave 8 · Boekpagina 79</a:t>
+              <a:t>§2.3.1 Consumentensurplus · Opgave 8 · Boekpagina 80</a:t>
             </a:r>
           </a:p>
         </p:txBody>
@@ -20700,7 +20700,7 @@
           <p:cNvPr id="4" name="22">
             <a:extLst xmlns:a="http://schemas.openxmlformats.org/drawingml/2006/main">
               <a:ext uri="{FF2B5EF4-FFF2-40B4-BE49-F238E27FC236}">
-                <a16:creationId xmlns:a16="http://schemas.microsoft.com/office/drawing/2014/main" id="{B6195F7D-8E2E-4E19-A1D4-A07A215CC3E8}"/>
+                <a16:creationId xmlns:a16="http://schemas.microsoft.com/office/drawing/2014/main" id="{A830F935-8FB3-4AAF-B09C-B35784811FE5}"/>
               </a:ext>
             </a:extLst>
           </p:cNvPr>
@@ -20757,7 +20757,7 @@
           <p:cNvPr id="5" name="Concertkaartjes: boven de prijs, onder de vraaglijn">
             <a:extLst xmlns:a="http://schemas.openxmlformats.org/drawingml/2006/main">
               <a:ext uri="{FF2B5EF4-FFF2-40B4-BE49-F238E27FC236}">
-                <a16:creationId xmlns:a16="http://schemas.microsoft.com/office/drawing/2014/main" id="{8387BE0D-7D97-4515-B32A-71530C5EF5C6}"/>
+                <a16:creationId xmlns:a16="http://schemas.microsoft.com/office/drawing/2014/main" id="{4B0FC87B-842F-406B-A28D-D10924148B28}"/>
               </a:ext>
             </a:extLst>
           </p:cNvPr>
@@ -20821,7 +20821,7 @@
         </p:xfrm>
         <a:graphic xmlns:a="http://schemas.openxmlformats.org/drawingml/2006/main">
           <a:graphicData uri="http://schemas.openxmlformats.org/drawingml/2006/chart">
-            <c:chart xmlns:r="http://schemas.openxmlformats.org/officeDocument/2006/relationships" xmlns:c="http://schemas.openxmlformats.org/drawingml/2006/chart" r:id="R86d78908d25544b2"/>
+            <c:chart xmlns:r="http://schemas.openxmlformats.org/officeDocument/2006/relationships" xmlns:c="http://schemas.openxmlformats.org/drawingml/2006/chart" r:id="R8f10e29109594312"/>
           </a:graphicData>
         </a:graphic>
       </p:graphicFrame>
@@ -20830,7 +20830,7 @@
           <p:cNvPr id="7" name="Drie hoekpunten">
             <a:extLst xmlns:a="http://schemas.openxmlformats.org/drawingml/2006/main">
               <a:ext uri="{FF2B5EF4-FFF2-40B4-BE49-F238E27FC236}">
-                <a16:creationId xmlns:a16="http://schemas.microsoft.com/office/drawing/2014/main" id="{DD6A2893-49DC-4C37-B31B-0EEFAF8E2F36}"/>
+                <a16:creationId xmlns:a16="http://schemas.microsoft.com/office/drawing/2014/main" id="{29719382-F0FB-4E98-A707-A03326028AAA}"/>
               </a:ext>
             </a:extLst>
           </p:cNvPr>
@@ -20887,7 +20887,7 @@
           <p:cNvPr id="8" name="(0; 20)&#10;(0; 50)&#10;(60; 20)">
             <a:extLst xmlns:a="http://schemas.openxmlformats.org/drawingml/2006/main">
               <a:ext uri="{FF2B5EF4-FFF2-40B4-BE49-F238E27FC236}">
-                <a16:creationId xmlns:a16="http://schemas.microsoft.com/office/drawing/2014/main" id="{3EB25B1B-63E9-481A-A0A3-8F97270B0B29}"/>
+                <a16:creationId xmlns:a16="http://schemas.microsoft.com/office/drawing/2014/main" id="{D6621F50-E607-43A6-8806-613E8D7FBF52}"/>
               </a:ext>
             </a:extLst>
           </p:cNvPr>
@@ -20990,7 +20990,7 @@
           <p:cNvPr id="9" name="Arceer de driehoek&#10;en schrijf CS&#10;in het gebied.">
             <a:extLst xmlns:a="http://schemas.openxmlformats.org/drawingml/2006/main">
               <a:ext uri="{FF2B5EF4-FFF2-40B4-BE49-F238E27FC236}">
-                <a16:creationId xmlns:a16="http://schemas.microsoft.com/office/drawing/2014/main" id="{7F6C3310-2364-4FBD-811F-5794FD8363E6}"/>
+                <a16:creationId xmlns:a16="http://schemas.microsoft.com/office/drawing/2014/main" id="{DDD1713E-C8AF-487A-85BF-3365DDD682B4}"/>
               </a:ext>
             </a:extLst>
           </p:cNvPr>
@@ -21091,7 +21091,7 @@
     </p:spTree>
     <p:extLst>
       <p:ext uri="{BB962C8B-B14F-4D97-AF65-F5344CB8AC3E}">
-        <p14:creationId xmlns:p14="http://schemas.microsoft.com/office/powerpoint/2010/main" val="1221151968"/>
+        <p14:creationId xmlns:p14="http://schemas.microsoft.com/office/powerpoint/2010/main" val="119859610"/>
       </p:ext>
     </p:extLst>
   </p:cSld>
@@ -21122,7 +21122,7 @@
           <p:cNvPr id="10" name="Opgave 8d · Het CS berekenen">
             <a:extLst xmlns:a="http://schemas.openxmlformats.org/drawingml/2006/main">
               <a:ext uri="{FF2B5EF4-FFF2-40B4-BE49-F238E27FC236}">
-                <a16:creationId xmlns:a16="http://schemas.microsoft.com/office/drawing/2014/main" id="{DAC1B2F3-BDF0-4F0F-BB22-75F98C5150DD}"/>
+                <a16:creationId xmlns:a16="http://schemas.microsoft.com/office/drawing/2014/main" id="{798830F6-FD22-46ED-8A3A-4A1DB8F73A1E}"/>
               </a:ext>
             </a:extLst>
           </p:cNvPr>
@@ -21179,7 +21179,7 @@
           <p:cNvPr id="2" name="">
             <a:extLst xmlns:a="http://schemas.openxmlformats.org/drawingml/2006/main">
               <a:ext uri="{FF2B5EF4-FFF2-40B4-BE49-F238E27FC236}">
-                <a16:creationId xmlns:a16="http://schemas.microsoft.com/office/drawing/2014/main" id="{19D3292A-D658-4495-8288-0E5A725F1C1A}"/>
+                <a16:creationId xmlns:a16="http://schemas.microsoft.com/office/drawing/2014/main" id="{71B31144-A99B-4149-8B3E-9128DC5E4F42}"/>
               </a:ext>
             </a:extLst>
           </p:cNvPr>
@@ -21205,10 +21205,10 @@
       </p:sp>
       <p:sp>
         <p:nvSpPr>
-          <p:cNvPr id="3" name="§2.3.1 Consumentensurplus · Opgave 8 · Boekpagina 79">
+          <p:cNvPr id="3" name="§2.3.1 Consumentensurplus · Opgave 8 · Boekpagina 80">
             <a:extLst xmlns:a="http://schemas.openxmlformats.org/drawingml/2006/main">
               <a:ext uri="{FF2B5EF4-FFF2-40B4-BE49-F238E27FC236}">
-                <a16:creationId xmlns:a16="http://schemas.microsoft.com/office/drawing/2014/main" id="{FE163BB2-1B69-4206-A463-EEF64CB20470}"/>
+                <a16:creationId xmlns:a16="http://schemas.microsoft.com/office/drawing/2014/main" id="{9874CDDD-6A2A-4FEE-98EA-234AEC3B1311}"/>
               </a:ext>
             </a:extLst>
           </p:cNvPr>
@@ -21255,7 +21255,7 @@
                 <a:ea typeface="Arial"/>
                 <a:cs typeface="Arial"/>
               </a:rPr>
-              <a:t>§2.3.1 Consumentensurplus · Opgave 8 · Boekpagina 79</a:t>
+              <a:t>§2.3.1 Consumentensurplus · Opgave 8 · Boekpagina 80</a:t>
             </a:r>
           </a:p>
         </p:txBody>
@@ -21265,7 +21265,7 @@
           <p:cNvPr id="4" name="23">
             <a:extLst xmlns:a="http://schemas.openxmlformats.org/drawingml/2006/main">
               <a:ext uri="{FF2B5EF4-FFF2-40B4-BE49-F238E27FC236}">
-                <a16:creationId xmlns:a16="http://schemas.microsoft.com/office/drawing/2014/main" id="{624AE2B2-5762-465E-9F46-2245A63B311A}"/>
+                <a16:creationId xmlns:a16="http://schemas.microsoft.com/office/drawing/2014/main" id="{2C2C0E20-825F-44C9-B339-9CEE6FCBB5F2}"/>
               </a:ext>
             </a:extLst>
           </p:cNvPr>
@@ -21444,7 +21444,7 @@
           <p:cNvPr id="6" name="CS = ½ × basis × hoogte">
             <a:extLst xmlns:a="http://schemas.openxmlformats.org/drawingml/2006/main">
               <a:ext uri="{FF2B5EF4-FFF2-40B4-BE49-F238E27FC236}">
-                <a16:creationId xmlns:a16="http://schemas.microsoft.com/office/drawing/2014/main" id="{B00A53ED-FA8E-49B7-8BE4-27BF602E95DE}"/>
+                <a16:creationId xmlns:a16="http://schemas.microsoft.com/office/drawing/2014/main" id="{3959A4AD-A053-48CB-86CC-2D1D18FDEB6F}"/>
               </a:ext>
             </a:extLst>
           </p:cNvPr>
@@ -21501,7 +21501,7 @@
           <p:cNvPr id="7" name="CS = ½ × 60 × (50 − 20)">
             <a:extLst xmlns:a="http://schemas.openxmlformats.org/drawingml/2006/main">
               <a:ext uri="{FF2B5EF4-FFF2-40B4-BE49-F238E27FC236}">
-                <a16:creationId xmlns:a16="http://schemas.microsoft.com/office/drawing/2014/main" id="{ECB88B25-EBE2-437B-90F9-004C8F898508}"/>
+                <a16:creationId xmlns:a16="http://schemas.microsoft.com/office/drawing/2014/main" id="{C7109C08-61D4-4962-B05F-B3423CE04D22}"/>
               </a:ext>
             </a:extLst>
           </p:cNvPr>
@@ -21558,7 +21558,7 @@
           <p:cNvPr id="8" name="CS = € 900">
             <a:extLst xmlns:a="http://schemas.openxmlformats.org/drawingml/2006/main">
               <a:ext uri="{FF2B5EF4-FFF2-40B4-BE49-F238E27FC236}">
-                <a16:creationId xmlns:a16="http://schemas.microsoft.com/office/drawing/2014/main" id="{152A7865-8845-4B2C-B8A9-2091DB4F03E9}"/>
+                <a16:creationId xmlns:a16="http://schemas.microsoft.com/office/drawing/2014/main" id="{CB405CA4-5D9B-4C9A-9746-7093302C2CF8}"/>
               </a:ext>
             </a:extLst>
           </p:cNvPr>
@@ -21615,7 +21615,7 @@
           <p:cNvPr id="9" name="Eenheid: kaartjes × € per kaartje = €">
             <a:extLst xmlns:a="http://schemas.openxmlformats.org/drawingml/2006/main">
               <a:ext uri="{FF2B5EF4-FFF2-40B4-BE49-F238E27FC236}">
-                <a16:creationId xmlns:a16="http://schemas.microsoft.com/office/drawing/2014/main" id="{23D5C8D9-8107-4928-9767-BD55CFFC7BF8}"/>
+                <a16:creationId xmlns:a16="http://schemas.microsoft.com/office/drawing/2014/main" id="{545D29C5-6017-4673-AA33-C2377E980495}"/>
               </a:ext>
             </a:extLst>
           </p:cNvPr>
@@ -21670,7 +21670,7 @@
     </p:spTree>
     <p:extLst>
       <p:ext uri="{BB962C8B-B14F-4D97-AF65-F5344CB8AC3E}">
-        <p14:creationId xmlns:p14="http://schemas.microsoft.com/office/powerpoint/2010/main" val="2035950345"/>
+        <p14:creationId xmlns:p14="http://schemas.microsoft.com/office/powerpoint/2010/main" val="247269692"/>
       </p:ext>
     </p:extLst>
   </p:cSld>
@@ -21701,7 +21701,7 @@
           <p:cNvPr id="10" name="Opgave 8e · Betekenis voor de kopers">
             <a:extLst xmlns:a="http://schemas.openxmlformats.org/drawingml/2006/main">
               <a:ext uri="{FF2B5EF4-FFF2-40B4-BE49-F238E27FC236}">
-                <a16:creationId xmlns:a16="http://schemas.microsoft.com/office/drawing/2014/main" id="{FD461388-6EC1-4478-A0AC-2756FE616AC2}"/>
+                <a16:creationId xmlns:a16="http://schemas.microsoft.com/office/drawing/2014/main" id="{E1B442E1-40C6-4C1C-8013-7F5F6A679075}"/>
               </a:ext>
             </a:extLst>
           </p:cNvPr>
@@ -21758,7 +21758,7 @@
           <p:cNvPr id="2" name="">
             <a:extLst xmlns:a="http://schemas.openxmlformats.org/drawingml/2006/main">
               <a:ext uri="{FF2B5EF4-FFF2-40B4-BE49-F238E27FC236}">
-                <a16:creationId xmlns:a16="http://schemas.microsoft.com/office/drawing/2014/main" id="{19887701-535F-467F-BCC9-CB3C5248976A}"/>
+                <a16:creationId xmlns:a16="http://schemas.microsoft.com/office/drawing/2014/main" id="{7AC3C732-13D4-47AD-A892-077636210422}"/>
               </a:ext>
             </a:extLst>
           </p:cNvPr>
@@ -21784,10 +21784,10 @@
       </p:sp>
       <p:sp>
         <p:nvSpPr>
-          <p:cNvPr id="3" name="§2.3.1 Consumentensurplus · Opgave 8 · Boekpagina 79">
+          <p:cNvPr id="3" name="§2.3.1 Consumentensurplus · Opgave 8 · Boekpagina 80">
             <a:extLst xmlns:a="http://schemas.openxmlformats.org/drawingml/2006/main">
               <a:ext uri="{FF2B5EF4-FFF2-40B4-BE49-F238E27FC236}">
-                <a16:creationId xmlns:a16="http://schemas.microsoft.com/office/drawing/2014/main" id="{DE53431B-DEDF-4671-B7D3-E775E9F69C95}"/>
+                <a16:creationId xmlns:a16="http://schemas.microsoft.com/office/drawing/2014/main" id="{84DAB07F-661A-467B-B89B-44152D8D3352}"/>
               </a:ext>
             </a:extLst>
           </p:cNvPr>
@@ -21834,7 +21834,7 @@
                 <a:ea typeface="Arial"/>
                 <a:cs typeface="Arial"/>
               </a:rPr>
-              <a:t>§2.3.1 Consumentensurplus · Opgave 8 · Boekpagina 79</a:t>
+              <a:t>§2.3.1 Consumentensurplus · Opgave 8 · Boekpagina 80</a:t>
             </a:r>
           </a:p>
         </p:txBody>
@@ -21844,7 +21844,7 @@
           <p:cNvPr id="4" name="24">
             <a:extLst xmlns:a="http://schemas.openxmlformats.org/drawingml/2006/main">
               <a:ext uri="{FF2B5EF4-FFF2-40B4-BE49-F238E27FC236}">
-                <a16:creationId xmlns:a16="http://schemas.microsoft.com/office/drawing/2014/main" id="{45992E0A-2EE5-4C1D-AD32-374EF1AA4190}"/>
+                <a16:creationId xmlns:a16="http://schemas.microsoft.com/office/drawing/2014/main" id="{50B549EC-E894-4182-8F37-D589515B7778}"/>
               </a:ext>
             </a:extLst>
           </p:cNvPr>
@@ -21901,7 +21901,7 @@
           <p:cNvPr id="5" name="De kopers hebben samen € 900 meer over voor de 60 gekochte k">
             <a:extLst xmlns:a="http://schemas.openxmlformats.org/drawingml/2006/main">
               <a:ext uri="{FF2B5EF4-FFF2-40B4-BE49-F238E27FC236}">
-                <a16:creationId xmlns:a16="http://schemas.microsoft.com/office/drawing/2014/main" id="{E29F2C7F-4668-4872-B400-8253CB3FB249}"/>
+                <a16:creationId xmlns:a16="http://schemas.microsoft.com/office/drawing/2014/main" id="{33227404-3D61-4A17-B03B-9CC19A2EBA5A}"/>
               </a:ext>
             </a:extLst>
           </p:cNvPr>
@@ -21958,7 +21958,7 @@
           <p:cNvPr id="6" name="">
             <a:extLst xmlns:a="http://schemas.openxmlformats.org/drawingml/2006/main">
               <a:ext uri="{FF2B5EF4-FFF2-40B4-BE49-F238E27FC236}">
-                <a16:creationId xmlns:a16="http://schemas.microsoft.com/office/drawing/2014/main" id="{29AFE83D-23D3-4538-8077-377B470354AB}"/>
+                <a16:creationId xmlns:a16="http://schemas.microsoft.com/office/drawing/2014/main" id="{B462AE47-BD92-4A6A-8762-B0A1C1D19529}"/>
               </a:ext>
             </a:extLst>
           </p:cNvPr>
@@ -21987,7 +21987,7 @@
           <p:cNvPr id="7" name="Ter controle: wat wordt er werkelijk betaald?">
             <a:extLst xmlns:a="http://schemas.openxmlformats.org/drawingml/2006/main">
               <a:ext uri="{FF2B5EF4-FFF2-40B4-BE49-F238E27FC236}">
-                <a16:creationId xmlns:a16="http://schemas.microsoft.com/office/drawing/2014/main" id="{13106BAC-1EA2-4966-A476-4E6256A80DFF}"/>
+                <a16:creationId xmlns:a16="http://schemas.microsoft.com/office/drawing/2014/main" id="{26066134-89E7-48EC-8424-8394B6FB920E}"/>
               </a:ext>
             </a:extLst>
           </p:cNvPr>
@@ -22044,7 +22044,7 @@
           <p:cNvPr id="8" name="20 × 60 = € 1.200">
             <a:extLst xmlns:a="http://schemas.openxmlformats.org/drawingml/2006/main">
               <a:ext uri="{FF2B5EF4-FFF2-40B4-BE49-F238E27FC236}">
-                <a16:creationId xmlns:a16="http://schemas.microsoft.com/office/drawing/2014/main" id="{C5398C98-D607-4D35-A1CE-12E5A9FE995A}"/>
+                <a16:creationId xmlns:a16="http://schemas.microsoft.com/office/drawing/2014/main" id="{21E4C859-76B0-43FB-BC60-2AE6F1D22180}"/>
               </a:ext>
             </a:extLst>
           </p:cNvPr>
@@ -22101,7 +22101,7 @@
           <p:cNvPr id="9" name="CS meet het gezamenlijke extra voordeel.&#10;Het bedrag wordt ni">
             <a:extLst xmlns:a="http://schemas.openxmlformats.org/drawingml/2006/main">
               <a:ext uri="{FF2B5EF4-FFF2-40B4-BE49-F238E27FC236}">
-                <a16:creationId xmlns:a16="http://schemas.microsoft.com/office/drawing/2014/main" id="{0FF7CEC1-8EB6-4A78-9DB6-07196B00FC52}"/>
+                <a16:creationId xmlns:a16="http://schemas.microsoft.com/office/drawing/2014/main" id="{6D7695D1-567C-4A33-98DA-100F25B481AE}"/>
               </a:ext>
             </a:extLst>
           </p:cNvPr>
@@ -22179,7 +22179,7 @@
     </p:spTree>
     <p:extLst>
       <p:ext uri="{BB962C8B-B14F-4D97-AF65-F5344CB8AC3E}">
-        <p14:creationId xmlns:p14="http://schemas.microsoft.com/office/powerpoint/2010/main" val="285603137"/>
+        <p14:creationId xmlns:p14="http://schemas.microsoft.com/office/powerpoint/2010/main" val="1693294042"/>
       </p:ext>
     </p:extLst>
   </p:cSld>
@@ -22210,7 +22210,7 @@
           <p:cNvPr id="29" name="Deze les: §2.3.1 Consumentensurplus">
             <a:extLst xmlns:a="http://schemas.openxmlformats.org/drawingml/2006/main">
               <a:ext uri="{FF2B5EF4-FFF2-40B4-BE49-F238E27FC236}">
-                <a16:creationId xmlns:a16="http://schemas.microsoft.com/office/drawing/2014/main" id="{3645BCC3-3C05-4DF0-B0FA-AA67C8729EDD}"/>
+                <a16:creationId xmlns:a16="http://schemas.microsoft.com/office/drawing/2014/main" id="{7177E3E6-2A41-4B8E-9FC6-5D91A650E131}"/>
               </a:ext>
             </a:extLst>
           </p:cNvPr>
@@ -22267,7 +22267,7 @@
           <p:cNvPr id="2" name="">
             <a:extLst xmlns:a="http://schemas.openxmlformats.org/drawingml/2006/main">
               <a:ext uri="{FF2B5EF4-FFF2-40B4-BE49-F238E27FC236}">
-                <a16:creationId xmlns:a16="http://schemas.microsoft.com/office/drawing/2014/main" id="{7F53F757-2DCE-4564-89C2-77D4B6A4D73F}"/>
+                <a16:creationId xmlns:a16="http://schemas.microsoft.com/office/drawing/2014/main" id="{1FB52799-AE97-44EE-9953-5A81E8E1E53A}"/>
               </a:ext>
             </a:extLst>
           </p:cNvPr>
@@ -22296,7 +22296,7 @@
           <p:cNvPr id="3" name="§2.3.1 Consumentensurplus">
             <a:extLst xmlns:a="http://schemas.openxmlformats.org/drawingml/2006/main">
               <a:ext uri="{FF2B5EF4-FFF2-40B4-BE49-F238E27FC236}">
-                <a16:creationId xmlns:a16="http://schemas.microsoft.com/office/drawing/2014/main" id="{0F3CA4A2-28AE-47A5-BC6A-2875273BA97A}"/>
+                <a16:creationId xmlns:a16="http://schemas.microsoft.com/office/drawing/2014/main" id="{B895DE3E-55FF-41AF-808B-9A794415E3D6}"/>
               </a:ext>
             </a:extLst>
           </p:cNvPr>
@@ -22353,7 +22353,7 @@
           <p:cNvPr id="4" name="25">
             <a:extLst xmlns:a="http://schemas.openxmlformats.org/drawingml/2006/main">
               <a:ext uri="{FF2B5EF4-FFF2-40B4-BE49-F238E27FC236}">
-                <a16:creationId xmlns:a16="http://schemas.microsoft.com/office/drawing/2014/main" id="{DB6E4F1E-2334-4C46-BD7D-4AE0762E62A1}"/>
+                <a16:creationId xmlns:a16="http://schemas.microsoft.com/office/drawing/2014/main" id="{549E6435-E66D-418F-8527-69E9E4297732}"/>
               </a:ext>
             </a:extLst>
           </p:cNvPr>
@@ -22410,7 +22410,7 @@
           <p:cNvPr id="5" name="phase">
             <a:extLst xmlns:a="http://schemas.openxmlformats.org/drawingml/2006/main">
               <a:ext uri="{FF2B5EF4-FFF2-40B4-BE49-F238E27FC236}">
-                <a16:creationId xmlns:a16="http://schemas.microsoft.com/office/drawing/2014/main" id="{95C58A40-04F2-4557-BED4-8FEAE4151C34}"/>
+                <a16:creationId xmlns:a16="http://schemas.microsoft.com/office/drawing/2014/main" id="{FD3DC7D4-9017-4774-B5F8-30D3AC3D7040}"/>
               </a:ext>
             </a:extLst>
           </p:cNvPr>
@@ -22467,7 +22467,7 @@
           <p:cNvPr id="6" name="Lesroute">
             <a:extLst xmlns:a="http://schemas.openxmlformats.org/drawingml/2006/main">
               <a:ext uri="{FF2B5EF4-FFF2-40B4-BE49-F238E27FC236}">
-                <a16:creationId xmlns:a16="http://schemas.microsoft.com/office/drawing/2014/main" id="{F2DBDE68-DB8F-4BD3-AEF3-30D4B90ED4F8}"/>
+                <a16:creationId xmlns:a16="http://schemas.microsoft.com/office/drawing/2014/main" id="{DF49BC47-ACDB-4EC7-8FB5-D1ED8D50D442}"/>
               </a:ext>
             </a:extLst>
           </p:cNvPr>
@@ -22524,7 +22524,7 @@
           <p:cNvPr id="7" name="route-number-1">
             <a:extLst xmlns:a="http://schemas.openxmlformats.org/drawingml/2006/main">
               <a:ext uri="{FF2B5EF4-FFF2-40B4-BE49-F238E27FC236}">
-                <a16:creationId xmlns:a16="http://schemas.microsoft.com/office/drawing/2014/main" id="{EF64E060-42AE-4AEA-AF0B-4099BC792F86}"/>
+                <a16:creationId xmlns:a16="http://schemas.microsoft.com/office/drawing/2014/main" id="{C08A34D7-444D-4ADC-85CE-D8F5F41B9867}"/>
               </a:ext>
             </a:extLst>
           </p:cNvPr>
@@ -22581,7 +22581,7 @@
           <p:cNvPr id="8" name="route-1">
             <a:extLst xmlns:a="http://schemas.openxmlformats.org/drawingml/2006/main">
               <a:ext uri="{FF2B5EF4-FFF2-40B4-BE49-F238E27FC236}">
-                <a16:creationId xmlns:a16="http://schemas.microsoft.com/office/drawing/2014/main" id="{1B7957FF-7CDD-4600-B380-1DC9FB741A9D}"/>
+                <a16:creationId xmlns:a16="http://schemas.microsoft.com/office/drawing/2014/main" id="{2851C352-04CA-463C-A80B-B5035535DA6A}"/>
               </a:ext>
             </a:extLst>
           </p:cNvPr>
@@ -22638,7 +22638,7 @@
           <p:cNvPr id="9" name="route-number-2">
             <a:extLst xmlns:a="http://schemas.openxmlformats.org/drawingml/2006/main">
               <a:ext uri="{FF2B5EF4-FFF2-40B4-BE49-F238E27FC236}">
-                <a16:creationId xmlns:a16="http://schemas.microsoft.com/office/drawing/2014/main" id="{7605067B-4186-4D0C-B7A4-DA28B1D080EE}"/>
+                <a16:creationId xmlns:a16="http://schemas.microsoft.com/office/drawing/2014/main" id="{F8639F02-7CE3-45FD-873E-58D2229C0D0D}"/>
               </a:ext>
             </a:extLst>
           </p:cNvPr>
@@ -22695,7 +22695,7 @@
           <p:cNvPr id="10" name="route-2">
             <a:extLst xmlns:a="http://schemas.openxmlformats.org/drawingml/2006/main">
               <a:ext uri="{FF2B5EF4-FFF2-40B4-BE49-F238E27FC236}">
-                <a16:creationId xmlns:a16="http://schemas.microsoft.com/office/drawing/2014/main" id="{B965E74C-B8D2-4D33-882B-8CC59A5E1BCD}"/>
+                <a16:creationId xmlns:a16="http://schemas.microsoft.com/office/drawing/2014/main" id="{AED9B361-55E2-409B-8655-562B2AC7FACA}"/>
               </a:ext>
             </a:extLst>
           </p:cNvPr>
@@ -22752,7 +22752,7 @@
           <p:cNvPr id="11" name="route-number-3">
             <a:extLst xmlns:a="http://schemas.openxmlformats.org/drawingml/2006/main">
               <a:ext uri="{FF2B5EF4-FFF2-40B4-BE49-F238E27FC236}">
-                <a16:creationId xmlns:a16="http://schemas.microsoft.com/office/drawing/2014/main" id="{9D1B8046-9546-497C-ABC9-07829C7237A6}"/>
+                <a16:creationId xmlns:a16="http://schemas.microsoft.com/office/drawing/2014/main" id="{3A35791F-1C7A-4BD1-9D81-85D4C06C10D5}"/>
               </a:ext>
             </a:extLst>
           </p:cNvPr>
@@ -22809,7 +22809,7 @@
           <p:cNvPr id="12" name="route-3">
             <a:extLst xmlns:a="http://schemas.openxmlformats.org/drawingml/2006/main">
               <a:ext uri="{FF2B5EF4-FFF2-40B4-BE49-F238E27FC236}">
-                <a16:creationId xmlns:a16="http://schemas.microsoft.com/office/drawing/2014/main" id="{3BFB127F-FC8A-4946-9BDB-03D13754B9F4}"/>
+                <a16:creationId xmlns:a16="http://schemas.microsoft.com/office/drawing/2014/main" id="{66EBE6B1-A025-4B14-87F3-9F6DBD800E52}"/>
               </a:ext>
             </a:extLst>
           </p:cNvPr>
@@ -22866,7 +22866,7 @@
           <p:cNvPr id="13" name="route-number-4">
             <a:extLst xmlns:a="http://schemas.openxmlformats.org/drawingml/2006/main">
               <a:ext uri="{FF2B5EF4-FFF2-40B4-BE49-F238E27FC236}">
-                <a16:creationId xmlns:a16="http://schemas.microsoft.com/office/drawing/2014/main" id="{88C9E4BE-4C73-4425-AB21-A0A9B2D1185A}"/>
+                <a16:creationId xmlns:a16="http://schemas.microsoft.com/office/drawing/2014/main" id="{4CB5D03F-994B-4ADE-8F95-46FDDA458CE6}"/>
               </a:ext>
             </a:extLst>
           </p:cNvPr>
@@ -22923,7 +22923,7 @@
           <p:cNvPr id="14" name="route-4">
             <a:extLst xmlns:a="http://schemas.openxmlformats.org/drawingml/2006/main">
               <a:ext uri="{FF2B5EF4-FFF2-40B4-BE49-F238E27FC236}">
-                <a16:creationId xmlns:a16="http://schemas.microsoft.com/office/drawing/2014/main" id="{6170B989-EA87-44F0-928D-1428717E63AB}"/>
+                <a16:creationId xmlns:a16="http://schemas.microsoft.com/office/drawing/2014/main" id="{D615375B-877D-4251-8352-DC507498A110}"/>
               </a:ext>
             </a:extLst>
           </p:cNvPr>
@@ -22980,7 +22980,7 @@
           <p:cNvPr id="15" name="route-number-5">
             <a:extLst xmlns:a="http://schemas.openxmlformats.org/drawingml/2006/main">
               <a:ext uri="{FF2B5EF4-FFF2-40B4-BE49-F238E27FC236}">
-                <a16:creationId xmlns:a16="http://schemas.microsoft.com/office/drawing/2014/main" id="{6E2FE24B-994C-4D3A-A824-B549E901CA08}"/>
+                <a16:creationId xmlns:a16="http://schemas.microsoft.com/office/drawing/2014/main" id="{338C4B4E-F212-48DA-981D-5039ACE4CC5B}"/>
               </a:ext>
             </a:extLst>
           </p:cNvPr>
@@ -23037,7 +23037,7 @@
           <p:cNvPr id="16" name="route-5">
             <a:extLst xmlns:a="http://schemas.openxmlformats.org/drawingml/2006/main">
               <a:ext uri="{FF2B5EF4-FFF2-40B4-BE49-F238E27FC236}">
-                <a16:creationId xmlns:a16="http://schemas.microsoft.com/office/drawing/2014/main" id="{58C2DA2D-12BD-491F-A91B-0810DB8DD44E}"/>
+                <a16:creationId xmlns:a16="http://schemas.microsoft.com/office/drawing/2014/main" id="{AE66E1EE-C82E-4C8D-B44F-EA8C25294E4E}"/>
               </a:ext>
             </a:extLst>
           </p:cNvPr>
@@ -23094,7 +23094,7 @@
           <p:cNvPr id="17" name="route-number-6">
             <a:extLst xmlns:a="http://schemas.openxmlformats.org/drawingml/2006/main">
               <a:ext uri="{FF2B5EF4-FFF2-40B4-BE49-F238E27FC236}">
-                <a16:creationId xmlns:a16="http://schemas.microsoft.com/office/drawing/2014/main" id="{269543E3-1712-420F-A397-DEBD7BCFE337}"/>
+                <a16:creationId xmlns:a16="http://schemas.microsoft.com/office/drawing/2014/main" id="{23BE568E-1E01-476C-9ED4-DDEC8128C52B}"/>
               </a:ext>
             </a:extLst>
           </p:cNvPr>
@@ -23151,7 +23151,7 @@
           <p:cNvPr id="18" name="route-6">
             <a:extLst xmlns:a="http://schemas.openxmlformats.org/drawingml/2006/main">
               <a:ext uri="{FF2B5EF4-FFF2-40B4-BE49-F238E27FC236}">
-                <a16:creationId xmlns:a16="http://schemas.microsoft.com/office/drawing/2014/main" id="{C3912E93-D393-4A35-8801-F8E7BA5FA909}"/>
+                <a16:creationId xmlns:a16="http://schemas.microsoft.com/office/drawing/2014/main" id="{1F4B408B-0FA5-4171-B9DD-BE6E5E2C157E}"/>
               </a:ext>
             </a:extLst>
           </p:cNvPr>
@@ -23208,7 +23208,7 @@
           <p:cNvPr id="19" name="route-number-7">
             <a:extLst xmlns:a="http://schemas.openxmlformats.org/drawingml/2006/main">
               <a:ext uri="{FF2B5EF4-FFF2-40B4-BE49-F238E27FC236}">
-                <a16:creationId xmlns:a16="http://schemas.microsoft.com/office/drawing/2014/main" id="{6847255D-F90D-48B0-BA7E-DF8CD902E715}"/>
+                <a16:creationId xmlns:a16="http://schemas.microsoft.com/office/drawing/2014/main" id="{41E7CBFE-D4A1-42BB-8750-865B787071C1}"/>
               </a:ext>
             </a:extLst>
           </p:cNvPr>
@@ -23265,7 +23265,7 @@
           <p:cNvPr id="20" name="route-7">
             <a:extLst xmlns:a="http://schemas.openxmlformats.org/drawingml/2006/main">
               <a:ext uri="{FF2B5EF4-FFF2-40B4-BE49-F238E27FC236}">
-                <a16:creationId xmlns:a16="http://schemas.microsoft.com/office/drawing/2014/main" id="{3FA1C09A-F8B6-430A-A82B-13FFE9ECDECE}"/>
+                <a16:creationId xmlns:a16="http://schemas.microsoft.com/office/drawing/2014/main" id="{17A62A96-E90D-48EE-9526-0CBEF7C6CAD6}"/>
               </a:ext>
             </a:extLst>
           </p:cNvPr>
@@ -23322,7 +23322,7 @@
           <p:cNvPr id="21" name="Lesdoelen">
             <a:extLst xmlns:a="http://schemas.openxmlformats.org/drawingml/2006/main">
               <a:ext uri="{FF2B5EF4-FFF2-40B4-BE49-F238E27FC236}">
-                <a16:creationId xmlns:a16="http://schemas.microsoft.com/office/drawing/2014/main" id="{9D381C46-7F1D-4A88-A803-36DEBD28CA74}"/>
+                <a16:creationId xmlns:a16="http://schemas.microsoft.com/office/drawing/2014/main" id="{94E72023-EE54-453A-A862-3836C12B6920}"/>
               </a:ext>
             </a:extLst>
           </p:cNvPr>
@@ -23379,7 +23379,7 @@
           <p:cNvPr id="22" name="overview-goals">
             <a:extLst xmlns:a="http://schemas.openxmlformats.org/drawingml/2006/main">
               <a:ext uri="{FF2B5EF4-FFF2-40B4-BE49-F238E27FC236}">
-                <a16:creationId xmlns:a16="http://schemas.microsoft.com/office/drawing/2014/main" id="{D8C9D5A2-D8F0-4284-AF76-6B0800D203F4}"/>
+                <a16:creationId xmlns:a16="http://schemas.microsoft.com/office/drawing/2014/main" id="{E6B727E4-0C34-4DD2-B5B9-42E695D7C8EB}"/>
               </a:ext>
             </a:extLst>
           </p:cNvPr>
@@ -23482,7 +23482,7 @@
           <p:cNvPr id="23" name="">
             <a:extLst xmlns:a="http://schemas.openxmlformats.org/drawingml/2006/main">
               <a:ext uri="{FF2B5EF4-FFF2-40B4-BE49-F238E27FC236}">
-                <a16:creationId xmlns:a16="http://schemas.microsoft.com/office/drawing/2014/main" id="{291D44D9-9DEB-4D38-8B20-547FEE35A1D6}"/>
+                <a16:creationId xmlns:a16="http://schemas.microsoft.com/office/drawing/2014/main" id="{EE1E9E3C-5FA4-41A5-8942-02782DF5D063}"/>
               </a:ext>
             </a:extLst>
           </p:cNvPr>
@@ -23511,7 +23511,7 @@
           <p:cNvPr id="24" name="Startopdracht">
             <a:extLst xmlns:a="http://schemas.openxmlformats.org/drawingml/2006/main">
               <a:ext uri="{FF2B5EF4-FFF2-40B4-BE49-F238E27FC236}">
-                <a16:creationId xmlns:a16="http://schemas.microsoft.com/office/drawing/2014/main" id="{0FCAEF9B-6FFB-4787-B799-0CCE15C000D0}"/>
+                <a16:creationId xmlns:a16="http://schemas.microsoft.com/office/drawing/2014/main" id="{8E3EF38D-A277-4354-B979-3B7B0CF3F954}"/>
               </a:ext>
             </a:extLst>
           </p:cNvPr>
@@ -23568,7 +23568,7 @@
           <p:cNvPr id="25" name="overview-start">
             <a:extLst xmlns:a="http://schemas.openxmlformats.org/drawingml/2006/main">
               <a:ext uri="{FF2B5EF4-FFF2-40B4-BE49-F238E27FC236}">
-                <a16:creationId xmlns:a16="http://schemas.microsoft.com/office/drawing/2014/main" id="{F311BB22-5E61-480C-B25D-762B909BEBB0}"/>
+                <a16:creationId xmlns:a16="http://schemas.microsoft.com/office/drawing/2014/main" id="{B2599FDF-678A-4A07-A5A7-BC229B23B2F0}"/>
               </a:ext>
             </a:extLst>
           </p:cNvPr>
@@ -23615,7 +23615,7 @@
                 <a:ea typeface="Arial"/>
                 <a:cs typeface="Arial"/>
               </a:rPr>
-              <a:t>Pagina 76 · Opgaven 1 en 2</a:t>
+              <a:t>Pagina 77 · Opgaven 1 en 2</a:t>
             </a:r>
           </a:p>
           <a:p xmlns:a="http://schemas.openxmlformats.org/drawingml/2006/main">
@@ -23638,7 +23638,7 @@
                 <a:ea typeface="Arial"/>
                 <a:cs typeface="Arial"/>
               </a:rPr>
-              <a:t>2: verkennen met theorie p. 72</a:t>
+              <a:t>2: verkennen met theorie p. 73</a:t>
             </a:r>
           </a:p>
           <a:p xmlns:a="http://schemas.openxmlformats.org/drawingml/2006/main">
@@ -23661,7 +23661,7 @@
                 <a:ea typeface="Arial"/>
                 <a:cs typeface="Arial"/>
               </a:rPr>
-              <a:t>Reken- en tekenhulp: p. 74</a:t>
+              <a:t>Reken- en tekenhulp: p. 75</a:t>
             </a:r>
           </a:p>
         </p:txBody>
@@ -23671,7 +23671,7 @@
           <p:cNvPr id="26" name="">
             <a:extLst xmlns:a="http://schemas.openxmlformats.org/drawingml/2006/main">
               <a:ext uri="{FF2B5EF4-FFF2-40B4-BE49-F238E27FC236}">
-                <a16:creationId xmlns:a16="http://schemas.microsoft.com/office/drawing/2014/main" id="{9716F888-1632-4DF2-8806-D005A92D8AE1}"/>
+                <a16:creationId xmlns:a16="http://schemas.microsoft.com/office/drawing/2014/main" id="{15B425EC-CE53-496E-A7F5-CA1DFE4987D8}"/>
               </a:ext>
             </a:extLst>
           </p:cNvPr>
@@ -23700,7 +23700,7 @@
           <p:cNvPr id="27" name="Huiswerk">
             <a:extLst xmlns:a="http://schemas.openxmlformats.org/drawingml/2006/main">
               <a:ext uri="{FF2B5EF4-FFF2-40B4-BE49-F238E27FC236}">
-                <a16:creationId xmlns:a16="http://schemas.microsoft.com/office/drawing/2014/main" id="{321A73DA-C9B0-4687-B58C-A331541B1AEA}"/>
+                <a16:creationId xmlns:a16="http://schemas.microsoft.com/office/drawing/2014/main" id="{91697EE9-7D08-4AB8-BA74-93DEEAD03346}"/>
               </a:ext>
             </a:extLst>
           </p:cNvPr>
@@ -23757,7 +23757,7 @@
           <p:cNvPr id="28" name="overview-homework">
             <a:extLst xmlns:a="http://schemas.openxmlformats.org/drawingml/2006/main">
               <a:ext uri="{FF2B5EF4-FFF2-40B4-BE49-F238E27FC236}">
-                <a16:creationId xmlns:a16="http://schemas.microsoft.com/office/drawing/2014/main" id="{2EF15FF8-60AA-441A-9D71-CE754E56F254}"/>
+                <a16:creationId xmlns:a16="http://schemas.microsoft.com/office/drawing/2014/main" id="{3B92C285-4D47-4398-9922-467436363AED}"/>
               </a:ext>
             </a:extLst>
           </p:cNvPr>
@@ -23904,7 +23904,7 @@
     </p:spTree>
     <p:extLst>
       <p:ext uri="{BB962C8B-B14F-4D97-AF65-F5344CB8AC3E}">
-        <p14:creationId xmlns:p14="http://schemas.microsoft.com/office/powerpoint/2010/main" val="931431615"/>
+        <p14:creationId xmlns:p14="http://schemas.microsoft.com/office/powerpoint/2010/main" val="42492625"/>
       </p:ext>
     </p:extLst>
   </p:cSld>
@@ -23935,7 +23935,7 @@
           <p:cNvPr id="9" name="Het voordeel van één koper">
             <a:extLst xmlns:a="http://schemas.openxmlformats.org/drawingml/2006/main">
               <a:ext uri="{FF2B5EF4-FFF2-40B4-BE49-F238E27FC236}">
-                <a16:creationId xmlns:a16="http://schemas.microsoft.com/office/drawing/2014/main" id="{DD5F8DC0-AD3F-4FDE-A04F-E8D31E86E08B}"/>
+                <a16:creationId xmlns:a16="http://schemas.microsoft.com/office/drawing/2014/main" id="{347EAF2C-9AFB-4F61-AAF3-BA68690CFA2A}"/>
               </a:ext>
             </a:extLst>
           </p:cNvPr>
@@ -23992,7 +23992,7 @@
           <p:cNvPr id="2" name="">
             <a:extLst xmlns:a="http://schemas.openxmlformats.org/drawingml/2006/main">
               <a:ext uri="{FF2B5EF4-FFF2-40B4-BE49-F238E27FC236}">
-                <a16:creationId xmlns:a16="http://schemas.microsoft.com/office/drawing/2014/main" id="{BDA317D0-A60E-4D19-9BBD-59CEBE3BF45E}"/>
+                <a16:creationId xmlns:a16="http://schemas.microsoft.com/office/drawing/2014/main" id="{D57D5E67-94D2-4656-B724-A66BA93AABEF}"/>
               </a:ext>
             </a:extLst>
           </p:cNvPr>
@@ -24021,7 +24021,7 @@
           <p:cNvPr id="3" name="Uitlegvoorbeeld — niet uit het boek">
             <a:extLst xmlns:a="http://schemas.openxmlformats.org/drawingml/2006/main">
               <a:ext uri="{FF2B5EF4-FFF2-40B4-BE49-F238E27FC236}">
-                <a16:creationId xmlns:a16="http://schemas.microsoft.com/office/drawing/2014/main" id="{742FAD8D-4195-4C35-BF47-13BDDBA1F338}"/>
+                <a16:creationId xmlns:a16="http://schemas.microsoft.com/office/drawing/2014/main" id="{2F043E9E-7D49-47DA-A3B0-2BF574E86928}"/>
               </a:ext>
             </a:extLst>
           </p:cNvPr>
@@ -24078,7 +24078,7 @@
           <p:cNvPr id="4" name="3">
             <a:extLst xmlns:a="http://schemas.openxmlformats.org/drawingml/2006/main">
               <a:ext uri="{FF2B5EF4-FFF2-40B4-BE49-F238E27FC236}">
-                <a16:creationId xmlns:a16="http://schemas.microsoft.com/office/drawing/2014/main" id="{83529264-92FC-43B0-B214-DE57B412FEA2}"/>
+                <a16:creationId xmlns:a16="http://schemas.microsoft.com/office/drawing/2014/main" id="{D8DD5A64-AAF4-4D6E-B981-4A353B28C258}"/>
               </a:ext>
             </a:extLst>
           </p:cNvPr>
@@ -24135,7 +24135,7 @@
           <p:cNvPr id="5" name="Filmavond: Noor wil maximaal € 22 betalen. Het kaartje kost ">
             <a:extLst xmlns:a="http://schemas.openxmlformats.org/drawingml/2006/main">
               <a:ext uri="{FF2B5EF4-FFF2-40B4-BE49-F238E27FC236}">
-                <a16:creationId xmlns:a16="http://schemas.microsoft.com/office/drawing/2014/main" id="{91752060-A213-408E-8489-7FCC0ACCEFC9}"/>
+                <a16:creationId xmlns:a16="http://schemas.microsoft.com/office/drawing/2014/main" id="{6E002660-2ED1-40F0-8518-0573EB4948CE}"/>
               </a:ext>
             </a:extLst>
           </p:cNvPr>
@@ -24363,7 +24363,7 @@
           <p:cNvPr id="7" name="CS = betalingsbereidheid − betaalde prijs">
             <a:extLst xmlns:a="http://schemas.openxmlformats.org/drawingml/2006/main">
               <a:ext uri="{FF2B5EF4-FFF2-40B4-BE49-F238E27FC236}">
-                <a16:creationId xmlns:a16="http://schemas.microsoft.com/office/drawing/2014/main" id="{E0F8A222-213E-4CE0-8FEF-8BB3B7054DBE}"/>
+                <a16:creationId xmlns:a16="http://schemas.microsoft.com/office/drawing/2014/main" id="{A8A29C99-F105-4806-9DBF-CBD129719ABA}"/>
               </a:ext>
             </a:extLst>
           </p:cNvPr>
@@ -24420,7 +24420,7 @@
           <p:cNvPr id="8" name="Het bezoek is voor Noor € 13 meer waard dan zij betaalt.">
             <a:extLst xmlns:a="http://schemas.openxmlformats.org/drawingml/2006/main">
               <a:ext uri="{FF2B5EF4-FFF2-40B4-BE49-F238E27FC236}">
-                <a16:creationId xmlns:a16="http://schemas.microsoft.com/office/drawing/2014/main" id="{5F728991-4E0A-471E-97E0-0AFCB441A8B4}"/>
+                <a16:creationId xmlns:a16="http://schemas.microsoft.com/office/drawing/2014/main" id="{159E0EA5-DE8E-452A-93FB-013B639575DE}"/>
               </a:ext>
             </a:extLst>
           </p:cNvPr>
@@ -24475,7 +24475,7 @@
     </p:spTree>
     <p:extLst>
       <p:ext uri="{BB962C8B-B14F-4D97-AF65-F5344CB8AC3E}">
-        <p14:creationId xmlns:p14="http://schemas.microsoft.com/office/powerpoint/2010/main" val="1294321960"/>
+        <p14:creationId xmlns:p14="http://schemas.microsoft.com/office/powerpoint/2010/main" val="719475525"/>
       </p:ext>
     </p:extLst>
   </p:cSld>
@@ -24506,7 +24506,7 @@
           <p:cNvPr id="9" name="Losse kopers: voordelen optellen">
             <a:extLst xmlns:a="http://schemas.openxmlformats.org/drawingml/2006/main">
               <a:ext uri="{FF2B5EF4-FFF2-40B4-BE49-F238E27FC236}">
-                <a16:creationId xmlns:a16="http://schemas.microsoft.com/office/drawing/2014/main" id="{B098B4C0-2996-4D9C-BABF-316791B58A98}"/>
+                <a16:creationId xmlns:a16="http://schemas.microsoft.com/office/drawing/2014/main" id="{FF746EAC-D2E1-4A08-B3E1-9AC74650C72A}"/>
               </a:ext>
             </a:extLst>
           </p:cNvPr>
@@ -24563,7 +24563,7 @@
           <p:cNvPr id="2" name="">
             <a:extLst xmlns:a="http://schemas.openxmlformats.org/drawingml/2006/main">
               <a:ext uri="{FF2B5EF4-FFF2-40B4-BE49-F238E27FC236}">
-                <a16:creationId xmlns:a16="http://schemas.microsoft.com/office/drawing/2014/main" id="{551906DB-1630-48EA-BC43-1155D574741D}"/>
+                <a16:creationId xmlns:a16="http://schemas.microsoft.com/office/drawing/2014/main" id="{B893B2D5-AFFA-4451-8794-55F8ABBDB9D0}"/>
               </a:ext>
             </a:extLst>
           </p:cNvPr>
@@ -24592,7 +24592,7 @@
           <p:cNvPr id="3" name="Uitlegvoorbeeld — niet uit het boek">
             <a:extLst xmlns:a="http://schemas.openxmlformats.org/drawingml/2006/main">
               <a:ext uri="{FF2B5EF4-FFF2-40B4-BE49-F238E27FC236}">
-                <a16:creationId xmlns:a16="http://schemas.microsoft.com/office/drawing/2014/main" id="{8C6B9194-A6C1-49EB-8438-319BBB711D94}"/>
+                <a16:creationId xmlns:a16="http://schemas.microsoft.com/office/drawing/2014/main" id="{BEF8C2B2-2406-4A34-8700-FDBED623C2EC}"/>
               </a:ext>
             </a:extLst>
           </p:cNvPr>
@@ -24649,7 +24649,7 @@
           <p:cNvPr id="4" name="4">
             <a:extLst xmlns:a="http://schemas.openxmlformats.org/drawingml/2006/main">
               <a:ext uri="{FF2B5EF4-FFF2-40B4-BE49-F238E27FC236}">
-                <a16:creationId xmlns:a16="http://schemas.microsoft.com/office/drawing/2014/main" id="{5E6CB60C-88D3-49EA-B621-5A0E55AE4EBA}"/>
+                <a16:creationId xmlns:a16="http://schemas.microsoft.com/office/drawing/2014/main" id="{418A448F-D41C-4B6C-9C70-8BEE7C6BC0D5}"/>
               </a:ext>
             </a:extLst>
           </p:cNvPr>
@@ -24706,7 +24706,7 @@
           <p:cNvPr id="5" name="Filmavond: iedereen wil hoogstens één kaartje. De prijs is €">
             <a:extLst xmlns:a="http://schemas.openxmlformats.org/drawingml/2006/main">
               <a:ext uri="{FF2B5EF4-FFF2-40B4-BE49-F238E27FC236}">
-                <a16:creationId xmlns:a16="http://schemas.microsoft.com/office/drawing/2014/main" id="{7E4F214E-6F8C-4F7C-8960-0AEA1C858CB6}"/>
+                <a16:creationId xmlns:a16="http://schemas.microsoft.com/office/drawing/2014/main" id="{ABEC8DA7-A4DB-4966-858E-1F36EF4CBFE7}"/>
               </a:ext>
             </a:extLst>
           </p:cNvPr>
@@ -25179,7 +25179,7 @@
           <p:cNvPr id="7" name="Gezamenlijk CS = 13 + 6 = € 19">
             <a:extLst xmlns:a="http://schemas.openxmlformats.org/drawingml/2006/main">
               <a:ext uri="{FF2B5EF4-FFF2-40B4-BE49-F238E27FC236}">
-                <a16:creationId xmlns:a16="http://schemas.microsoft.com/office/drawing/2014/main" id="{9D7BE7BD-FBC4-4B91-BD4B-F06EAD84F99D}"/>
+                <a16:creationId xmlns:a16="http://schemas.microsoft.com/office/drawing/2014/main" id="{87CE7062-D758-4E8A-9763-094FBF0458BA}"/>
               </a:ext>
             </a:extLst>
           </p:cNvPr>
@@ -25236,7 +25236,7 @@
           <p:cNvPr id="8" name="Alleen de gekochte kaartjes tellen mee.">
             <a:extLst xmlns:a="http://schemas.openxmlformats.org/drawingml/2006/main">
               <a:ext uri="{FF2B5EF4-FFF2-40B4-BE49-F238E27FC236}">
-                <a16:creationId xmlns:a16="http://schemas.microsoft.com/office/drawing/2014/main" id="{9D60CBD2-7E4A-431B-9372-B49272B142F2}"/>
+                <a16:creationId xmlns:a16="http://schemas.microsoft.com/office/drawing/2014/main" id="{16D84308-5539-4D65-B4E8-2AD3F8F9E086}"/>
               </a:ext>
             </a:extLst>
           </p:cNvPr>
@@ -25291,7 +25291,7 @@
     </p:spTree>
     <p:extLst>
       <p:ext uri="{BB962C8B-B14F-4D97-AF65-F5344CB8AC3E}">
-        <p14:creationId xmlns:p14="http://schemas.microsoft.com/office/powerpoint/2010/main" val="106867007"/>
+        <p14:creationId xmlns:p14="http://schemas.microsoft.com/office/powerpoint/2010/main" val="936261571"/>
       </p:ext>
     </p:extLst>
   </p:cSld>
@@ -25322,7 +25322,7 @@
           <p:cNvPr id="10" name="Theatermiddag">
             <a:extLst xmlns:a="http://schemas.openxmlformats.org/drawingml/2006/main">
               <a:ext uri="{FF2B5EF4-FFF2-40B4-BE49-F238E27FC236}">
-                <a16:creationId xmlns:a16="http://schemas.microsoft.com/office/drawing/2014/main" id="{750819C4-C045-48E3-A8CC-D8617A68A31A}"/>
+                <a16:creationId xmlns:a16="http://schemas.microsoft.com/office/drawing/2014/main" id="{23169075-91D7-4E89-8ABF-95E703888F72}"/>
               </a:ext>
             </a:extLst>
           </p:cNvPr>
@@ -25379,7 +25379,7 @@
           <p:cNvPr id="2" name="">
             <a:extLst xmlns:a="http://schemas.openxmlformats.org/drawingml/2006/main">
               <a:ext uri="{FF2B5EF4-FFF2-40B4-BE49-F238E27FC236}">
-                <a16:creationId xmlns:a16="http://schemas.microsoft.com/office/drawing/2014/main" id="{4F127F71-F921-41B9-A058-927C0F0C4880}"/>
+                <a16:creationId xmlns:a16="http://schemas.microsoft.com/office/drawing/2014/main" id="{BAC6C545-A672-4913-9982-68ED887F721C}"/>
               </a:ext>
             </a:extLst>
           </p:cNvPr>
@@ -25408,7 +25408,7 @@
           <p:cNvPr id="3" name="Uitlegvoorbeeld — niet uit het boek">
             <a:extLst xmlns:a="http://schemas.openxmlformats.org/drawingml/2006/main">
               <a:ext uri="{FF2B5EF4-FFF2-40B4-BE49-F238E27FC236}">
-                <a16:creationId xmlns:a16="http://schemas.microsoft.com/office/drawing/2014/main" id="{4B9BC033-E4CB-456C-9385-F1E9915161D8}"/>
+                <a16:creationId xmlns:a16="http://schemas.microsoft.com/office/drawing/2014/main" id="{0D557D2E-CFAD-40DA-BE55-51F25C2CC586}"/>
               </a:ext>
             </a:extLst>
           </p:cNvPr>
@@ -25465,7 +25465,7 @@
           <p:cNvPr id="4" name="5">
             <a:extLst xmlns:a="http://schemas.openxmlformats.org/drawingml/2006/main">
               <a:ext uri="{FF2B5EF4-FFF2-40B4-BE49-F238E27FC236}">
-                <a16:creationId xmlns:a16="http://schemas.microsoft.com/office/drawing/2014/main" id="{3505F4F9-D238-4B7E-92F8-E49F5EC11851}"/>
+                <a16:creationId xmlns:a16="http://schemas.microsoft.com/office/drawing/2014/main" id="{734D1E97-D7AB-4E21-858C-D02AADB7E719}"/>
               </a:ext>
             </a:extLst>
           </p:cNvPr>
@@ -25522,7 +25522,7 @@
           <p:cNvPr id="5" name="Een doorlopende vraaglijn voor een andere markt">
             <a:extLst xmlns:a="http://schemas.openxmlformats.org/drawingml/2006/main">
               <a:ext uri="{FF2B5EF4-FFF2-40B4-BE49-F238E27FC236}">
-                <a16:creationId xmlns:a16="http://schemas.microsoft.com/office/drawing/2014/main" id="{A084121E-05AB-4F96-83FA-8400FDC89654}"/>
+                <a16:creationId xmlns:a16="http://schemas.microsoft.com/office/drawing/2014/main" id="{5CE761BD-4937-42E6-940D-BA3FCC2C3BE5}"/>
               </a:ext>
             </a:extLst>
           </p:cNvPr>
@@ -25579,7 +25579,7 @@
           <p:cNvPr id="6" name="P = 40 − 0,5Q">
             <a:extLst xmlns:a="http://schemas.openxmlformats.org/drawingml/2006/main">
               <a:ext uri="{FF2B5EF4-FFF2-40B4-BE49-F238E27FC236}">
-                <a16:creationId xmlns:a16="http://schemas.microsoft.com/office/drawing/2014/main" id="{08BF9F9C-28CC-475C-9724-4A2C0A0D586C}"/>
+                <a16:creationId xmlns:a16="http://schemas.microsoft.com/office/drawing/2014/main" id="{91E770A2-8DF7-4249-8D70-F69E0478ACEA}"/>
               </a:ext>
             </a:extLst>
           </p:cNvPr>
@@ -25636,7 +25636,7 @@
           <p:cNvPr id="7" name="P: euro per kaartje&#10;Q: aantal kaartjes voor deze theatermidd">
             <a:extLst xmlns:a="http://schemas.openxmlformats.org/drawingml/2006/main">
               <a:ext uri="{FF2B5EF4-FFF2-40B4-BE49-F238E27FC236}">
-                <a16:creationId xmlns:a16="http://schemas.microsoft.com/office/drawing/2014/main" id="{449C7326-2C38-4636-A748-1720D9545A92}"/>
+                <a16:creationId xmlns:a16="http://schemas.microsoft.com/office/drawing/2014/main" id="{1476D5A7-42E3-4791-AB5A-6C393A427C8E}"/>
               </a:ext>
             </a:extLst>
           </p:cNvPr>
@@ -25716,7 +25716,7 @@
           <p:cNvPr id="8" name="Gegeven prijs: € 16 per kaartje">
             <a:extLst xmlns:a="http://schemas.openxmlformats.org/drawingml/2006/main">
               <a:ext uri="{FF2B5EF4-FFF2-40B4-BE49-F238E27FC236}">
-                <a16:creationId xmlns:a16="http://schemas.microsoft.com/office/drawing/2014/main" id="{A0E7A83C-CB25-412E-B996-C116347CFE0F}"/>
+                <a16:creationId xmlns:a16="http://schemas.microsoft.com/office/drawing/2014/main" id="{26D2A7D7-7377-4432-9D16-B99429E1EB50}"/>
               </a:ext>
             </a:extLst>
           </p:cNvPr>
@@ -25773,7 +25773,7 @@
           <p:cNvPr id="9" name="Er zijn genoeg kaartjes. Alle gevraagde kaartjes gaan naar d">
             <a:extLst xmlns:a="http://schemas.openxmlformats.org/drawingml/2006/main">
               <a:ext uri="{FF2B5EF4-FFF2-40B4-BE49-F238E27FC236}">
-                <a16:creationId xmlns:a16="http://schemas.microsoft.com/office/drawing/2014/main" id="{D805E15E-F4D1-4C68-B254-C37382AFCA34}"/>
+                <a16:creationId xmlns:a16="http://schemas.microsoft.com/office/drawing/2014/main" id="{E090DFF3-75B2-4F93-B3A7-74FCB1686259}"/>
               </a:ext>
             </a:extLst>
           </p:cNvPr>
@@ -25828,7 +25828,7 @@
     </p:spTree>
     <p:extLst>
       <p:ext uri="{BB962C8B-B14F-4D97-AF65-F5344CB8AC3E}">
-        <p14:creationId xmlns:p14="http://schemas.microsoft.com/office/powerpoint/2010/main" val="594837967"/>
+        <p14:creationId xmlns:p14="http://schemas.microsoft.com/office/powerpoint/2010/main" val="1196463028"/>
       </p:ext>
     </p:extLst>
   </p:cSld>
@@ -25859,7 +25859,7 @@
           <p:cNvPr id="14" name="De hoeveelheid bij P = € 16">
             <a:extLst xmlns:a="http://schemas.openxmlformats.org/drawingml/2006/main">
               <a:ext uri="{FF2B5EF4-FFF2-40B4-BE49-F238E27FC236}">
-                <a16:creationId xmlns:a16="http://schemas.microsoft.com/office/drawing/2014/main" id="{921F3F3E-FC4E-41B3-BEC5-972223D47062}"/>
+                <a16:creationId xmlns:a16="http://schemas.microsoft.com/office/drawing/2014/main" id="{8F4CE5A4-F5F9-4A34-B213-9365E5130CBD}"/>
               </a:ext>
             </a:extLst>
           </p:cNvPr>
@@ -25916,7 +25916,7 @@
           <p:cNvPr id="2" name="">
             <a:extLst xmlns:a="http://schemas.openxmlformats.org/drawingml/2006/main">
               <a:ext uri="{FF2B5EF4-FFF2-40B4-BE49-F238E27FC236}">
-                <a16:creationId xmlns:a16="http://schemas.microsoft.com/office/drawing/2014/main" id="{8B252093-3E33-478C-9C07-4C3CB88A82AD}"/>
+                <a16:creationId xmlns:a16="http://schemas.microsoft.com/office/drawing/2014/main" id="{3CB48D08-3838-47B6-B71E-E3908FD1B91D}"/>
               </a:ext>
             </a:extLst>
           </p:cNvPr>
@@ -25945,7 +25945,7 @@
           <p:cNvPr id="3" name="Uitlegvoorbeeld — niet uit het boek">
             <a:extLst xmlns:a="http://schemas.openxmlformats.org/drawingml/2006/main">
               <a:ext uri="{FF2B5EF4-FFF2-40B4-BE49-F238E27FC236}">
-                <a16:creationId xmlns:a16="http://schemas.microsoft.com/office/drawing/2014/main" id="{34377644-91CA-4096-A15F-9DB71A0D2163}"/>
+                <a16:creationId xmlns:a16="http://schemas.microsoft.com/office/drawing/2014/main" id="{5FEECB3D-1405-4F87-B324-F8EF453A7903}"/>
               </a:ext>
             </a:extLst>
           </p:cNvPr>
@@ -26002,7 +26002,7 @@
           <p:cNvPr id="4" name="6">
             <a:extLst xmlns:a="http://schemas.openxmlformats.org/drawingml/2006/main">
               <a:ext uri="{FF2B5EF4-FFF2-40B4-BE49-F238E27FC236}">
-                <a16:creationId xmlns:a16="http://schemas.microsoft.com/office/drawing/2014/main" id="{331D6810-24C5-40B9-83A5-2C383D62F944}"/>
+                <a16:creationId xmlns:a16="http://schemas.microsoft.com/office/drawing/2014/main" id="{4671D358-B3F5-4360-ACC2-99CF142F2527}"/>
               </a:ext>
             </a:extLst>
           </p:cNvPr>
@@ -26059,7 +26059,7 @@
           <p:cNvPr id="5" name="Theatermiddag: P = 40 − 0,5Q">
             <a:extLst xmlns:a="http://schemas.openxmlformats.org/drawingml/2006/main">
               <a:ext uri="{FF2B5EF4-FFF2-40B4-BE49-F238E27FC236}">
-                <a16:creationId xmlns:a16="http://schemas.microsoft.com/office/drawing/2014/main" id="{EEE176BB-29AD-4D42-94B9-86CF7B17E97E}"/>
+                <a16:creationId xmlns:a16="http://schemas.microsoft.com/office/drawing/2014/main" id="{B1FF8A4B-6D5B-40F2-9D4C-6597E179A841}"/>
               </a:ext>
             </a:extLst>
           </p:cNvPr>
@@ -26116,7 +26116,7 @@
           <p:cNvPr id="6" name="Prijs invullen">
             <a:extLst xmlns:a="http://schemas.openxmlformats.org/drawingml/2006/main">
               <a:ext uri="{FF2B5EF4-FFF2-40B4-BE49-F238E27FC236}">
-                <a16:creationId xmlns:a16="http://schemas.microsoft.com/office/drawing/2014/main" id="{D5074AF8-9540-4C6E-BAEA-66B97DBFB714}"/>
+                <a16:creationId xmlns:a16="http://schemas.microsoft.com/office/drawing/2014/main" id="{76329D07-935F-44A1-870C-48B516D73BE5}"/>
               </a:ext>
             </a:extLst>
           </p:cNvPr>
@@ -26173,7 +26173,7 @@
           <p:cNvPr id="7" name="16 = 40 − 0,5Q">
             <a:extLst xmlns:a="http://schemas.openxmlformats.org/drawingml/2006/main">
               <a:ext uri="{FF2B5EF4-FFF2-40B4-BE49-F238E27FC236}">
-                <a16:creationId xmlns:a16="http://schemas.microsoft.com/office/drawing/2014/main" id="{D7390BCE-6432-4CB7-AE90-FD5749A42B45}"/>
+                <a16:creationId xmlns:a16="http://schemas.microsoft.com/office/drawing/2014/main" id="{93673608-CAD9-4342-A696-C082D2E5205E}"/>
               </a:ext>
             </a:extLst>
           </p:cNvPr>
@@ -26230,7 +26230,7 @@
           <p:cNvPr id="8" name="0,5Q links, 16 rechts">
             <a:extLst xmlns:a="http://schemas.openxmlformats.org/drawingml/2006/main">
               <a:ext uri="{FF2B5EF4-FFF2-40B4-BE49-F238E27FC236}">
-                <a16:creationId xmlns:a16="http://schemas.microsoft.com/office/drawing/2014/main" id="{DEF375FC-1506-48AD-99B7-5BB5A0818A69}"/>
+                <a16:creationId xmlns:a16="http://schemas.microsoft.com/office/drawing/2014/main" id="{9E88038B-3223-4DD7-A749-3FED3453038F}"/>
               </a:ext>
             </a:extLst>
           </p:cNvPr>
@@ -26287,7 +26287,7 @@
           <p:cNvPr id="9" name="0,5Q = 40 − 16 = 24">
             <a:extLst xmlns:a="http://schemas.openxmlformats.org/drawingml/2006/main">
               <a:ext uri="{FF2B5EF4-FFF2-40B4-BE49-F238E27FC236}">
-                <a16:creationId xmlns:a16="http://schemas.microsoft.com/office/drawing/2014/main" id="{31D9D640-3BAC-4E4B-8FEB-95C336248DE3}"/>
+                <a16:creationId xmlns:a16="http://schemas.microsoft.com/office/drawing/2014/main" id="{14B1D018-52B0-4684-8DBD-7D1002C91F6B}"/>
               </a:ext>
             </a:extLst>
           </p:cNvPr>
@@ -26344,7 +26344,7 @@
           <p:cNvPr id="10" name="Delen door 0,5">
             <a:extLst xmlns:a="http://schemas.openxmlformats.org/drawingml/2006/main">
               <a:ext uri="{FF2B5EF4-FFF2-40B4-BE49-F238E27FC236}">
-                <a16:creationId xmlns:a16="http://schemas.microsoft.com/office/drawing/2014/main" id="{E9008F1B-B06D-404E-816C-82BFB142F38F}"/>
+                <a16:creationId xmlns:a16="http://schemas.microsoft.com/office/drawing/2014/main" id="{EEE91346-5E78-4B28-B7C0-4399E91F069E}"/>
               </a:ext>
             </a:extLst>
           </p:cNvPr>
@@ -26401,7 +26401,7 @@
           <p:cNvPr id="11" name="Q = 24 / 0,5 = 48 kaartjes">
             <a:extLst xmlns:a="http://schemas.openxmlformats.org/drawingml/2006/main">
               <a:ext uri="{FF2B5EF4-FFF2-40B4-BE49-F238E27FC236}">
-                <a16:creationId xmlns:a16="http://schemas.microsoft.com/office/drawing/2014/main" id="{A23D93BA-5035-4FA7-9F86-949A26ABC6F8}"/>
+                <a16:creationId xmlns:a16="http://schemas.microsoft.com/office/drawing/2014/main" id="{70C6E780-7C7A-401B-A686-A1728321095B}"/>
               </a:ext>
             </a:extLst>
           </p:cNvPr>
@@ -26458,7 +26458,7 @@
           <p:cNvPr id="12" name="Controle: 40 − 0,5 × 48 = € 16 per kaartje">
             <a:extLst xmlns:a="http://schemas.openxmlformats.org/drawingml/2006/main">
               <a:ext uri="{FF2B5EF4-FFF2-40B4-BE49-F238E27FC236}">
-                <a16:creationId xmlns:a16="http://schemas.microsoft.com/office/drawing/2014/main" id="{4A925F8B-099E-4125-9C3A-EE692D47EE8B}"/>
+                <a16:creationId xmlns:a16="http://schemas.microsoft.com/office/drawing/2014/main" id="{6FFB3D92-0700-41DA-8B45-2CC00B4A5201}"/>
               </a:ext>
             </a:extLst>
           </p:cNvPr>
@@ -26515,7 +26515,7 @@
           <p:cNvPr id="13" name="Q = 48 is hier gevraagd én verkocht.&#10;Zonder aanbodfunctie is">
             <a:extLst xmlns:a="http://schemas.openxmlformats.org/drawingml/2006/main">
               <a:ext uri="{FF2B5EF4-FFF2-40B4-BE49-F238E27FC236}">
-                <a16:creationId xmlns:a16="http://schemas.microsoft.com/office/drawing/2014/main" id="{0C9D4019-110E-44BC-9651-2381885AD2F7}"/>
+                <a16:creationId xmlns:a16="http://schemas.microsoft.com/office/drawing/2014/main" id="{BE6B625E-3EC3-429A-B90A-8681AD1C1258}"/>
               </a:ext>
             </a:extLst>
           </p:cNvPr>
@@ -26593,7 +26593,7 @@
     </p:spTree>
     <p:extLst>
       <p:ext uri="{BB962C8B-B14F-4D97-AF65-F5344CB8AC3E}">
-        <p14:creationId xmlns:p14="http://schemas.microsoft.com/office/powerpoint/2010/main" val="964958264"/>
+        <p14:creationId xmlns:p14="http://schemas.microsoft.com/office/powerpoint/2010/main" val="1712240428"/>
       </p:ext>
     </p:extLst>
   </p:cSld>
@@ -26624,7 +26624,7 @@
           <p:cNvPr id="8" name="Twee assensnijpunten voor V">
             <a:extLst xmlns:a="http://schemas.openxmlformats.org/drawingml/2006/main">
               <a:ext uri="{FF2B5EF4-FFF2-40B4-BE49-F238E27FC236}">
-                <a16:creationId xmlns:a16="http://schemas.microsoft.com/office/drawing/2014/main" id="{8D6FE80F-A22B-49F2-A413-E981006DB2E2}"/>
+                <a16:creationId xmlns:a16="http://schemas.microsoft.com/office/drawing/2014/main" id="{F33A52FA-5844-4DC8-B879-5BE325924C30}"/>
               </a:ext>
             </a:extLst>
           </p:cNvPr>
@@ -26681,7 +26681,7 @@
           <p:cNvPr id="2" name="">
             <a:extLst xmlns:a="http://schemas.openxmlformats.org/drawingml/2006/main">
               <a:ext uri="{FF2B5EF4-FFF2-40B4-BE49-F238E27FC236}">
-                <a16:creationId xmlns:a16="http://schemas.microsoft.com/office/drawing/2014/main" id="{4A71E670-9EF0-4879-9467-109FAC985979}"/>
+                <a16:creationId xmlns:a16="http://schemas.microsoft.com/office/drawing/2014/main" id="{64E7DCAF-647D-4A2A-938D-9DD31D659D87}"/>
               </a:ext>
             </a:extLst>
           </p:cNvPr>
@@ -26710,7 +26710,7 @@
           <p:cNvPr id="3" name="Uitlegvoorbeeld — niet uit het boek">
             <a:extLst xmlns:a="http://schemas.openxmlformats.org/drawingml/2006/main">
               <a:ext uri="{FF2B5EF4-FFF2-40B4-BE49-F238E27FC236}">
-                <a16:creationId xmlns:a16="http://schemas.microsoft.com/office/drawing/2014/main" id="{0FAE83F0-4104-4633-A93B-200025FA70F1}"/>
+                <a16:creationId xmlns:a16="http://schemas.microsoft.com/office/drawing/2014/main" id="{334C45CE-8C6A-42D2-8B51-0470F598AB17}"/>
               </a:ext>
             </a:extLst>
           </p:cNvPr>
@@ -26767,7 +26767,7 @@
           <p:cNvPr id="4" name="7">
             <a:extLst xmlns:a="http://schemas.openxmlformats.org/drawingml/2006/main">
               <a:ext uri="{FF2B5EF4-FFF2-40B4-BE49-F238E27FC236}">
-                <a16:creationId xmlns:a16="http://schemas.microsoft.com/office/drawing/2014/main" id="{70AE6CDC-2AC1-478D-A0B7-5B977DE119C7}"/>
+                <a16:creationId xmlns:a16="http://schemas.microsoft.com/office/drawing/2014/main" id="{C8E2A703-1A5E-475A-90E7-BA0B42FFAD1D}"/>
               </a:ext>
             </a:extLst>
           </p:cNvPr>
@@ -26824,7 +26824,7 @@
           <p:cNvPr id="5" name="Theatermiddag: P = 40 − 0,5Q">
             <a:extLst xmlns:a="http://schemas.openxmlformats.org/drawingml/2006/main">
               <a:ext uri="{FF2B5EF4-FFF2-40B4-BE49-F238E27FC236}">
-                <a16:creationId xmlns:a16="http://schemas.microsoft.com/office/drawing/2014/main" id="{DD7385A8-7AF8-477E-8B8C-E415B9AF36A8}"/>
+                <a16:creationId xmlns:a16="http://schemas.microsoft.com/office/drawing/2014/main" id="{9B73B721-C645-4D16-A2DA-1DAB3B5BCBBA}"/>
               </a:ext>
             </a:extLst>
           </p:cNvPr>
@@ -27139,7 +27139,7 @@
           <p:cNvPr id="7" name="Horizontaal: Q (kaartjes)&#10;Verticaal: P (€ per kaartje)">
             <a:extLst xmlns:a="http://schemas.openxmlformats.org/drawingml/2006/main">
               <a:ext uri="{FF2B5EF4-FFF2-40B4-BE49-F238E27FC236}">
-                <a16:creationId xmlns:a16="http://schemas.microsoft.com/office/drawing/2014/main" id="{A6DC591F-CC07-4074-81BD-7DAE9FB446E6}"/>
+                <a16:creationId xmlns:a16="http://schemas.microsoft.com/office/drawing/2014/main" id="{42235BAE-F355-4BF8-B3BE-6B2FC8CA882C}"/>
               </a:ext>
             </a:extLst>
           </p:cNvPr>
@@ -27217,7 +27217,7 @@
     </p:spTree>
     <p:extLst>
       <p:ext uri="{BB962C8B-B14F-4D97-AF65-F5344CB8AC3E}">
-        <p14:creationId xmlns:p14="http://schemas.microsoft.com/office/powerpoint/2010/main" val="593327731"/>
+        <p14:creationId xmlns:p14="http://schemas.microsoft.com/office/powerpoint/2010/main" val="2065431475"/>
       </p:ext>
     </p:extLst>
   </p:cSld>
@@ -27248,7 +27248,7 @@
           <p:cNvPr id="10" name="De vraaglijn tekenen">
             <a:extLst xmlns:a="http://schemas.openxmlformats.org/drawingml/2006/main">
               <a:ext uri="{FF2B5EF4-FFF2-40B4-BE49-F238E27FC236}">
-                <a16:creationId xmlns:a16="http://schemas.microsoft.com/office/drawing/2014/main" id="{2E54FCB6-08D5-41A9-9B3A-AAD506DE36DE}"/>
+                <a16:creationId xmlns:a16="http://schemas.microsoft.com/office/drawing/2014/main" id="{D5692708-4849-4227-80A3-7FA3AFCB7DA8}"/>
               </a:ext>
             </a:extLst>
           </p:cNvPr>
@@ -27305,7 +27305,7 @@
           <p:cNvPr id="2" name="">
             <a:extLst xmlns:a="http://schemas.openxmlformats.org/drawingml/2006/main">
               <a:ext uri="{FF2B5EF4-FFF2-40B4-BE49-F238E27FC236}">
-                <a16:creationId xmlns:a16="http://schemas.microsoft.com/office/drawing/2014/main" id="{E0E73F6C-EF0F-4D22-A127-B58395701554}"/>
+                <a16:creationId xmlns:a16="http://schemas.microsoft.com/office/drawing/2014/main" id="{7AD14A31-199E-43A8-A146-4085D1E60681}"/>
               </a:ext>
             </a:extLst>
           </p:cNvPr>
@@ -27334,7 +27334,7 @@
           <p:cNvPr id="3" name="Uitlegvoorbeeld — niet uit het boek">
             <a:extLst xmlns:a="http://schemas.openxmlformats.org/drawingml/2006/main">
               <a:ext uri="{FF2B5EF4-FFF2-40B4-BE49-F238E27FC236}">
-                <a16:creationId xmlns:a16="http://schemas.microsoft.com/office/drawing/2014/main" id="{DDDE8EE0-6C15-4BB3-B47D-AF47CDBB9F60}"/>
+                <a16:creationId xmlns:a16="http://schemas.microsoft.com/office/drawing/2014/main" id="{DE22F8D6-7068-4EA7-BD61-2D48CABAC7DB}"/>
               </a:ext>
             </a:extLst>
           </p:cNvPr>
@@ -27391,7 +27391,7 @@
           <p:cNvPr id="4" name="8">
             <a:extLst xmlns:a="http://schemas.openxmlformats.org/drawingml/2006/main">
               <a:ext uri="{FF2B5EF4-FFF2-40B4-BE49-F238E27FC236}">
-                <a16:creationId xmlns:a16="http://schemas.microsoft.com/office/drawing/2014/main" id="{8446DB01-BE45-4777-8873-B945CBB75C7B}"/>
+                <a16:creationId xmlns:a16="http://schemas.microsoft.com/office/drawing/2014/main" id="{EC339135-0E37-448C-B5B6-3C0071D4E893}"/>
               </a:ext>
             </a:extLst>
           </p:cNvPr>
@@ -27448,7 +27448,7 @@
           <p:cNvPr id="5" name="Theatermiddag: P = 40 − 0,5Q">
             <a:extLst xmlns:a="http://schemas.openxmlformats.org/drawingml/2006/main">
               <a:ext uri="{FF2B5EF4-FFF2-40B4-BE49-F238E27FC236}">
-                <a16:creationId xmlns:a16="http://schemas.microsoft.com/office/drawing/2014/main" id="{3BC7A2F9-3638-487F-964B-7015607B5986}"/>
+                <a16:creationId xmlns:a16="http://schemas.microsoft.com/office/drawing/2014/main" id="{BA034D28-D12D-4422-BF78-037D9C55756A}"/>
               </a:ext>
             </a:extLst>
           </p:cNvPr>
@@ -27512,7 +27512,7 @@
         </p:xfrm>
         <a:graphic xmlns:a="http://schemas.openxmlformats.org/drawingml/2006/main">
           <a:graphicData uri="http://schemas.openxmlformats.org/drawingml/2006/chart">
-            <c:chart xmlns:r="http://schemas.openxmlformats.org/officeDocument/2006/relationships" xmlns:c="http://schemas.openxmlformats.org/drawingml/2006/chart" r:id="R49b205fc610b47b3"/>
+            <c:chart xmlns:r="http://schemas.openxmlformats.org/officeDocument/2006/relationships" xmlns:c="http://schemas.openxmlformats.org/drawingml/2006/chart" r:id="R609d0c24c1174a9f"/>
           </a:graphicData>
         </a:graphic>
       </p:graphicFrame>
@@ -27521,7 +27521,7 @@
           <p:cNvPr id="7" name="Assen en schaal">
             <a:extLst xmlns:a="http://schemas.openxmlformats.org/drawingml/2006/main">
               <a:ext uri="{FF2B5EF4-FFF2-40B4-BE49-F238E27FC236}">
-                <a16:creationId xmlns:a16="http://schemas.microsoft.com/office/drawing/2014/main" id="{2EE490A9-8578-4027-B773-C5166311DF52}"/>
+                <a16:creationId xmlns:a16="http://schemas.microsoft.com/office/drawing/2014/main" id="{5C84569C-64C6-45C4-8B82-2DDD0CCEC7C2}"/>
               </a:ext>
             </a:extLst>
           </p:cNvPr>
@@ -27578,7 +27578,7 @@
           <p:cNvPr id="8" name="Q horizontaal&#10;P verticaal&#10;Nul op beide assen">
             <a:extLst xmlns:a="http://schemas.openxmlformats.org/drawingml/2006/main">
               <a:ext uri="{FF2B5EF4-FFF2-40B4-BE49-F238E27FC236}">
-                <a16:creationId xmlns:a16="http://schemas.microsoft.com/office/drawing/2014/main" id="{AF8010E5-B7BE-4F64-B7B7-4CBFF9061A06}"/>
+                <a16:creationId xmlns:a16="http://schemas.microsoft.com/office/drawing/2014/main" id="{41935482-15D1-44B8-B7BA-E82378FDB3B1}"/>
               </a:ext>
             </a:extLst>
           </p:cNvPr>
@@ -27681,7 +27681,7 @@
           <p:cNvPr id="9" name="V verbindt&#10;(0; 40) en (80; 0).">
             <a:extLst xmlns:a="http://schemas.openxmlformats.org/drawingml/2006/main">
               <a:ext uri="{FF2B5EF4-FFF2-40B4-BE49-F238E27FC236}">
-                <a16:creationId xmlns:a16="http://schemas.microsoft.com/office/drawing/2014/main" id="{D503EAE4-CF51-4A3B-99A4-8A050C100A3C}"/>
+                <a16:creationId xmlns:a16="http://schemas.microsoft.com/office/drawing/2014/main" id="{EE4C30F9-59B9-4BD6-9D64-D8624FFB6176}"/>
               </a:ext>
             </a:extLst>
           </p:cNvPr>
@@ -27759,7 +27759,7 @@
     </p:spTree>
     <p:extLst>
       <p:ext uri="{BB962C8B-B14F-4D97-AF65-F5344CB8AC3E}">
-        <p14:creationId xmlns:p14="http://schemas.microsoft.com/office/powerpoint/2010/main" val="1967752926"/>
+        <p14:creationId xmlns:p14="http://schemas.microsoft.com/office/powerpoint/2010/main" val="1434163856"/>
       </p:ext>
     </p:extLst>
   </p:cSld>
@@ -27790,7 +27790,7 @@
           <p:cNvPr id="10" name="De prijslijn en de verkochte hoeveelheid">
             <a:extLst xmlns:a="http://schemas.openxmlformats.org/drawingml/2006/main">
               <a:ext uri="{FF2B5EF4-FFF2-40B4-BE49-F238E27FC236}">
-                <a16:creationId xmlns:a16="http://schemas.microsoft.com/office/drawing/2014/main" id="{2E6DB7C0-CFBF-49A8-96AE-8316F6C47B26}"/>
+                <a16:creationId xmlns:a16="http://schemas.microsoft.com/office/drawing/2014/main" id="{BB6A2B7F-C9D2-44AB-B3E3-1C5D56273F65}"/>
               </a:ext>
             </a:extLst>
           </p:cNvPr>
@@ -27847,7 +27847,7 @@
           <p:cNvPr id="2" name="">
             <a:extLst xmlns:a="http://schemas.openxmlformats.org/drawingml/2006/main">
               <a:ext uri="{FF2B5EF4-FFF2-40B4-BE49-F238E27FC236}">
-                <a16:creationId xmlns:a16="http://schemas.microsoft.com/office/drawing/2014/main" id="{FC1C8394-BB1D-42AD-AFBF-6BB4EE633B2B}"/>
+                <a16:creationId xmlns:a16="http://schemas.microsoft.com/office/drawing/2014/main" id="{B2F018B9-E266-43D6-AB43-EA3E6AEE7040}"/>
               </a:ext>
             </a:extLst>
           </p:cNvPr>
@@ -27876,7 +27876,7 @@
           <p:cNvPr id="3" name="Uitlegvoorbeeld — niet uit het boek">
             <a:extLst xmlns:a="http://schemas.openxmlformats.org/drawingml/2006/main">
               <a:ext uri="{FF2B5EF4-FFF2-40B4-BE49-F238E27FC236}">
-                <a16:creationId xmlns:a16="http://schemas.microsoft.com/office/drawing/2014/main" id="{CD4A3FAA-D9CE-4AE3-94E3-BB9EA319807C}"/>
+                <a16:creationId xmlns:a16="http://schemas.microsoft.com/office/drawing/2014/main" id="{1E688E38-BAD6-43BB-B2BC-987EDAF8D397}"/>
               </a:ext>
             </a:extLst>
           </p:cNvPr>
@@ -27933,7 +27933,7 @@
           <p:cNvPr id="4" name="9">
             <a:extLst xmlns:a="http://schemas.openxmlformats.org/drawingml/2006/main">
               <a:ext uri="{FF2B5EF4-FFF2-40B4-BE49-F238E27FC236}">
-                <a16:creationId xmlns:a16="http://schemas.microsoft.com/office/drawing/2014/main" id="{03E32DE4-9F82-4560-9410-8A39B4582F02}"/>
+                <a16:creationId xmlns:a16="http://schemas.microsoft.com/office/drawing/2014/main" id="{B2809CCB-1C11-4C84-9015-49EBD30A5279}"/>
               </a:ext>
             </a:extLst>
           </p:cNvPr>
@@ -27990,7 +27990,7 @@
           <p:cNvPr id="5" name="Theatermiddag: P = 40 − 0,5Q en prijs € 16">
             <a:extLst xmlns:a="http://schemas.openxmlformats.org/drawingml/2006/main">
               <a:ext uri="{FF2B5EF4-FFF2-40B4-BE49-F238E27FC236}">
-                <a16:creationId xmlns:a16="http://schemas.microsoft.com/office/drawing/2014/main" id="{AE7E8FC8-79B1-469C-BB03-DF2F97E4DFBA}"/>
+                <a16:creationId xmlns:a16="http://schemas.microsoft.com/office/drawing/2014/main" id="{44E8F20B-3821-4AC3-856E-EE2F260563A5}"/>
               </a:ext>
             </a:extLst>
           </p:cNvPr>
@@ -28054,7 +28054,7 @@
         </p:xfrm>
         <a:graphic xmlns:a="http://schemas.openxmlformats.org/drawingml/2006/main">
           <a:graphicData uri="http://schemas.openxmlformats.org/drawingml/2006/chart">
-            <c:chart xmlns:r="http://schemas.openxmlformats.org/officeDocument/2006/relationships" xmlns:c="http://schemas.openxmlformats.org/drawingml/2006/chart" r:id="Rcce06be4299d448d"/>
+            <c:chart xmlns:r="http://schemas.openxmlformats.org/officeDocument/2006/relationships" xmlns:c="http://schemas.openxmlformats.org/drawingml/2006/chart" r:id="R822c114633934534"/>
           </a:graphicData>
         </a:graphic>
       </p:graphicFrame>
@@ -28063,7 +28063,7 @@
           <p:cNvPr id="7" name="P = 16">
             <a:extLst xmlns:a="http://schemas.openxmlformats.org/drawingml/2006/main">
               <a:ext uri="{FF2B5EF4-FFF2-40B4-BE49-F238E27FC236}">
-                <a16:creationId xmlns:a16="http://schemas.microsoft.com/office/drawing/2014/main" id="{A2A1C324-2AD9-4085-8252-C595F22AE327}"/>
+                <a16:creationId xmlns:a16="http://schemas.microsoft.com/office/drawing/2014/main" id="{B577E8BB-57D3-4793-ACA9-BFB25A097944}"/>
               </a:ext>
             </a:extLst>
           </p:cNvPr>
@@ -28120,7 +28120,7 @@
           <p:cNvPr id="8" name="Een horizontale lijn:&#10;elk kaartje kost&#10;evenveel.">
             <a:extLst xmlns:a="http://schemas.openxmlformats.org/drawingml/2006/main">
               <a:ext uri="{FF2B5EF4-FFF2-40B4-BE49-F238E27FC236}">
-                <a16:creationId xmlns:a16="http://schemas.microsoft.com/office/drawing/2014/main" id="{5882049D-4259-44E9-B149-44D5CF8ADCD5}"/>
+                <a16:creationId xmlns:a16="http://schemas.microsoft.com/office/drawing/2014/main" id="{78C8D4A8-F3E9-42D7-9F67-9A03EE35C6E9}"/>
               </a:ext>
             </a:extLst>
           </p:cNvPr>
@@ -28223,7 +28223,7 @@
           <p:cNvPr id="9" name="Snijpunt (48; 16)&#10;Dus Q = 48 kaartjes.">
             <a:extLst xmlns:a="http://schemas.openxmlformats.org/drawingml/2006/main">
               <a:ext uri="{FF2B5EF4-FFF2-40B4-BE49-F238E27FC236}">
-                <a16:creationId xmlns:a16="http://schemas.microsoft.com/office/drawing/2014/main" id="{4BDA8964-C2C9-4224-9E2A-1D0638A0C0C5}"/>
+                <a16:creationId xmlns:a16="http://schemas.microsoft.com/office/drawing/2014/main" id="{4C43E761-5033-4A94-80E4-68A1B27B63C0}"/>
               </a:ext>
             </a:extLst>
           </p:cNvPr>
@@ -28301,7 +28301,7 @@
     </p:spTree>
     <p:extLst>
       <p:ext uri="{BB962C8B-B14F-4D97-AF65-F5344CB8AC3E}">
-        <p14:creationId xmlns:p14="http://schemas.microsoft.com/office/powerpoint/2010/main" val="4956844"/>
+        <p14:creationId xmlns:p14="http://schemas.microsoft.com/office/powerpoint/2010/main" val="585126424"/>
       </p:ext>
     </p:extLst>
   </p:cSld>
